--- a/Ohio-Division-of-EMS-Presentation.pptx
+++ b/Ohio-Division-of-EMS-Presentation.pptx
@@ -3113,7 +3113,7 @@
     <p:bg>
       <p:bgPr>
         <a:solidFill>
-          <a:srgbClr val="1B365F"/>
+          <a:srgbClr val="0B1A33"/>
         </a:solidFill>
         <a:effectLst/>
       </p:bgPr>
@@ -3127,20 +3127,20 @@
       <p:grpSpPr/>
       <p:sp>
         <p:nvSpPr>
-          <p:cNvPr id="2" name="Rectangle 1"/>
+          <p:cNvPr id="2" name="Rounded Rectangle 1"/>
           <p:cNvSpPr/>
           <p:nvPr/>
         </p:nvSpPr>
         <p:spPr>
           <a:xfrm>
-            <a:off x="0" y="2560320"/>
-            <a:ext cx="9144000" cy="54864"/>
-          </a:xfrm>
-          <a:prstGeom prst="rect">
+            <a:off x="914400" y="1371600"/>
+            <a:ext cx="7315200" cy="4114800"/>
+          </a:xfrm>
+          <a:prstGeom prst="roundRect">
             <a:avLst/>
           </a:prstGeom>
           <a:solidFill>
-            <a:srgbClr val="CE1A2B"/>
+            <a:srgbClr val="122647"/>
           </a:solidFill>
           <a:ln>
             <a:noFill/>
@@ -3170,14 +3170,57 @@
       </p:sp>
       <p:sp>
         <p:nvSpPr>
-          <p:cNvPr id="3" name="TextBox 2"/>
+          <p:cNvPr id="3" name="Rectangle 2"/>
+          <p:cNvSpPr/>
+          <p:nvPr/>
+        </p:nvSpPr>
+        <p:spPr>
+          <a:xfrm>
+            <a:off x="914400" y="1371600"/>
+            <a:ext cx="7315200" cy="36576"/>
+          </a:xfrm>
+          <a:prstGeom prst="rect">
+            <a:avLst/>
+          </a:prstGeom>
+          <a:solidFill>
+            <a:srgbClr val="2E75F7"/>
+          </a:solidFill>
+          <a:ln>
+            <a:noFill/>
+          </a:ln>
+        </p:spPr>
+        <p:style>
+          <a:lnRef idx="1">
+            <a:schemeClr val="accent1"/>
+          </a:lnRef>
+          <a:fillRef idx="3">
+            <a:schemeClr val="accent1"/>
+          </a:fillRef>
+          <a:effectRef idx="2">
+            <a:schemeClr val="accent1"/>
+          </a:effectRef>
+          <a:fontRef idx="minor">
+            <a:schemeClr val="lt1"/>
+          </a:fontRef>
+        </p:style>
+        <p:txBody>
+          <a:bodyPr rtlCol="0" anchor="ctr"/>
+          <a:lstStyle/>
+          <a:p>
+            <a:pPr algn="ctr"/>
+          </a:p>
+        </p:txBody>
+      </p:sp>
+      <p:sp>
+        <p:nvSpPr>
+          <p:cNvPr id="4" name="TextBox 3"/>
           <p:cNvSpPr txBox="1"/>
           <p:nvPr/>
         </p:nvSpPr>
         <p:spPr>
           <a:xfrm>
-            <a:off x="457200" y="914400"/>
-            <a:ext cx="8229600" cy="1371600"/>
+            <a:off x="1371600" y="1828800"/>
+            <a:ext cx="6400800" cy="1097280"/>
           </a:xfrm>
           <a:prstGeom prst="rect">
             <a:avLst/>
@@ -3191,29 +3234,29 @@
           <a:lstStyle/>
           <a:p>
             <a:pPr algn="ctr">
-              <a:defRPr sz="4000" b="1">
-                <a:solidFill>
-                  <a:srgbClr val="FFFFFF"/>
-                </a:solidFill>
-                <a:latin typeface="Calibri"/>
-              </a:defRPr>
-            </a:pPr>
-            <a:r>
-              <a:t>The Ohio Division of EMS Website</a:t>
-            </a:r>
-          </a:p>
-        </p:txBody>
-      </p:sp>
-      <p:sp>
-        <p:nvSpPr>
-          <p:cNvPr id="4" name="TextBox 3"/>
+              <a:defRPr sz="2000" b="1">
+                <a:solidFill>
+                  <a:srgbClr val="94A3B8"/>
+                </a:solidFill>
+                <a:latin typeface="Calibri"/>
+              </a:defRPr>
+            </a:pPr>
+            <a:r>
+              <a:t>THE OHIO DIVISION OF</a:t>
+            </a:r>
+          </a:p>
+        </p:txBody>
+      </p:sp>
+      <p:sp>
+        <p:nvSpPr>
+          <p:cNvPr id="5" name="TextBox 4"/>
           <p:cNvSpPr txBox="1"/>
           <p:nvPr/>
         </p:nvSpPr>
         <p:spPr>
           <a:xfrm>
-            <a:off x="457200" y="2834640"/>
-            <a:ext cx="8229600" cy="914400"/>
+            <a:off x="1371600" y="2377440"/>
+            <a:ext cx="6400800" cy="1371600"/>
           </a:xfrm>
           <a:prstGeom prst="rect">
             <a:avLst/>
@@ -3227,29 +3270,29 @@
           <a:lstStyle/>
           <a:p>
             <a:pPr algn="ctr">
-              <a:defRPr sz="2200" b="0">
-                <a:solidFill>
-                  <a:srgbClr val="CCCCCC"/>
-                </a:solidFill>
-                <a:latin typeface="Calibri"/>
-              </a:defRPr>
-            </a:pPr>
-            <a:r>
-              <a:t>OAC Rules &amp; Resources for EMS and Fire Certification Courses</a:t>
-            </a:r>
-          </a:p>
-        </p:txBody>
-      </p:sp>
-      <p:sp>
-        <p:nvSpPr>
-          <p:cNvPr id="5" name="TextBox 4"/>
+              <a:defRPr sz="4400" b="1">
+                <a:solidFill>
+                  <a:srgbClr val="FFFFFF"/>
+                </a:solidFill>
+                <a:latin typeface="Calibri"/>
+              </a:defRPr>
+            </a:pPr>
+            <a:r>
+              <a:t>EMS WEBSITE</a:t>
+            </a:r>
+          </a:p>
+        </p:txBody>
+      </p:sp>
+      <p:sp>
+        <p:nvSpPr>
+          <p:cNvPr id="6" name="TextBox 5"/>
           <p:cNvSpPr txBox="1"/>
           <p:nvPr/>
         </p:nvSpPr>
         <p:spPr>
           <a:xfrm>
-            <a:off x="457200" y="4114800"/>
-            <a:ext cx="8229600" cy="457200"/>
+            <a:off x="1371600" y="3474720"/>
+            <a:ext cx="6400800" cy="731520"/>
           </a:xfrm>
           <a:prstGeom prst="rect">
             <a:avLst/>
@@ -3265,27 +3308,113 @@
             <a:pPr algn="ctr">
               <a:defRPr sz="1600" b="0">
                 <a:solidFill>
-                  <a:srgbClr val="D4A01E"/>
-                </a:solidFill>
-                <a:latin typeface="Calibri"/>
-              </a:defRPr>
-            </a:pPr>
-            <a:r>
-              <a:t>Capstone 1  |  NFPA 1041 Fire &amp; EMS Instructor I and II</a:t>
-            </a:r>
-          </a:p>
-        </p:txBody>
-      </p:sp>
-      <p:sp>
-        <p:nvSpPr>
-          <p:cNvPr id="6" name="TextBox 5"/>
+                  <a:srgbClr val="94A3B8"/>
+                </a:solidFill>
+                <a:latin typeface="Calibri"/>
+              </a:defRPr>
+            </a:pPr>
+            <a:r>
+              <a:t>OAC Rules &amp; Resources for EMS and Fire Certification Courses</a:t>
+            </a:r>
+          </a:p>
+        </p:txBody>
+      </p:sp>
+      <p:sp>
+        <p:nvSpPr>
+          <p:cNvPr id="7" name="Rectangle 6"/>
+          <p:cNvSpPr/>
+          <p:nvPr/>
+        </p:nvSpPr>
+        <p:spPr>
+          <a:xfrm>
+            <a:off x="0" y="4206240"/>
+            <a:ext cx="9144000" cy="36576"/>
+          </a:xfrm>
+          <a:prstGeom prst="rect">
+            <a:avLst/>
+          </a:prstGeom>
+          <a:solidFill>
+            <a:srgbClr val="2E75F7"/>
+          </a:solidFill>
+          <a:ln>
+            <a:noFill/>
+          </a:ln>
+        </p:spPr>
+        <p:style>
+          <a:lnRef idx="1">
+            <a:schemeClr val="accent1"/>
+          </a:lnRef>
+          <a:fillRef idx="3">
+            <a:schemeClr val="accent1"/>
+          </a:fillRef>
+          <a:effectRef idx="2">
+            <a:schemeClr val="accent1"/>
+          </a:effectRef>
+          <a:fontRef idx="minor">
+            <a:schemeClr val="lt1"/>
+          </a:fontRef>
+        </p:style>
+        <p:txBody>
+          <a:bodyPr rtlCol="0" anchor="ctr"/>
+          <a:lstStyle/>
+          <a:p>
+            <a:pPr algn="ctr"/>
+          </a:p>
+        </p:txBody>
+      </p:sp>
+      <p:sp>
+        <p:nvSpPr>
+          <p:cNvPr id="8" name="Rectangle 7"/>
+          <p:cNvSpPr/>
+          <p:nvPr/>
+        </p:nvSpPr>
+        <p:spPr>
+          <a:xfrm>
+            <a:off x="4572000" y="4206240"/>
+            <a:ext cx="4572000" cy="36576"/>
+          </a:xfrm>
+          <a:prstGeom prst="rect">
+            <a:avLst/>
+          </a:prstGeom>
+          <a:solidFill>
+            <a:srgbClr val="0B1A33"/>
+          </a:solidFill>
+          <a:ln>
+            <a:noFill/>
+          </a:ln>
+        </p:spPr>
+        <p:style>
+          <a:lnRef idx="1">
+            <a:schemeClr val="accent1"/>
+          </a:lnRef>
+          <a:fillRef idx="3">
+            <a:schemeClr val="accent1"/>
+          </a:fillRef>
+          <a:effectRef idx="2">
+            <a:schemeClr val="accent1"/>
+          </a:effectRef>
+          <a:fontRef idx="minor">
+            <a:schemeClr val="lt1"/>
+          </a:fontRef>
+        </p:style>
+        <p:txBody>
+          <a:bodyPr rtlCol="0" anchor="ctr"/>
+          <a:lstStyle/>
+          <a:p>
+            <a:pPr algn="ctr"/>
+          </a:p>
+        </p:txBody>
+      </p:sp>
+      <p:sp>
+        <p:nvSpPr>
+          <p:cNvPr id="9" name="TextBox 8"/>
           <p:cNvSpPr txBox="1"/>
           <p:nvPr/>
         </p:nvSpPr>
         <p:spPr>
           <a:xfrm>
-            <a:off x="457200" y="5029200"/>
-            <a:ext cx="8229600" cy="731520"/>
+            <a:off x="1371600" y="4480560"/>
+            <a:ext cx="6400800" cy="457200"/>
           </a:xfrm>
           <a:prstGeom prst="rect">
             <a:avLst/>
@@ -3299,9 +3428,45 @@
           <a:lstStyle/>
           <a:p>
             <a:pPr algn="ctr">
-              <a:defRPr sz="1800" b="0">
-                <a:solidFill>
-                  <a:srgbClr val="99BBDD"/>
+              <a:defRPr sz="1100" b="1">
+                <a:solidFill>
+                  <a:srgbClr val="2E75F7"/>
+                </a:solidFill>
+                <a:latin typeface="Calibri"/>
+              </a:defRPr>
+            </a:pPr>
+            <a:r>
+              <a:t>CAPSTONE 1  |  NFPA 1041  |  FIRE &amp; EMS INSTRUCTOR I AND II</a:t>
+            </a:r>
+          </a:p>
+        </p:txBody>
+      </p:sp>
+      <p:sp>
+        <p:nvSpPr>
+          <p:cNvPr id="10" name="TextBox 9"/>
+          <p:cNvSpPr txBox="1"/>
+          <p:nvPr/>
+        </p:nvSpPr>
+        <p:spPr>
+          <a:xfrm>
+            <a:off x="1371600" y="5029200"/>
+            <a:ext cx="6400800" cy="365760"/>
+          </a:xfrm>
+          <a:prstGeom prst="rect">
+            <a:avLst/>
+          </a:prstGeom>
+          <a:noFill/>
+        </p:spPr>
+        <p:txBody>
+          <a:bodyPr wrap="square">
+            <a:spAutoFit/>
+          </a:bodyPr>
+          <a:lstStyle/>
+          <a:p>
+            <a:pPr algn="ctr">
+              <a:defRPr sz="1400" b="0">
+                <a:solidFill>
+                  <a:srgbClr val="5B9BFF"/>
                 </a:solidFill>
                 <a:latin typeface="Calibri"/>
               </a:defRPr>
@@ -3326,7 +3491,7 @@
     <p:bg>
       <p:bgPr>
         <a:solidFill>
-          <a:srgbClr val="FFFFFF"/>
+          <a:srgbClr val="0B1A33"/>
         </a:solidFill>
         <a:effectLst/>
       </p:bgPr>
@@ -3340,20 +3505,20 @@
       <p:grpSpPr/>
       <p:sp>
         <p:nvSpPr>
-          <p:cNvPr id="2" name="Rectangle 1"/>
+          <p:cNvPr id="2" name="Rounded Rectangle 1"/>
           <p:cNvSpPr/>
           <p:nvPr/>
         </p:nvSpPr>
         <p:spPr>
           <a:xfrm>
-            <a:off x="0" y="0"/>
-            <a:ext cx="9144000" cy="1097280"/>
-          </a:xfrm>
-          <a:prstGeom prst="rect">
+            <a:off x="365760" y="274320"/>
+            <a:ext cx="8412480" cy="6309360"/>
+          </a:xfrm>
+          <a:prstGeom prst="roundRect">
             <a:avLst/>
           </a:prstGeom>
           <a:solidFill>
-            <a:srgbClr val="1B365F"/>
+            <a:srgbClr val="122647"/>
           </a:solidFill>
           <a:ln>
             <a:noFill/>
@@ -3389,14 +3554,14 @@
         </p:nvSpPr>
         <p:spPr>
           <a:xfrm>
-            <a:off x="0" y="1097280"/>
-            <a:ext cx="9144000" cy="45720"/>
+            <a:off x="365760" y="274320"/>
+            <a:ext cx="8412480" cy="36576"/>
           </a:xfrm>
           <a:prstGeom prst="rect">
             <a:avLst/>
           </a:prstGeom>
           <a:solidFill>
-            <a:srgbClr val="CE1A2B"/>
+            <a:srgbClr val="2E75F7"/>
           </a:solidFill>
           <a:ln>
             <a:noFill/>
@@ -3432,8 +3597,8 @@
         </p:nvSpPr>
         <p:spPr>
           <a:xfrm>
-            <a:off x="457200" y="137160"/>
-            <a:ext cx="8229600" cy="822960"/>
+            <a:off x="731520" y="502920"/>
+            <a:ext cx="7680960" cy="640080"/>
           </a:xfrm>
           <a:prstGeom prst="rect">
             <a:avLst/>
@@ -3447,7 +3612,7 @@
           <a:lstStyle/>
           <a:p>
             <a:pPr algn="l">
-              <a:defRPr sz="2800" b="1">
+              <a:defRPr sz="2400" b="1">
                 <a:solidFill>
                   <a:srgbClr val="FFFFFF"/>
                 </a:solidFill>
@@ -3455,7 +3620,7 @@
               </a:defRPr>
             </a:pPr>
             <a:r>
-              <a:t>Key OAC Chapters on ems.ohio.gov</a:t>
+              <a:t>KEY OAC CHAPTERS — TITLE 4765</a:t>
             </a:r>
           </a:p>
         </p:txBody>
@@ -3468,8 +3633,8 @@
         </p:nvSpPr>
         <p:spPr>
           <a:xfrm>
-            <a:off x="457200" y="1234440"/>
-            <a:ext cx="8229600" cy="457200"/>
+            <a:off x="731520" y="1097280"/>
+            <a:ext cx="7680960" cy="365760"/>
           </a:xfrm>
           <a:prstGeom prst="rect">
             <a:avLst/>
@@ -3483,9 +3648,9 @@
           <a:lstStyle/>
           <a:p>
             <a:pPr algn="l">
-              <a:defRPr sz="1400" b="0">
-                <a:solidFill>
-                  <a:srgbClr val="666666"/>
+              <a:defRPr sz="1200" b="0">
+                <a:solidFill>
+                  <a:srgbClr val="94A3B8"/>
                 </a:solidFill>
                 <a:latin typeface="Calibri"/>
               </a:defRPr>
@@ -3504,8 +3669,8 @@
         </p:nvSpPr>
         <p:spPr>
           <a:xfrm>
-            <a:off x="640080" y="1691640"/>
-            <a:ext cx="7863840" cy="4251960"/>
+            <a:off x="822960" y="1463040"/>
+            <a:ext cx="7498079" cy="4572000"/>
           </a:xfrm>
           <a:prstGeom prst="rect">
             <a:avLst/>
@@ -3520,11 +3685,11 @@
           <a:p>
             <a:pPr>
               <a:spcAft>
-                <a:spcPts val="600"/>
-              </a:spcAft>
-              <a:defRPr sz="1700">
-                <a:solidFill>
-                  <a:srgbClr val="333333"/>
+                <a:spcPts val="500"/>
+              </a:spcAft>
+              <a:defRPr sz="1500">
+                <a:solidFill>
+                  <a:srgbClr val="E2E8F0"/>
                 </a:solidFill>
                 <a:latin typeface="Calibri"/>
               </a:defRPr>
@@ -3536,11 +3701,11 @@
           <a:p>
             <a:pPr>
               <a:spcAft>
-                <a:spcPts val="600"/>
-              </a:spcAft>
-              <a:defRPr sz="1700">
-                <a:solidFill>
-                  <a:srgbClr val="333333"/>
+                <a:spcPts val="500"/>
+              </a:spcAft>
+              <a:defRPr sz="1500">
+                <a:solidFill>
+                  <a:srgbClr val="E2E8F0"/>
                 </a:solidFill>
                 <a:latin typeface="Calibri"/>
               </a:defRPr>
@@ -3552,11 +3717,11 @@
           <a:p>
             <a:pPr>
               <a:spcAft>
-                <a:spcPts val="600"/>
-              </a:spcAft>
-              <a:defRPr sz="1700">
-                <a:solidFill>
-                  <a:srgbClr val="333333"/>
+                <a:spcPts val="500"/>
+              </a:spcAft>
+              <a:defRPr sz="1500">
+                <a:solidFill>
+                  <a:srgbClr val="E2E8F0"/>
                 </a:solidFill>
                 <a:latin typeface="Calibri"/>
               </a:defRPr>
@@ -3568,11 +3733,11 @@
           <a:p>
             <a:pPr>
               <a:spcAft>
-                <a:spcPts val="600"/>
-              </a:spcAft>
-              <a:defRPr sz="1700">
-                <a:solidFill>
-                  <a:srgbClr val="333333"/>
+                <a:spcPts val="500"/>
+              </a:spcAft>
+              <a:defRPr sz="1500">
+                <a:solidFill>
+                  <a:srgbClr val="E2E8F0"/>
                 </a:solidFill>
                 <a:latin typeface="Calibri"/>
               </a:defRPr>
@@ -3584,11 +3749,11 @@
           <a:p>
             <a:pPr>
               <a:spcAft>
-                <a:spcPts val="600"/>
-              </a:spcAft>
-              <a:defRPr sz="1700">
-                <a:solidFill>
-                  <a:srgbClr val="333333"/>
+                <a:spcPts val="500"/>
+              </a:spcAft>
+              <a:defRPr sz="1500">
+                <a:solidFill>
+                  <a:srgbClr val="E2E8F0"/>
                 </a:solidFill>
                 <a:latin typeface="Calibri"/>
               </a:defRPr>
@@ -3600,11 +3765,11 @@
           <a:p>
             <a:pPr>
               <a:spcAft>
-                <a:spcPts val="600"/>
-              </a:spcAft>
-              <a:defRPr sz="1700">
-                <a:solidFill>
-                  <a:srgbClr val="333333"/>
+                <a:spcPts val="500"/>
+              </a:spcAft>
+              <a:defRPr sz="1500">
+                <a:solidFill>
+                  <a:srgbClr val="E2E8F0"/>
                 </a:solidFill>
                 <a:latin typeface="Calibri"/>
               </a:defRPr>
@@ -3616,11 +3781,11 @@
           <a:p>
             <a:pPr>
               <a:spcAft>
-                <a:spcPts val="600"/>
-              </a:spcAft>
-              <a:defRPr sz="1700">
-                <a:solidFill>
-                  <a:srgbClr val="333333"/>
+                <a:spcPts val="500"/>
+              </a:spcAft>
+              <a:defRPr sz="1500">
+                <a:solidFill>
+                  <a:srgbClr val="E2E8F0"/>
                 </a:solidFill>
                 <a:latin typeface="Calibri"/>
               </a:defRPr>
@@ -3632,11 +3797,11 @@
           <a:p>
             <a:pPr>
               <a:spcAft>
-                <a:spcPts val="600"/>
-              </a:spcAft>
-              <a:defRPr sz="1700">
-                <a:solidFill>
-                  <a:srgbClr val="333333"/>
+                <a:spcPts val="500"/>
+              </a:spcAft>
+              <a:defRPr sz="1500">
+                <a:solidFill>
+                  <a:srgbClr val="E2E8F0"/>
                 </a:solidFill>
                 <a:latin typeface="Calibri"/>
               </a:defRPr>
@@ -3648,11 +3813,11 @@
           <a:p>
             <a:pPr>
               <a:spcAft>
-                <a:spcPts val="600"/>
-              </a:spcAft>
-              <a:defRPr sz="1700">
-                <a:solidFill>
-                  <a:srgbClr val="333333"/>
+                <a:spcPts val="500"/>
+              </a:spcAft>
+              <a:defRPr sz="1500">
+                <a:solidFill>
+                  <a:srgbClr val="E2E8F0"/>
                 </a:solidFill>
                 <a:latin typeface="Calibri"/>
               </a:defRPr>
@@ -3664,11 +3829,11 @@
           <a:p>
             <a:pPr>
               <a:spcAft>
-                <a:spcPts val="600"/>
-              </a:spcAft>
-              <a:defRPr sz="1700">
-                <a:solidFill>
-                  <a:srgbClr val="333333"/>
+                <a:spcPts val="500"/>
+              </a:spcAft>
+              <a:defRPr sz="1500">
+                <a:solidFill>
+                  <a:srgbClr val="E2E8F0"/>
                 </a:solidFill>
                 <a:latin typeface="Calibri"/>
               </a:defRPr>
@@ -3687,8 +3852,8 @@
         </p:nvSpPr>
         <p:spPr>
           <a:xfrm>
-            <a:off x="274320" y="6400800"/>
-            <a:ext cx="8595360" cy="365760"/>
+            <a:off x="457200" y="6400800"/>
+            <a:ext cx="8229600" cy="274320"/>
           </a:xfrm>
           <a:prstGeom prst="rect">
             <a:avLst/>
@@ -3702,15 +3867,15 @@
           <a:lstStyle/>
           <a:p>
             <a:pPr algn="ctr">
-              <a:defRPr sz="900" b="0">
-                <a:solidFill>
-                  <a:srgbClr val="999999"/>
-                </a:solidFill>
-                <a:latin typeface="Calibri"/>
-              </a:defRPr>
-            </a:pPr>
-            <a:r>
-              <a:t>Ohio Division of EMS  |  ems.ohio.gov</a:t>
+              <a:defRPr sz="800" b="0">
+                <a:solidFill>
+                  <a:srgbClr val="64748B"/>
+                </a:solidFill>
+                <a:latin typeface="Calibri"/>
+              </a:defRPr>
+            </a:pPr>
+            <a:r>
+              <a:t>ems.ohio.gov  |  Mileage Design</a:t>
             </a:r>
           </a:p>
         </p:txBody>
@@ -3729,7 +3894,7 @@
     <p:bg>
       <p:bgPr>
         <a:solidFill>
-          <a:srgbClr val="FFFFFF"/>
+          <a:srgbClr val="0B1A33"/>
         </a:solidFill>
         <a:effectLst/>
       </p:bgPr>
@@ -3743,20 +3908,20 @@
       <p:grpSpPr/>
       <p:sp>
         <p:nvSpPr>
-          <p:cNvPr id="2" name="Rectangle 1"/>
+          <p:cNvPr id="2" name="Rounded Rectangle 1"/>
           <p:cNvSpPr/>
           <p:nvPr/>
         </p:nvSpPr>
         <p:spPr>
           <a:xfrm>
-            <a:off x="0" y="0"/>
-            <a:ext cx="9144000" cy="1097280"/>
-          </a:xfrm>
-          <a:prstGeom prst="rect">
+            <a:off x="365760" y="274320"/>
+            <a:ext cx="8412480" cy="6309360"/>
+          </a:xfrm>
+          <a:prstGeom prst="roundRect">
             <a:avLst/>
           </a:prstGeom>
           <a:solidFill>
-            <a:srgbClr val="1B365F"/>
+            <a:srgbClr val="122647"/>
           </a:solidFill>
           <a:ln>
             <a:noFill/>
@@ -3792,14 +3957,14 @@
         </p:nvSpPr>
         <p:spPr>
           <a:xfrm>
-            <a:off x="0" y="1097280"/>
-            <a:ext cx="9144000" cy="45720"/>
+            <a:off x="365760" y="274320"/>
+            <a:ext cx="8412480" cy="36576"/>
           </a:xfrm>
           <a:prstGeom prst="rect">
             <a:avLst/>
           </a:prstGeom>
           <a:solidFill>
-            <a:srgbClr val="CE1A2B"/>
+            <a:srgbClr val="2E75F7"/>
           </a:solidFill>
           <a:ln>
             <a:noFill/>
@@ -3835,8 +4000,8 @@
         </p:nvSpPr>
         <p:spPr>
           <a:xfrm>
-            <a:off x="457200" y="137160"/>
-            <a:ext cx="8229600" cy="822960"/>
+            <a:off x="731520" y="502920"/>
+            <a:ext cx="7680960" cy="640080"/>
           </a:xfrm>
           <a:prstGeom prst="rect">
             <a:avLst/>
@@ -3850,7 +4015,7 @@
           <a:lstStyle/>
           <a:p>
             <a:pPr algn="l">
-              <a:defRPr sz="2800" b="1">
+              <a:defRPr sz="2400" b="1">
                 <a:solidFill>
                   <a:srgbClr val="FFFFFF"/>
                 </a:solidFill>
@@ -3858,7 +4023,7 @@
               </a:defRPr>
             </a:pPr>
             <a:r>
-              <a:t>Continuing Education &amp; Renewal</a:t>
+              <a:t>CONTINUING EDUCATION &amp; RENEWAL</a:t>
             </a:r>
           </a:p>
         </p:txBody>
@@ -3871,14 +4036,14 @@
         </p:nvSpPr>
         <p:spPr>
           <a:xfrm>
-            <a:off x="365760" y="1371600"/>
-            <a:ext cx="3931920" cy="457200"/>
+            <a:off x="548640" y="1280160"/>
+            <a:ext cx="3840480" cy="411480"/>
           </a:xfrm>
           <a:prstGeom prst="roundRect">
             <a:avLst/>
           </a:prstGeom>
           <a:solidFill>
-            <a:srgbClr val="1B365F"/>
+            <a:srgbClr val="2E75F7"/>
           </a:solidFill>
           <a:ln>
             <a:noFill/>
@@ -3914,8 +4079,8 @@
         </p:nvSpPr>
         <p:spPr>
           <a:xfrm>
-            <a:off x="457200" y="1389888"/>
-            <a:ext cx="3749039" cy="411480"/>
+            <a:off x="640080" y="1298448"/>
+            <a:ext cx="3657600" cy="365760"/>
           </a:xfrm>
           <a:prstGeom prst="rect">
             <a:avLst/>
@@ -3929,7 +4094,7 @@
           <a:lstStyle/>
           <a:p>
             <a:pPr algn="ctr">
-              <a:defRPr sz="1600" b="1">
+              <a:defRPr sz="1300" b="1">
                 <a:solidFill>
                   <a:srgbClr val="FFFFFF"/>
                 </a:solidFill>
@@ -3950,14 +4115,14 @@
         </p:nvSpPr>
         <p:spPr>
           <a:xfrm>
-            <a:off x="4846320" y="1371600"/>
-            <a:ext cx="3931920" cy="457200"/>
+            <a:off x="4754880" y="1280160"/>
+            <a:ext cx="3840480" cy="411480"/>
           </a:xfrm>
           <a:prstGeom prst="roundRect">
             <a:avLst/>
           </a:prstGeom>
           <a:solidFill>
-            <a:srgbClr val="CE1A2B"/>
+            <a:srgbClr val="1A3566"/>
           </a:solidFill>
           <a:ln>
             <a:noFill/>
@@ -3993,8 +4158,8 @@
         </p:nvSpPr>
         <p:spPr>
           <a:xfrm>
-            <a:off x="4937760" y="1389888"/>
-            <a:ext cx="3749039" cy="411480"/>
+            <a:off x="4846320" y="1298448"/>
+            <a:ext cx="3657600" cy="365760"/>
           </a:xfrm>
           <a:prstGeom prst="rect">
             <a:avLst/>
@@ -4008,7 +4173,7 @@
           <a:lstStyle/>
           <a:p>
             <a:pPr algn="ctr">
-              <a:defRPr sz="1600" b="1">
+              <a:defRPr sz="1300" b="1">
                 <a:solidFill>
                   <a:srgbClr val="FFFFFF"/>
                 </a:solidFill>
@@ -4029,8 +4194,8 @@
         </p:nvSpPr>
         <p:spPr>
           <a:xfrm>
-            <a:off x="548640" y="2011680"/>
-            <a:ext cx="3657600" cy="4114800"/>
+            <a:off x="731520" y="1828800"/>
+            <a:ext cx="3657600" cy="4389120"/>
           </a:xfrm>
           <a:prstGeom prst="rect">
             <a:avLst/>
@@ -4045,11 +4210,11 @@
           <a:p>
             <a:pPr>
               <a:spcAft>
-                <a:spcPts val="500"/>
-              </a:spcAft>
-              <a:defRPr sz="1400">
-                <a:solidFill>
-                  <a:srgbClr val="333333"/>
+                <a:spcPts val="400"/>
+              </a:spcAft>
+              <a:defRPr sz="1300">
+                <a:solidFill>
+                  <a:srgbClr val="E2E8F0"/>
                 </a:solidFill>
                 <a:latin typeface="Calibri"/>
               </a:defRPr>
@@ -4061,11 +4226,11 @@
           <a:p>
             <a:pPr>
               <a:spcAft>
-                <a:spcPts val="500"/>
-              </a:spcAft>
-              <a:defRPr sz="1400">
-                <a:solidFill>
-                  <a:srgbClr val="333333"/>
+                <a:spcPts val="400"/>
+              </a:spcAft>
+              <a:defRPr sz="1300">
+                <a:solidFill>
+                  <a:srgbClr val="E2E8F0"/>
                 </a:solidFill>
                 <a:latin typeface="Calibri"/>
               </a:defRPr>
@@ -4077,11 +4242,11 @@
           <a:p>
             <a:pPr>
               <a:spcAft>
-                <a:spcPts val="500"/>
-              </a:spcAft>
-              <a:defRPr sz="1400">
-                <a:solidFill>
-                  <a:srgbClr val="333333"/>
+                <a:spcPts val="400"/>
+              </a:spcAft>
+              <a:defRPr sz="1300">
+                <a:solidFill>
+                  <a:srgbClr val="E2E8F0"/>
                 </a:solidFill>
                 <a:latin typeface="Calibri"/>
               </a:defRPr>
@@ -4093,11 +4258,11 @@
           <a:p>
             <a:pPr>
               <a:spcAft>
-                <a:spcPts val="500"/>
-              </a:spcAft>
-              <a:defRPr sz="1400">
-                <a:solidFill>
-                  <a:srgbClr val="333333"/>
+                <a:spcPts val="400"/>
+              </a:spcAft>
+              <a:defRPr sz="1300">
+                <a:solidFill>
+                  <a:srgbClr val="E2E8F0"/>
                 </a:solidFill>
                 <a:latin typeface="Calibri"/>
               </a:defRPr>
@@ -4109,49 +4274,49 @@
           <a:p>
             <a:pPr>
               <a:spcAft>
-                <a:spcPts val="500"/>
-              </a:spcAft>
-              <a:defRPr sz="1400">
-                <a:solidFill>
-                  <a:srgbClr val="333333"/>
-                </a:solidFill>
-                <a:latin typeface="Calibri"/>
-              </a:defRPr>
-            </a:pPr>
-            <a:r>
-              <a:t>Testing in Lieu of CE option available (NREMT exam)</a:t>
-            </a:r>
-          </a:p>
-          <a:p>
-            <a:pPr>
-              <a:spcAft>
-                <a:spcPts val="500"/>
-              </a:spcAft>
-              <a:defRPr sz="1400">
-                <a:solidFill>
-                  <a:srgbClr val="333333"/>
-                </a:solidFill>
-                <a:latin typeface="Calibri"/>
-              </a:defRPr>
-            </a:pPr>
-            <a:r>
-              <a:t>Can also complete an Ohio refresher course</a:t>
-            </a:r>
-          </a:p>
-          <a:p>
-            <a:pPr>
-              <a:spcAft>
-                <a:spcPts val="500"/>
-              </a:spcAft>
-              <a:defRPr sz="1400">
-                <a:solidFill>
-                  <a:srgbClr val="333333"/>
-                </a:solidFill>
-                <a:latin typeface="Calibri"/>
-              </a:defRPr>
-            </a:pPr>
-            <a:r>
-              <a:t>Or maintain current NREMT registration</a:t>
+                <a:spcPts val="400"/>
+              </a:spcAft>
+              <a:defRPr sz="1300">
+                <a:solidFill>
+                  <a:srgbClr val="E2E8F0"/>
+                </a:solidFill>
+                <a:latin typeface="Calibri"/>
+              </a:defRPr>
+            </a:pPr>
+            <a:r>
+              <a:t>Testing in Lieu of CE option (NREMT exam)</a:t>
+            </a:r>
+          </a:p>
+          <a:p>
+            <a:pPr>
+              <a:spcAft>
+                <a:spcPts val="400"/>
+              </a:spcAft>
+              <a:defRPr sz="1300">
+                <a:solidFill>
+                  <a:srgbClr val="E2E8F0"/>
+                </a:solidFill>
+                <a:latin typeface="Calibri"/>
+              </a:defRPr>
+            </a:pPr>
+            <a:r>
+              <a:t>Ohio refresher course option available</a:t>
+            </a:r>
+          </a:p>
+          <a:p>
+            <a:pPr>
+              <a:spcAft>
+                <a:spcPts val="400"/>
+              </a:spcAft>
+              <a:defRPr sz="1300">
+                <a:solidFill>
+                  <a:srgbClr val="E2E8F0"/>
+                </a:solidFill>
+                <a:latin typeface="Calibri"/>
+              </a:defRPr>
+            </a:pPr>
+            <a:r>
+              <a:t>Maintain current NREMT registration</a:t>
             </a:r>
           </a:p>
         </p:txBody>
@@ -4164,8 +4329,8 @@
         </p:nvSpPr>
         <p:spPr>
           <a:xfrm>
-            <a:off x="5029200" y="2011680"/>
-            <a:ext cx="3657600" cy="4114800"/>
+            <a:off x="4937760" y="1828800"/>
+            <a:ext cx="3657600" cy="4389120"/>
           </a:xfrm>
           <a:prstGeom prst="rect">
             <a:avLst/>
@@ -4180,11 +4345,11 @@
           <a:p>
             <a:pPr>
               <a:spcAft>
-                <a:spcPts val="500"/>
-              </a:spcAft>
-              <a:defRPr sz="1400">
-                <a:solidFill>
-                  <a:srgbClr val="333333"/>
+                <a:spcPts val="400"/>
+              </a:spcAft>
+              <a:defRPr sz="1300">
+                <a:solidFill>
+                  <a:srgbClr val="E2E8F0"/>
                 </a:solidFill>
                 <a:latin typeface="Calibri"/>
               </a:defRPr>
@@ -4196,11 +4361,11 @@
           <a:p>
             <a:pPr>
               <a:spcAft>
-                <a:spcPts val="500"/>
-              </a:spcAft>
-              <a:defRPr sz="1400">
-                <a:solidFill>
-                  <a:srgbClr val="333333"/>
+                <a:spcPts val="400"/>
+              </a:spcAft>
+              <a:defRPr sz="1300">
+                <a:solidFill>
+                  <a:srgbClr val="E2E8F0"/>
                 </a:solidFill>
                 <a:latin typeface="Calibri"/>
               </a:defRPr>
@@ -4212,11 +4377,11 @@
           <a:p>
             <a:pPr>
               <a:spcAft>
-                <a:spcPts val="500"/>
-              </a:spcAft>
-              <a:defRPr sz="1400">
-                <a:solidFill>
-                  <a:srgbClr val="333333"/>
+                <a:spcPts val="400"/>
+              </a:spcAft>
+              <a:defRPr sz="1300">
+                <a:solidFill>
+                  <a:srgbClr val="E2E8F0"/>
                 </a:solidFill>
                 <a:latin typeface="Calibri"/>
               </a:defRPr>
@@ -4228,43 +4393,43 @@
           <a:p>
             <a:pPr>
               <a:spcAft>
-                <a:spcPts val="500"/>
-              </a:spcAft>
-              <a:defRPr sz="1400">
-                <a:solidFill>
-                  <a:srgbClr val="333333"/>
-                </a:solidFill>
-                <a:latin typeface="Calibri"/>
-              </a:defRPr>
-            </a:pPr>
-            <a:r>
-              <a:t>Must submit renewal application before expiration</a:t>
-            </a:r>
-          </a:p>
-          <a:p>
-            <a:pPr>
-              <a:spcAft>
-                <a:spcPts val="500"/>
-              </a:spcAft>
-              <a:defRPr sz="1400">
-                <a:solidFill>
-                  <a:srgbClr val="333333"/>
-                </a:solidFill>
-                <a:latin typeface="Calibri"/>
-              </a:defRPr>
-            </a:pPr>
-            <a:r>
-              <a:t>Must comply with firefighter cert requirements</a:t>
-            </a:r>
-          </a:p>
-          <a:p>
-            <a:pPr>
-              <a:spcAft>
-                <a:spcPts val="500"/>
-              </a:spcAft>
-              <a:defRPr sz="1400">
-                <a:solidFill>
-                  <a:srgbClr val="333333"/>
+                <a:spcPts val="400"/>
+              </a:spcAft>
+              <a:defRPr sz="1300">
+                <a:solidFill>
+                  <a:srgbClr val="E2E8F0"/>
+                </a:solidFill>
+                <a:latin typeface="Calibri"/>
+              </a:defRPr>
+            </a:pPr>
+            <a:r>
+              <a:t>Submit renewal app before expiration</a:t>
+            </a:r>
+          </a:p>
+          <a:p>
+            <a:pPr>
+              <a:spcAft>
+                <a:spcPts val="400"/>
+              </a:spcAft>
+              <a:defRPr sz="1300">
+                <a:solidFill>
+                  <a:srgbClr val="E2E8F0"/>
+                </a:solidFill>
+                <a:latin typeface="Calibri"/>
+              </a:defRPr>
+            </a:pPr>
+            <a:r>
+              <a:t>Comply with firefighter cert requirements</a:t>
+            </a:r>
+          </a:p>
+          <a:p>
+            <a:pPr>
+              <a:spcAft>
+                <a:spcPts val="400"/>
+              </a:spcAft>
+              <a:defRPr sz="1300">
+                <a:solidFill>
+                  <a:srgbClr val="E2E8F0"/>
                 </a:solidFill>
                 <a:latin typeface="Calibri"/>
               </a:defRPr>
@@ -4276,17 +4441,17 @@
           <a:p>
             <a:pPr>
               <a:spcAft>
-                <a:spcPts val="500"/>
-              </a:spcAft>
-              <a:defRPr sz="1400">
-                <a:solidFill>
-                  <a:srgbClr val="333333"/>
-                </a:solidFill>
-                <a:latin typeface="Calibri"/>
-              </a:defRPr>
-            </a:pPr>
-            <a:r>
-              <a:t>6 hrs CE on Instructor Curriculum objectives (EMS instr.)</a:t>
+                <a:spcPts val="400"/>
+              </a:spcAft>
+              <a:defRPr sz="1300">
+                <a:solidFill>
+                  <a:srgbClr val="E2E8F0"/>
+                </a:solidFill>
+                <a:latin typeface="Calibri"/>
+              </a:defRPr>
+            </a:pPr>
+            <a:r>
+              <a:t>6 hrs CE on Instructor Curriculum objectives (EMS)</a:t>
             </a:r>
           </a:p>
         </p:txBody>
@@ -4299,8 +4464,8 @@
         </p:nvSpPr>
         <p:spPr>
           <a:xfrm>
-            <a:off x="274320" y="6400800"/>
-            <a:ext cx="8595360" cy="365760"/>
+            <a:off x="457200" y="6400800"/>
+            <a:ext cx="8229600" cy="274320"/>
           </a:xfrm>
           <a:prstGeom prst="rect">
             <a:avLst/>
@@ -4314,15 +4479,15 @@
           <a:lstStyle/>
           <a:p>
             <a:pPr algn="ctr">
-              <a:defRPr sz="900" b="0">
-                <a:solidFill>
-                  <a:srgbClr val="999999"/>
-                </a:solidFill>
-                <a:latin typeface="Calibri"/>
-              </a:defRPr>
-            </a:pPr>
-            <a:r>
-              <a:t>Ohio Division of EMS  |  ems.ohio.gov</a:t>
+              <a:defRPr sz="800" b="0">
+                <a:solidFill>
+                  <a:srgbClr val="64748B"/>
+                </a:solidFill>
+                <a:latin typeface="Calibri"/>
+              </a:defRPr>
+            </a:pPr>
+            <a:r>
+              <a:t>ems.ohio.gov  |  Mileage Design</a:t>
             </a:r>
           </a:p>
         </p:txBody>
@@ -4341,7 +4506,7 @@
     <p:bg>
       <p:bgPr>
         <a:solidFill>
-          <a:srgbClr val="FFFFFF"/>
+          <a:srgbClr val="0B1A33"/>
         </a:solidFill>
         <a:effectLst/>
       </p:bgPr>
@@ -4355,20 +4520,20 @@
       <p:grpSpPr/>
       <p:sp>
         <p:nvSpPr>
-          <p:cNvPr id="2" name="Rectangle 1"/>
+          <p:cNvPr id="2" name="Rounded Rectangle 1"/>
           <p:cNvSpPr/>
           <p:nvPr/>
         </p:nvSpPr>
         <p:spPr>
           <a:xfrm>
-            <a:off x="0" y="0"/>
-            <a:ext cx="9144000" cy="1097280"/>
-          </a:xfrm>
-          <a:prstGeom prst="rect">
+            <a:off x="365760" y="274320"/>
+            <a:ext cx="8412480" cy="6309360"/>
+          </a:xfrm>
+          <a:prstGeom prst="roundRect">
             <a:avLst/>
           </a:prstGeom>
           <a:solidFill>
-            <a:srgbClr val="1B365F"/>
+            <a:srgbClr val="122647"/>
           </a:solidFill>
           <a:ln>
             <a:noFill/>
@@ -4404,14 +4569,14 @@
         </p:nvSpPr>
         <p:spPr>
           <a:xfrm>
-            <a:off x="0" y="1097280"/>
-            <a:ext cx="9144000" cy="45720"/>
+            <a:off x="365760" y="274320"/>
+            <a:ext cx="8412480" cy="36576"/>
           </a:xfrm>
           <a:prstGeom prst="rect">
             <a:avLst/>
           </a:prstGeom>
           <a:solidFill>
-            <a:srgbClr val="CE1A2B"/>
+            <a:srgbClr val="2E75F7"/>
           </a:solidFill>
           <a:ln>
             <a:noFill/>
@@ -4447,8 +4612,8 @@
         </p:nvSpPr>
         <p:spPr>
           <a:xfrm>
-            <a:off x="457200" y="137160"/>
-            <a:ext cx="8229600" cy="822960"/>
+            <a:off x="731520" y="502920"/>
+            <a:ext cx="7680960" cy="640080"/>
           </a:xfrm>
           <a:prstGeom prst="rect">
             <a:avLst/>
@@ -4462,7 +4627,7 @@
           <a:lstStyle/>
           <a:p>
             <a:pPr algn="l">
-              <a:defRPr sz="2800" b="1">
+              <a:defRPr sz="2400" b="1">
                 <a:solidFill>
                   <a:srgbClr val="FFFFFF"/>
                 </a:solidFill>
@@ -4470,7 +4635,7 @@
               </a:defRPr>
             </a:pPr>
             <a:r>
-              <a:t>Renewal Process on ems.ohio.gov</a:t>
+              <a:t>RENEWAL PROCESS ON EMS.OHIO.GOV</a:t>
             </a:r>
           </a:p>
         </p:txBody>
@@ -4483,8 +4648,8 @@
         </p:nvSpPr>
         <p:spPr>
           <a:xfrm>
-            <a:off x="640080" y="1371600"/>
-            <a:ext cx="7863840" cy="4572000"/>
+            <a:off x="822960" y="1234440"/>
+            <a:ext cx="7498079" cy="4800600"/>
           </a:xfrm>
           <a:prstGeom prst="rect">
             <a:avLst/>
@@ -4499,11 +4664,11 @@
           <a:p>
             <a:pPr>
               <a:spcAft>
-                <a:spcPts val="600"/>
-              </a:spcAft>
-              <a:defRPr sz="1700">
-                <a:solidFill>
-                  <a:srgbClr val="333333"/>
+                <a:spcPts val="500"/>
+              </a:spcAft>
+              <a:defRPr sz="1500">
+                <a:solidFill>
+                  <a:srgbClr val="E2E8F0"/>
                 </a:solidFill>
                 <a:latin typeface="Calibri"/>
               </a:defRPr>
@@ -4515,11 +4680,11 @@
           <a:p>
             <a:pPr>
               <a:spcAft>
-                <a:spcPts val="600"/>
-              </a:spcAft>
-              <a:defRPr sz="1700">
-                <a:solidFill>
-                  <a:srgbClr val="333333"/>
+                <a:spcPts val="500"/>
+              </a:spcAft>
+              <a:defRPr sz="1500">
+                <a:solidFill>
+                  <a:srgbClr val="E2E8F0"/>
                 </a:solidFill>
                 <a:latin typeface="Calibri"/>
               </a:defRPr>
@@ -4531,161 +4696,161 @@
           <a:p>
             <a:pPr lvl="1">
               <a:spcAft>
-                <a:spcPts val="600"/>
+                <a:spcPts val="500"/>
+              </a:spcAft>
+              <a:defRPr sz="1300">
+                <a:solidFill>
+                  <a:srgbClr val="94A3B8"/>
+                </a:solidFill>
+                <a:latin typeface="Calibri"/>
+              </a:defRPr>
+            </a:pPr>
+            <a:r>
+              <a:t>Option 1: Complete required CE hours for your level</a:t>
+            </a:r>
+          </a:p>
+          <a:p>
+            <a:pPr lvl="1">
+              <a:spcAft>
+                <a:spcPts val="500"/>
+              </a:spcAft>
+              <a:defRPr sz="1300">
+                <a:solidFill>
+                  <a:srgbClr val="94A3B8"/>
+                </a:solidFill>
+                <a:latin typeface="Calibri"/>
+              </a:defRPr>
+            </a:pPr>
+            <a:r>
+              <a:t>Option 2: Complete an Ohio-approved refresher course</a:t>
+            </a:r>
+          </a:p>
+          <a:p>
+            <a:pPr lvl="1">
+              <a:spcAft>
+                <a:spcPts val="500"/>
+              </a:spcAft>
+              <a:defRPr sz="1300">
+                <a:solidFill>
+                  <a:srgbClr val="94A3B8"/>
+                </a:solidFill>
+                <a:latin typeface="Calibri"/>
+              </a:defRPr>
+            </a:pPr>
+            <a:r>
+              <a:t>Option 3: Maintain current NREMT registration</a:t>
+            </a:r>
+          </a:p>
+          <a:p>
+            <a:pPr lvl="1">
+              <a:spcAft>
+                <a:spcPts val="500"/>
+              </a:spcAft>
+              <a:defRPr sz="1300">
+                <a:solidFill>
+                  <a:srgbClr val="94A3B8"/>
+                </a:solidFill>
+                <a:latin typeface="Calibri"/>
+              </a:defRPr>
+            </a:pPr>
+            <a:r>
+              <a:t>Option 4: Pass an approved exam (Testing in Lieu of CE)</a:t>
+            </a:r>
+          </a:p>
+          <a:p>
+            <a:pPr>
+              <a:spcAft>
+                <a:spcPts val="500"/>
               </a:spcAft>
               <a:defRPr sz="1500">
                 <a:solidFill>
-                  <a:srgbClr val="555555"/>
-                </a:solidFill>
-                <a:latin typeface="Calibri"/>
-              </a:defRPr>
-            </a:pPr>
-            <a:r>
-              <a:t>Option 1: Complete required CE hours for your level</a:t>
+                  <a:srgbClr val="E2E8F0"/>
+                </a:solidFill>
+                <a:latin typeface="Calibri"/>
+              </a:defRPr>
+            </a:pPr>
+            <a:r>
+              <a:t>Testing in Lieu of CE key rules:</a:t>
             </a:r>
           </a:p>
           <a:p>
             <a:pPr lvl="1">
               <a:spcAft>
-                <a:spcPts val="600"/>
+                <a:spcPts val="500"/>
+              </a:spcAft>
+              <a:defRPr sz="1300">
+                <a:solidFill>
+                  <a:srgbClr val="94A3B8"/>
+                </a:solidFill>
+                <a:latin typeface="Calibri"/>
+              </a:defRPr>
+            </a:pPr>
+            <a:r>
+              <a:t>Must be at your current certification level</a:t>
+            </a:r>
+          </a:p>
+          <a:p>
+            <a:pPr lvl="1">
+              <a:spcAft>
+                <a:spcPts val="500"/>
+              </a:spcAft>
+              <a:defRPr sz="1300">
+                <a:solidFill>
+                  <a:srgbClr val="94A3B8"/>
+                </a:solidFill>
+                <a:latin typeface="Calibri"/>
+              </a:defRPr>
+            </a:pPr>
+            <a:r>
+              <a:t>Taken within last 6 months of your certification cycle</a:t>
+            </a:r>
+          </a:p>
+          <a:p>
+            <a:pPr lvl="1">
+              <a:spcAft>
+                <a:spcPts val="500"/>
+              </a:spcAft>
+              <a:defRPr sz="1300">
+                <a:solidFill>
+                  <a:srgbClr val="94A3B8"/>
+                </a:solidFill>
+                <a:latin typeface="Calibri"/>
+              </a:defRPr>
+            </a:pPr>
+            <a:r>
+              <a:t>Up to 3 attempts permitted</a:t>
+            </a:r>
+          </a:p>
+          <a:p>
+            <a:pPr lvl="1">
+              <a:spcAft>
+                <a:spcPts val="500"/>
+              </a:spcAft>
+              <a:defRPr sz="1300">
+                <a:solidFill>
+                  <a:srgbClr val="94A3B8"/>
+                </a:solidFill>
+                <a:latin typeface="Calibri"/>
+              </a:defRPr>
+            </a:pPr>
+            <a:r>
+              <a:t>Developed and administered by the NREMT</a:t>
+            </a:r>
+          </a:p>
+          <a:p>
+            <a:pPr>
+              <a:spcAft>
+                <a:spcPts val="500"/>
               </a:spcAft>
               <a:defRPr sz="1500">
                 <a:solidFill>
-                  <a:srgbClr val="555555"/>
-                </a:solidFill>
-                <a:latin typeface="Calibri"/>
-              </a:defRPr>
-            </a:pPr>
-            <a:r>
-              <a:t>Option 2: Complete an Ohio-approved refresher course</a:t>
-            </a:r>
-          </a:p>
-          <a:p>
-            <a:pPr lvl="1">
-              <a:spcAft>
-                <a:spcPts val="600"/>
-              </a:spcAft>
-              <a:defRPr sz="1500">
-                <a:solidFill>
-                  <a:srgbClr val="555555"/>
-                </a:solidFill>
-                <a:latin typeface="Calibri"/>
-              </a:defRPr>
-            </a:pPr>
-            <a:r>
-              <a:t>Option 3: Maintain current NREMT registration</a:t>
-            </a:r>
-          </a:p>
-          <a:p>
-            <a:pPr lvl="1">
-              <a:spcAft>
-                <a:spcPts val="600"/>
-              </a:spcAft>
-              <a:defRPr sz="1500">
-                <a:solidFill>
-                  <a:srgbClr val="555555"/>
-                </a:solidFill>
-                <a:latin typeface="Calibri"/>
-              </a:defRPr>
-            </a:pPr>
-            <a:r>
-              <a:t>Option 4: Pass an approved exam (Testing in Lieu of CE)</a:t>
-            </a:r>
-          </a:p>
-          <a:p>
-            <a:pPr>
-              <a:spcAft>
-                <a:spcPts val="600"/>
-              </a:spcAft>
-              <a:defRPr sz="1700">
-                <a:solidFill>
-                  <a:srgbClr val="333333"/>
-                </a:solidFill>
-                <a:latin typeface="Calibri"/>
-              </a:defRPr>
-            </a:pPr>
-            <a:r>
-              <a:t>Testing in Lieu of CE — key rules:</a:t>
-            </a:r>
-          </a:p>
-          <a:p>
-            <a:pPr lvl="1">
-              <a:spcAft>
-                <a:spcPts val="600"/>
-              </a:spcAft>
-              <a:defRPr sz="1500">
-                <a:solidFill>
-                  <a:srgbClr val="555555"/>
-                </a:solidFill>
-                <a:latin typeface="Calibri"/>
-              </a:defRPr>
-            </a:pPr>
-            <a:r>
-              <a:t>Must be at your current certification level</a:t>
-            </a:r>
-          </a:p>
-          <a:p>
-            <a:pPr lvl="1">
-              <a:spcAft>
-                <a:spcPts val="600"/>
-              </a:spcAft>
-              <a:defRPr sz="1500">
-                <a:solidFill>
-                  <a:srgbClr val="555555"/>
-                </a:solidFill>
-                <a:latin typeface="Calibri"/>
-              </a:defRPr>
-            </a:pPr>
-            <a:r>
-              <a:t>Taken within last 6 months of your certification cycle</a:t>
-            </a:r>
-          </a:p>
-          <a:p>
-            <a:pPr lvl="1">
-              <a:spcAft>
-                <a:spcPts val="600"/>
-              </a:spcAft>
-              <a:defRPr sz="1500">
-                <a:solidFill>
-                  <a:srgbClr val="555555"/>
-                </a:solidFill>
-                <a:latin typeface="Calibri"/>
-              </a:defRPr>
-            </a:pPr>
-            <a:r>
-              <a:t>Up to 3 attempts permitted</a:t>
-            </a:r>
-          </a:p>
-          <a:p>
-            <a:pPr lvl="1">
-              <a:spcAft>
-                <a:spcPts val="600"/>
-              </a:spcAft>
-              <a:defRPr sz="1500">
-                <a:solidFill>
-                  <a:srgbClr val="555555"/>
-                </a:solidFill>
-                <a:latin typeface="Calibri"/>
-              </a:defRPr>
-            </a:pPr>
-            <a:r>
-              <a:t>Developed and administered by the NREMT</a:t>
-            </a:r>
-          </a:p>
-          <a:p>
-            <a:pPr>
-              <a:spcAft>
-                <a:spcPts val="600"/>
-              </a:spcAft>
-              <a:defRPr sz="1700">
-                <a:solidFill>
-                  <a:srgbClr val="333333"/>
-                </a:solidFill>
-                <a:latin typeface="Calibri"/>
-              </a:defRPr>
-            </a:pPr>
-            <a:r>
-              <a:t>Reinstatement and reciprocity options also available on site</a:t>
+                  <a:srgbClr val="E2E8F0"/>
+                </a:solidFill>
+                <a:latin typeface="Calibri"/>
+              </a:defRPr>
+            </a:pPr>
+            <a:r>
+              <a:t>Reinstatement and reciprocity options also available</a:t>
             </a:r>
           </a:p>
         </p:txBody>
@@ -4698,8 +4863,8 @@
         </p:nvSpPr>
         <p:spPr>
           <a:xfrm>
-            <a:off x="274320" y="6400800"/>
-            <a:ext cx="8595360" cy="365760"/>
+            <a:off x="457200" y="6400800"/>
+            <a:ext cx="8229600" cy="274320"/>
           </a:xfrm>
           <a:prstGeom prst="rect">
             <a:avLst/>
@@ -4713,15 +4878,15 @@
           <a:lstStyle/>
           <a:p>
             <a:pPr algn="ctr">
-              <a:defRPr sz="900" b="0">
-                <a:solidFill>
-                  <a:srgbClr val="999999"/>
-                </a:solidFill>
-                <a:latin typeface="Calibri"/>
-              </a:defRPr>
-            </a:pPr>
-            <a:r>
-              <a:t>Ohio Division of EMS  |  ems.ohio.gov</a:t>
+              <a:defRPr sz="800" b="0">
+                <a:solidFill>
+                  <a:srgbClr val="64748B"/>
+                </a:solidFill>
+                <a:latin typeface="Calibri"/>
+              </a:defRPr>
+            </a:pPr>
+            <a:r>
+              <a:t>ems.ohio.gov  |  Mileage Design</a:t>
             </a:r>
           </a:p>
         </p:txBody>
@@ -4740,7 +4905,7 @@
     <p:bg>
       <p:bgPr>
         <a:solidFill>
-          <a:srgbClr val="FFFFFF"/>
+          <a:srgbClr val="0B1A33"/>
         </a:solidFill>
         <a:effectLst/>
       </p:bgPr>
@@ -4754,20 +4919,20 @@
       <p:grpSpPr/>
       <p:sp>
         <p:nvSpPr>
-          <p:cNvPr id="2" name="Rectangle 1"/>
+          <p:cNvPr id="2" name="Rounded Rectangle 1"/>
           <p:cNvSpPr/>
           <p:nvPr/>
         </p:nvSpPr>
         <p:spPr>
           <a:xfrm>
-            <a:off x="0" y="0"/>
-            <a:ext cx="9144000" cy="1097280"/>
-          </a:xfrm>
-          <a:prstGeom prst="rect">
+            <a:off x="365760" y="274320"/>
+            <a:ext cx="8412480" cy="6309360"/>
+          </a:xfrm>
+          <a:prstGeom prst="roundRect">
             <a:avLst/>
           </a:prstGeom>
           <a:solidFill>
-            <a:srgbClr val="1B365F"/>
+            <a:srgbClr val="122647"/>
           </a:solidFill>
           <a:ln>
             <a:noFill/>
@@ -4803,14 +4968,14 @@
         </p:nvSpPr>
         <p:spPr>
           <a:xfrm>
-            <a:off x="0" y="1097280"/>
-            <a:ext cx="9144000" cy="45720"/>
+            <a:off x="365760" y="274320"/>
+            <a:ext cx="8412480" cy="36576"/>
           </a:xfrm>
           <a:prstGeom prst="rect">
             <a:avLst/>
           </a:prstGeom>
           <a:solidFill>
-            <a:srgbClr val="CE1A2B"/>
+            <a:srgbClr val="2E75F7"/>
           </a:solidFill>
           <a:ln>
             <a:noFill/>
@@ -4846,8 +5011,8 @@
         </p:nvSpPr>
         <p:spPr>
           <a:xfrm>
-            <a:off x="457200" y="137160"/>
-            <a:ext cx="8229600" cy="822960"/>
+            <a:off x="731520" y="502920"/>
+            <a:ext cx="7680960" cy="640080"/>
           </a:xfrm>
           <a:prstGeom prst="rect">
             <a:avLst/>
@@ -4861,7 +5026,7 @@
           <a:lstStyle/>
           <a:p>
             <a:pPr algn="l">
-              <a:defRPr sz="2800" b="1">
+              <a:defRPr sz="2400" b="1">
                 <a:solidFill>
                   <a:srgbClr val="FFFFFF"/>
                 </a:solidFill>
@@ -4869,7 +5034,7 @@
               </a:defRPr>
             </a:pPr>
             <a:r>
-              <a:t>Website Tools &amp; Resources</a:t>
+              <a:t>WEBSITE TOOLS &amp; RESOURCES</a:t>
             </a:r>
           </a:p>
         </p:txBody>
@@ -4882,8 +5047,8 @@
         </p:nvSpPr>
         <p:spPr>
           <a:xfrm>
-            <a:off x="640080" y="1371600"/>
-            <a:ext cx="7863840" cy="4572000"/>
+            <a:off x="822960" y="1234440"/>
+            <a:ext cx="7498079" cy="4800600"/>
           </a:xfrm>
           <a:prstGeom prst="rect">
             <a:avLst/>
@@ -4898,43 +5063,43 @@
           <a:p>
             <a:pPr>
               <a:spcAft>
-                <a:spcPts val="600"/>
-              </a:spcAft>
-              <a:defRPr sz="1700">
-                <a:solidFill>
-                  <a:srgbClr val="333333"/>
-                </a:solidFill>
-                <a:latin typeface="Calibri"/>
-              </a:defRPr>
-            </a:pPr>
-            <a:r>
-              <a:t>Certification Verification — look up any Ohio EMS/fire provider's cert status</a:t>
+                <a:spcPts val="500"/>
+              </a:spcAft>
+              <a:defRPr sz="1500">
+                <a:solidFill>
+                  <a:srgbClr val="E2E8F0"/>
+                </a:solidFill>
+                <a:latin typeface="Calibri"/>
+              </a:defRPr>
+            </a:pPr>
+            <a:r>
+              <a:t>Certification Verification — look up any provider’s cert status</a:t>
             </a:r>
           </a:p>
           <a:p>
             <a:pPr lvl="1">
               <a:spcAft>
-                <a:spcPts val="600"/>
+                <a:spcPts val="500"/>
+              </a:spcAft>
+              <a:defRPr sz="1300">
+                <a:solidFill>
+                  <a:srgbClr val="94A3B8"/>
+                </a:solidFill>
+                <a:latin typeface="Calibri"/>
+              </a:defRPr>
+            </a:pPr>
+            <a:r>
+              <a:t>services.dps.ohio.gov/EMSProviders/Verification</a:t>
+            </a:r>
+          </a:p>
+          <a:p>
+            <a:pPr>
+              <a:spcAft>
+                <a:spcPts val="500"/>
               </a:spcAft>
               <a:defRPr sz="1500">
                 <a:solidFill>
-                  <a:srgbClr val="555555"/>
-                </a:solidFill>
-                <a:latin typeface="Calibri"/>
-              </a:defRPr>
-            </a:pPr>
-            <a:r>
-              <a:t>services.dps.ohio.gov/EMSProviders/Verification</a:t>
-            </a:r>
-          </a:p>
-          <a:p>
-            <a:pPr>
-              <a:spcAft>
-                <a:spcPts val="600"/>
-              </a:spcAft>
-              <a:defRPr sz="1700">
-                <a:solidFill>
-                  <a:srgbClr val="333333"/>
+                  <a:srgbClr val="E2E8F0"/>
                 </a:solidFill>
                 <a:latin typeface="Calibri"/>
               </a:defRPr>
@@ -4946,43 +5111,43 @@
           <a:p>
             <a:pPr lvl="1">
               <a:spcAft>
-                <a:spcPts val="600"/>
+                <a:spcPts val="500"/>
+              </a:spcAft>
+              <a:defRPr sz="1300">
+                <a:solidFill>
+                  <a:srgbClr val="94A3B8"/>
+                </a:solidFill>
+                <a:latin typeface="Calibri"/>
+              </a:defRPr>
+            </a:pPr>
+            <a:r>
+              <a:t>200+ online courses including 70+ fire protection courses</a:t>
+            </a:r>
+          </a:p>
+          <a:p>
+            <a:pPr>
+              <a:spcAft>
+                <a:spcPts val="500"/>
               </a:spcAft>
               <a:defRPr sz="1500">
                 <a:solidFill>
-                  <a:srgbClr val="555555"/>
-                </a:solidFill>
-                <a:latin typeface="Calibri"/>
-              </a:defRPr>
-            </a:pPr>
-            <a:r>
-              <a:t>200+ online courses including 70+ fire protection courses</a:t>
-            </a:r>
-          </a:p>
-          <a:p>
-            <a:pPr>
-              <a:spcAft>
-                <a:spcPts val="600"/>
-              </a:spcAft>
-              <a:defRPr sz="1700">
-                <a:solidFill>
-                  <a:srgbClr val="333333"/>
-                </a:solidFill>
-                <a:latin typeface="Calibri"/>
-              </a:defRPr>
-            </a:pPr>
-            <a:r>
-              <a:t>Training Facility Directory — find accredited/chartered programs statewide</a:t>
-            </a:r>
-          </a:p>
-          <a:p>
-            <a:pPr>
-              <a:spcAft>
-                <a:spcPts val="600"/>
-              </a:spcAft>
-              <a:defRPr sz="1700">
-                <a:solidFill>
-                  <a:srgbClr val="333333"/>
+                  <a:srgbClr val="E2E8F0"/>
+                </a:solidFill>
+                <a:latin typeface="Calibri"/>
+              </a:defRPr>
+            </a:pPr>
+            <a:r>
+              <a:t>Training Facility Directory — accredited/chartered programs statewide</a:t>
+            </a:r>
+          </a:p>
+          <a:p>
+            <a:pPr>
+              <a:spcAft>
+                <a:spcPts val="500"/>
+              </a:spcAft>
+              <a:defRPr sz="1500">
+                <a:solidFill>
+                  <a:srgbClr val="E2E8F0"/>
                 </a:solidFill>
                 <a:latin typeface="Calibri"/>
               </a:defRPr>
@@ -4994,11 +5159,11 @@
           <a:p>
             <a:pPr>
               <a:spcAft>
-                <a:spcPts val="600"/>
-              </a:spcAft>
-              <a:defRPr sz="1700">
-                <a:solidFill>
-                  <a:srgbClr val="333333"/>
+                <a:spcPts val="500"/>
+              </a:spcAft>
+              <a:defRPr sz="1500">
+                <a:solidFill>
+                  <a:srgbClr val="E2E8F0"/>
                 </a:solidFill>
                 <a:latin typeface="Calibri"/>
               </a:defRPr>
@@ -5010,11 +5175,11 @@
           <a:p>
             <a:pPr>
               <a:spcAft>
-                <a:spcPts val="600"/>
-              </a:spcAft>
-              <a:defRPr sz="1700">
-                <a:solidFill>
-                  <a:srgbClr val="333333"/>
+                <a:spcPts val="500"/>
+              </a:spcAft>
+              <a:defRPr sz="1500">
+                <a:solidFill>
+                  <a:srgbClr val="E2E8F0"/>
                 </a:solidFill>
                 <a:latin typeface="Calibri"/>
               </a:defRPr>
@@ -5026,11 +5191,11 @@
           <a:p>
             <a:pPr>
               <a:spcAft>
-                <a:spcPts val="600"/>
-              </a:spcAft>
-              <a:defRPr sz="1700">
-                <a:solidFill>
-                  <a:srgbClr val="333333"/>
+                <a:spcPts val="500"/>
+              </a:spcAft>
+              <a:defRPr sz="1500">
+                <a:solidFill>
+                  <a:srgbClr val="E2E8F0"/>
                 </a:solidFill>
                 <a:latin typeface="Calibri"/>
               </a:defRPr>
@@ -5042,11 +5207,11 @@
           <a:p>
             <a:pPr>
               <a:spcAft>
-                <a:spcPts val="600"/>
-              </a:spcAft>
-              <a:defRPr sz="1700">
-                <a:solidFill>
-                  <a:srgbClr val="333333"/>
+                <a:spcPts val="500"/>
+              </a:spcAft>
+              <a:defRPr sz="1500">
+                <a:solidFill>
+                  <a:srgbClr val="E2E8F0"/>
                 </a:solidFill>
                 <a:latin typeface="Calibri"/>
               </a:defRPr>
@@ -5065,8 +5230,8 @@
         </p:nvSpPr>
         <p:spPr>
           <a:xfrm>
-            <a:off x="274320" y="6400800"/>
-            <a:ext cx="8595360" cy="365760"/>
+            <a:off x="457200" y="6400800"/>
+            <a:ext cx="8229600" cy="274320"/>
           </a:xfrm>
           <a:prstGeom prst="rect">
             <a:avLst/>
@@ -5080,15 +5245,15 @@
           <a:lstStyle/>
           <a:p>
             <a:pPr algn="ctr">
-              <a:defRPr sz="900" b="0">
-                <a:solidFill>
-                  <a:srgbClr val="999999"/>
-                </a:solidFill>
-                <a:latin typeface="Calibri"/>
-              </a:defRPr>
-            </a:pPr>
-            <a:r>
-              <a:t>Ohio Division of EMS  |  ems.ohio.gov</a:t>
+              <a:defRPr sz="800" b="0">
+                <a:solidFill>
+                  <a:srgbClr val="64748B"/>
+                </a:solidFill>
+                <a:latin typeface="Calibri"/>
+              </a:defRPr>
+            </a:pPr>
+            <a:r>
+              <a:t>ems.ohio.gov  |  Mileage Design</a:t>
             </a:r>
           </a:p>
         </p:txBody>
@@ -5107,7 +5272,7 @@
     <p:bg>
       <p:bgPr>
         <a:solidFill>
-          <a:srgbClr val="FFFFFF"/>
+          <a:srgbClr val="0B1A33"/>
         </a:solidFill>
         <a:effectLst/>
       </p:bgPr>
@@ -5121,20 +5286,20 @@
       <p:grpSpPr/>
       <p:sp>
         <p:nvSpPr>
-          <p:cNvPr id="2" name="Rectangle 1"/>
+          <p:cNvPr id="2" name="Rounded Rectangle 1"/>
           <p:cNvSpPr/>
           <p:nvPr/>
         </p:nvSpPr>
         <p:spPr>
           <a:xfrm>
-            <a:off x="0" y="0"/>
-            <a:ext cx="9144000" cy="1097280"/>
-          </a:xfrm>
-          <a:prstGeom prst="rect">
+            <a:off x="365760" y="274320"/>
+            <a:ext cx="8412480" cy="6309360"/>
+          </a:xfrm>
+          <a:prstGeom prst="roundRect">
             <a:avLst/>
           </a:prstGeom>
           <a:solidFill>
-            <a:srgbClr val="1B365F"/>
+            <a:srgbClr val="122647"/>
           </a:solidFill>
           <a:ln>
             <a:noFill/>
@@ -5170,14 +5335,14 @@
         </p:nvSpPr>
         <p:spPr>
           <a:xfrm>
-            <a:off x="0" y="1097280"/>
-            <a:ext cx="9144000" cy="45720"/>
+            <a:off x="365760" y="274320"/>
+            <a:ext cx="8412480" cy="36576"/>
           </a:xfrm>
           <a:prstGeom prst="rect">
             <a:avLst/>
           </a:prstGeom>
           <a:solidFill>
-            <a:srgbClr val="CE1A2B"/>
+            <a:srgbClr val="2E75F7"/>
           </a:solidFill>
           <a:ln>
             <a:noFill/>
@@ -5213,8 +5378,8 @@
         </p:nvSpPr>
         <p:spPr>
           <a:xfrm>
-            <a:off x="457200" y="137160"/>
-            <a:ext cx="8229600" cy="822960"/>
+            <a:off x="731520" y="502920"/>
+            <a:ext cx="7680960" cy="640080"/>
           </a:xfrm>
           <a:prstGeom prst="rect">
             <a:avLst/>
@@ -5228,7 +5393,7 @@
           <a:lstStyle/>
           <a:p>
             <a:pPr algn="l">
-              <a:defRPr sz="2800" b="1">
+              <a:defRPr sz="2400" b="1">
                 <a:solidFill>
                   <a:srgbClr val="FFFFFF"/>
                 </a:solidFill>
@@ -5236,7 +5401,7 @@
               </a:defRPr>
             </a:pPr>
             <a:r>
-              <a:t>Programs &amp; Services</a:t>
+              <a:t>PROGRAMS &amp; SERVICES</a:t>
             </a:r>
           </a:p>
         </p:txBody>
@@ -5249,8 +5414,8 @@
         </p:nvSpPr>
         <p:spPr>
           <a:xfrm>
-            <a:off x="640080" y="1371600"/>
-            <a:ext cx="7863840" cy="4572000"/>
+            <a:off x="822960" y="1234440"/>
+            <a:ext cx="7498079" cy="4800600"/>
           </a:xfrm>
           <a:prstGeom prst="rect">
             <a:avLst/>
@@ -5265,75 +5430,59 @@
           <a:p>
             <a:pPr>
               <a:spcAft>
-                <a:spcPts val="600"/>
-              </a:spcAft>
-              <a:defRPr sz="1700">
-                <a:solidFill>
-                  <a:srgbClr val="333333"/>
-                </a:solidFill>
-                <a:latin typeface="Calibri"/>
-              </a:defRPr>
-            </a:pPr>
-            <a:r>
-              <a:t>Trauma System — Division of EMS is the lead agency for Ohio's trauma system</a:t>
+                <a:spcPts val="500"/>
+              </a:spcAft>
+              <a:defRPr sz="1500">
+                <a:solidFill>
+                  <a:srgbClr val="E2E8F0"/>
+                </a:solidFill>
+                <a:latin typeface="Calibri"/>
+              </a:defRPr>
+            </a:pPr>
+            <a:r>
+              <a:t>Trauma System — Division of EMS is the lead agency</a:t>
             </a:r>
           </a:p>
           <a:p>
             <a:pPr lvl="1">
               <a:spcAft>
-                <a:spcPts val="600"/>
+                <a:spcPts val="500"/>
+              </a:spcAft>
+              <a:defRPr sz="1300">
+                <a:solidFill>
+                  <a:srgbClr val="94A3B8"/>
+                </a:solidFill>
+                <a:latin typeface="Calibri"/>
+              </a:defRPr>
+            </a:pPr>
+            <a:r>
+              <a:t>Trauma and burn center directory on the website</a:t>
+            </a:r>
+          </a:p>
+          <a:p>
+            <a:pPr>
+              <a:spcAft>
+                <a:spcPts val="500"/>
               </a:spcAft>
               <a:defRPr sz="1500">
                 <a:solidFill>
-                  <a:srgbClr val="555555"/>
-                </a:solidFill>
-                <a:latin typeface="Calibri"/>
-              </a:defRPr>
-            </a:pPr>
-            <a:r>
-              <a:t>Trauma and burn center directory on the website</a:t>
-            </a:r>
-          </a:p>
-          <a:p>
-            <a:pPr lvl="1">
-              <a:spcAft>
-                <a:spcPts val="600"/>
+                  <a:srgbClr val="E2E8F0"/>
+                </a:solidFill>
+                <a:latin typeface="Calibri"/>
+              </a:defRPr>
+            </a:pPr>
+            <a:r>
+              <a:t>Ohio Trauma Triage Pro — mobile app for field triage decisions</a:t>
+            </a:r>
+          </a:p>
+          <a:p>
+            <a:pPr>
+              <a:spcAft>
+                <a:spcPts val="500"/>
               </a:spcAft>
               <a:defRPr sz="1500">
                 <a:solidFill>
-                  <a:srgbClr val="555555"/>
-                </a:solidFill>
-                <a:latin typeface="Calibri"/>
-              </a:defRPr>
-            </a:pPr>
-            <a:r>
-              <a:t>Trauma triage protocols and resources</a:t>
-            </a:r>
-          </a:p>
-          <a:p>
-            <a:pPr>
-              <a:spcAft>
-                <a:spcPts val="600"/>
-              </a:spcAft>
-              <a:defRPr sz="1700">
-                <a:solidFill>
-                  <a:srgbClr val="333333"/>
-                </a:solidFill>
-                <a:latin typeface="Calibri"/>
-              </a:defRPr>
-            </a:pPr>
-            <a:r>
-              <a:t>Ohio Trauma Triage Pro — mobile app for field triage decisions</a:t>
-            </a:r>
-          </a:p>
-          <a:p>
-            <a:pPr>
-              <a:spcAft>
-                <a:spcPts val="600"/>
-              </a:spcAft>
-              <a:defRPr sz="1700">
-                <a:solidFill>
-                  <a:srgbClr val="333333"/>
+                  <a:srgbClr val="E2E8F0"/>
                 </a:solidFill>
                 <a:latin typeface="Calibri"/>
               </a:defRPr>
@@ -5345,11 +5494,11 @@
           <a:p>
             <a:pPr>
               <a:spcAft>
-                <a:spcPts val="600"/>
-              </a:spcAft>
-              <a:defRPr sz="1700">
-                <a:solidFill>
-                  <a:srgbClr val="333333"/>
+                <a:spcPts val="500"/>
+              </a:spcAft>
+              <a:defRPr sz="1500">
+                <a:solidFill>
+                  <a:srgbClr val="E2E8F0"/>
                 </a:solidFill>
                 <a:latin typeface="Calibri"/>
               </a:defRPr>
@@ -5361,11 +5510,11 @@
           <a:p>
             <a:pPr>
               <a:spcAft>
-                <a:spcPts val="600"/>
-              </a:spcAft>
-              <a:defRPr sz="1700">
-                <a:solidFill>
-                  <a:srgbClr val="333333"/>
+                <a:spcPts val="500"/>
+              </a:spcAft>
+              <a:defRPr sz="1500">
+                <a:solidFill>
+                  <a:srgbClr val="E2E8F0"/>
                 </a:solidFill>
                 <a:latin typeface="Calibri"/>
               </a:defRPr>
@@ -5377,11 +5526,11 @@
           <a:p>
             <a:pPr>
               <a:spcAft>
-                <a:spcPts val="600"/>
-              </a:spcAft>
-              <a:defRPr sz="1700">
-                <a:solidFill>
-                  <a:srgbClr val="333333"/>
+                <a:spcPts val="500"/>
+              </a:spcAft>
+              <a:defRPr sz="1500">
+                <a:solidFill>
+                  <a:srgbClr val="E2E8F0"/>
                 </a:solidFill>
                 <a:latin typeface="Calibri"/>
               </a:defRPr>
@@ -5393,11 +5542,11 @@
           <a:p>
             <a:pPr>
               <a:spcAft>
-                <a:spcPts val="600"/>
-              </a:spcAft>
-              <a:defRPr sz="1700">
-                <a:solidFill>
-                  <a:srgbClr val="333333"/>
+                <a:spcPts val="500"/>
+              </a:spcAft>
+              <a:defRPr sz="1500">
+                <a:solidFill>
+                  <a:srgbClr val="E2E8F0"/>
                 </a:solidFill>
                 <a:latin typeface="Calibri"/>
               </a:defRPr>
@@ -5409,11 +5558,11 @@
           <a:p>
             <a:pPr>
               <a:spcAft>
-                <a:spcPts val="600"/>
-              </a:spcAft>
-              <a:defRPr sz="1700">
-                <a:solidFill>
-                  <a:srgbClr val="333333"/>
+                <a:spcPts val="500"/>
+              </a:spcAft>
+              <a:defRPr sz="1500">
+                <a:solidFill>
+                  <a:srgbClr val="E2E8F0"/>
                 </a:solidFill>
                 <a:latin typeface="Calibri"/>
               </a:defRPr>
@@ -5432,8 +5581,8 @@
         </p:nvSpPr>
         <p:spPr>
           <a:xfrm>
-            <a:off x="274320" y="6400800"/>
-            <a:ext cx="8595360" cy="365760"/>
+            <a:off x="457200" y="6400800"/>
+            <a:ext cx="8229600" cy="274320"/>
           </a:xfrm>
           <a:prstGeom prst="rect">
             <a:avLst/>
@@ -5447,15 +5596,15 @@
           <a:lstStyle/>
           <a:p>
             <a:pPr algn="ctr">
-              <a:defRPr sz="900" b="0">
-                <a:solidFill>
-                  <a:srgbClr val="999999"/>
-                </a:solidFill>
-                <a:latin typeface="Calibri"/>
-              </a:defRPr>
-            </a:pPr>
-            <a:r>
-              <a:t>Ohio Division of EMS  |  ems.ohio.gov</a:t>
+              <a:defRPr sz="800" b="0">
+                <a:solidFill>
+                  <a:srgbClr val="64748B"/>
+                </a:solidFill>
+                <a:latin typeface="Calibri"/>
+              </a:defRPr>
+            </a:pPr>
+            <a:r>
+              <a:t>ems.ohio.gov  |  Mileage Design</a:t>
             </a:r>
           </a:p>
         </p:txBody>
@@ -5474,7 +5623,7 @@
     <p:bg>
       <p:bgPr>
         <a:solidFill>
-          <a:srgbClr val="FFFFFF"/>
+          <a:srgbClr val="0B1A33"/>
         </a:solidFill>
         <a:effectLst/>
       </p:bgPr>
@@ -5488,20 +5637,20 @@
       <p:grpSpPr/>
       <p:sp>
         <p:nvSpPr>
-          <p:cNvPr id="2" name="Rectangle 1"/>
+          <p:cNvPr id="2" name="Rounded Rectangle 1"/>
           <p:cNvSpPr/>
           <p:nvPr/>
         </p:nvSpPr>
         <p:spPr>
           <a:xfrm>
-            <a:off x="0" y="0"/>
-            <a:ext cx="9144000" cy="1097280"/>
-          </a:xfrm>
-          <a:prstGeom prst="rect">
+            <a:off x="365760" y="274320"/>
+            <a:ext cx="8412480" cy="6309360"/>
+          </a:xfrm>
+          <a:prstGeom prst="roundRect">
             <a:avLst/>
           </a:prstGeom>
           <a:solidFill>
-            <a:srgbClr val="1B365F"/>
+            <a:srgbClr val="122647"/>
           </a:solidFill>
           <a:ln>
             <a:noFill/>
@@ -5537,14 +5686,14 @@
         </p:nvSpPr>
         <p:spPr>
           <a:xfrm>
-            <a:off x="0" y="1097280"/>
-            <a:ext cx="9144000" cy="45720"/>
+            <a:off x="365760" y="274320"/>
+            <a:ext cx="8412480" cy="36576"/>
           </a:xfrm>
           <a:prstGeom prst="rect">
             <a:avLst/>
           </a:prstGeom>
           <a:solidFill>
-            <a:srgbClr val="CE1A2B"/>
+            <a:srgbClr val="2E75F7"/>
           </a:solidFill>
           <a:ln>
             <a:noFill/>
@@ -5580,8 +5729,8 @@
         </p:nvSpPr>
         <p:spPr>
           <a:xfrm>
-            <a:off x="457200" y="137160"/>
-            <a:ext cx="8229600" cy="822960"/>
+            <a:off x="731520" y="502920"/>
+            <a:ext cx="7680960" cy="640080"/>
           </a:xfrm>
           <a:prstGeom prst="rect">
             <a:avLst/>
@@ -5595,7 +5744,7 @@
           <a:lstStyle/>
           <a:p>
             <a:pPr algn="l">
-              <a:defRPr sz="2800" b="1">
+              <a:defRPr sz="2400" b="1">
                 <a:solidFill>
                   <a:srgbClr val="FFFFFF"/>
                 </a:solidFill>
@@ -5603,7 +5752,7 @@
               </a:defRPr>
             </a:pPr>
             <a:r>
-              <a:t>How to Find What You Need</a:t>
+              <a:t>HOW TO FIND WHAT YOU NEED</a:t>
             </a:r>
           </a:p>
         </p:txBody>
@@ -5616,8 +5765,8 @@
         </p:nvSpPr>
         <p:spPr>
           <a:xfrm>
-            <a:off x="457200" y="1234440"/>
-            <a:ext cx="8229600" cy="457200"/>
+            <a:off x="731520" y="1097280"/>
+            <a:ext cx="7680960" cy="365760"/>
           </a:xfrm>
           <a:prstGeom prst="rect">
             <a:avLst/>
@@ -5631,9 +5780,9 @@
           <a:lstStyle/>
           <a:p>
             <a:pPr algn="l">
-              <a:defRPr sz="1400" b="0">
-                <a:solidFill>
-                  <a:srgbClr val="666666"/>
+              <a:defRPr sz="1200" b="0">
+                <a:solidFill>
+                  <a:srgbClr val="94A3B8"/>
                 </a:solidFill>
                 <a:latin typeface="Calibri"/>
               </a:defRPr>
@@ -5652,8 +5801,8 @@
         </p:nvSpPr>
         <p:spPr>
           <a:xfrm>
-            <a:off x="640080" y="1691640"/>
-            <a:ext cx="7863840" cy="4251960"/>
+            <a:off x="822960" y="1463040"/>
+            <a:ext cx="7498079" cy="4572000"/>
           </a:xfrm>
           <a:prstGeom prst="rect">
             <a:avLst/>
@@ -5668,11 +5817,11 @@
           <a:p>
             <a:pPr>
               <a:spcAft>
-                <a:spcPts val="600"/>
-              </a:spcAft>
-              <a:defRPr sz="1700">
-                <a:solidFill>
-                  <a:srgbClr val="333333"/>
+                <a:spcPts val="500"/>
+              </a:spcAft>
+              <a:defRPr sz="1500">
+                <a:solidFill>
+                  <a:srgbClr val="E2E8F0"/>
                 </a:solidFill>
                 <a:latin typeface="Calibri"/>
               </a:defRPr>
@@ -5684,11 +5833,11 @@
           <a:p>
             <a:pPr>
               <a:spcAft>
-                <a:spcPts val="600"/>
-              </a:spcAft>
-              <a:defRPr sz="1700">
-                <a:solidFill>
-                  <a:srgbClr val="333333"/>
+                <a:spcPts val="500"/>
+              </a:spcAft>
+              <a:defRPr sz="1500">
+                <a:solidFill>
+                  <a:srgbClr val="E2E8F0"/>
                 </a:solidFill>
                 <a:latin typeface="Calibri"/>
               </a:defRPr>
@@ -5700,11 +5849,11 @@
           <a:p>
             <a:pPr>
               <a:spcAft>
-                <a:spcPts val="600"/>
-              </a:spcAft>
-              <a:defRPr sz="1700">
-                <a:solidFill>
-                  <a:srgbClr val="333333"/>
+                <a:spcPts val="500"/>
+              </a:spcAft>
+              <a:defRPr sz="1500">
+                <a:solidFill>
+                  <a:srgbClr val="E2E8F0"/>
                 </a:solidFill>
                 <a:latin typeface="Calibri"/>
               </a:defRPr>
@@ -5716,11 +5865,11 @@
           <a:p>
             <a:pPr>
               <a:spcAft>
-                <a:spcPts val="600"/>
-              </a:spcAft>
-              <a:defRPr sz="1700">
-                <a:solidFill>
-                  <a:srgbClr val="333333"/>
+                <a:spcPts val="500"/>
+              </a:spcAft>
+              <a:defRPr sz="1500">
+                <a:solidFill>
+                  <a:srgbClr val="E2E8F0"/>
                 </a:solidFill>
                 <a:latin typeface="Calibri"/>
               </a:defRPr>
@@ -5732,11 +5881,11 @@
           <a:p>
             <a:pPr>
               <a:spcAft>
-                <a:spcPts val="600"/>
-              </a:spcAft>
-              <a:defRPr sz="1700">
-                <a:solidFill>
-                  <a:srgbClr val="333333"/>
+                <a:spcPts val="500"/>
+              </a:spcAft>
+              <a:defRPr sz="1500">
+                <a:solidFill>
+                  <a:srgbClr val="E2E8F0"/>
                 </a:solidFill>
                 <a:latin typeface="Calibri"/>
               </a:defRPr>
@@ -5748,27 +5897,27 @@
           <a:p>
             <a:pPr>
               <a:spcAft>
-                <a:spcPts val="600"/>
-              </a:spcAft>
-              <a:defRPr sz="1700">
-                <a:solidFill>
-                  <a:srgbClr val="333333"/>
-                </a:solidFill>
-                <a:latin typeface="Calibri"/>
-              </a:defRPr>
-            </a:pPr>
-            <a:r>
-              <a:t>Need to verify someone's cert? — services.dps.ohio.gov/EMSProviders/Verification</a:t>
-            </a:r>
-          </a:p>
-          <a:p>
-            <a:pPr>
-              <a:spcAft>
-                <a:spcPts val="600"/>
-              </a:spcAft>
-              <a:defRPr sz="1700">
-                <a:solidFill>
-                  <a:srgbClr val="333333"/>
+                <a:spcPts val="500"/>
+              </a:spcAft>
+              <a:defRPr sz="1500">
+                <a:solidFill>
+                  <a:srgbClr val="E2E8F0"/>
+                </a:solidFill>
+                <a:latin typeface="Calibri"/>
+              </a:defRPr>
+            </a:pPr>
+            <a:r>
+              <a:t>Need to verify someone’s cert? — services.dps.ohio.gov</a:t>
+            </a:r>
+          </a:p>
+          <a:p>
+            <a:pPr>
+              <a:spcAft>
+                <a:spcPts val="500"/>
+              </a:spcAft>
+              <a:defRPr sz="1500">
+                <a:solidFill>
+                  <a:srgbClr val="E2E8F0"/>
                 </a:solidFill>
                 <a:latin typeface="Calibri"/>
               </a:defRPr>
@@ -5780,11 +5929,11 @@
           <a:p>
             <a:pPr>
               <a:spcAft>
-                <a:spcPts val="600"/>
-              </a:spcAft>
-              <a:defRPr sz="1700">
-                <a:solidFill>
-                  <a:srgbClr val="333333"/>
+                <a:spcPts val="500"/>
+              </a:spcAft>
+              <a:defRPr sz="1500">
+                <a:solidFill>
+                  <a:srgbClr val="E2E8F0"/>
                 </a:solidFill>
                 <a:latin typeface="Calibri"/>
               </a:defRPr>
@@ -5796,11 +5945,11 @@
           <a:p>
             <a:pPr>
               <a:spcAft>
-                <a:spcPts val="600"/>
-              </a:spcAft>
-              <a:defRPr sz="1700">
-                <a:solidFill>
-                  <a:srgbClr val="333333"/>
+                <a:spcPts val="500"/>
+              </a:spcAft>
+              <a:defRPr sz="1500">
+                <a:solidFill>
+                  <a:srgbClr val="E2E8F0"/>
                 </a:solidFill>
                 <a:latin typeface="Calibri"/>
               </a:defRPr>
@@ -5819,8 +5968,8 @@
         </p:nvSpPr>
         <p:spPr>
           <a:xfrm>
-            <a:off x="274320" y="6400800"/>
-            <a:ext cx="8595360" cy="365760"/>
+            <a:off x="457200" y="6400800"/>
+            <a:ext cx="8229600" cy="274320"/>
           </a:xfrm>
           <a:prstGeom prst="rect">
             <a:avLst/>
@@ -5834,15 +5983,15 @@
           <a:lstStyle/>
           <a:p>
             <a:pPr algn="ctr">
-              <a:defRPr sz="900" b="0">
-                <a:solidFill>
-                  <a:srgbClr val="999999"/>
-                </a:solidFill>
-                <a:latin typeface="Calibri"/>
-              </a:defRPr>
-            </a:pPr>
-            <a:r>
-              <a:t>Ohio Division of EMS  |  ems.ohio.gov</a:t>
+              <a:defRPr sz="800" b="0">
+                <a:solidFill>
+                  <a:srgbClr val="64748B"/>
+                </a:solidFill>
+                <a:latin typeface="Calibri"/>
+              </a:defRPr>
+            </a:pPr>
+            <a:r>
+              <a:t>ems.ohio.gov  |  Mileage Design</a:t>
             </a:r>
           </a:p>
         </p:txBody>
@@ -5861,7 +6010,7 @@
     <p:bg>
       <p:bgPr>
         <a:solidFill>
-          <a:srgbClr val="FFFFFF"/>
+          <a:srgbClr val="0B1A33"/>
         </a:solidFill>
         <a:effectLst/>
       </p:bgPr>
@@ -5875,20 +6024,20 @@
       <p:grpSpPr/>
       <p:sp>
         <p:nvSpPr>
-          <p:cNvPr id="2" name="Rectangle 1"/>
+          <p:cNvPr id="2" name="Rounded Rectangle 1"/>
           <p:cNvSpPr/>
           <p:nvPr/>
         </p:nvSpPr>
         <p:spPr>
           <a:xfrm>
-            <a:off x="0" y="0"/>
-            <a:ext cx="9144000" cy="1097280"/>
-          </a:xfrm>
-          <a:prstGeom prst="rect">
+            <a:off x="365760" y="274320"/>
+            <a:ext cx="8412480" cy="6309360"/>
+          </a:xfrm>
+          <a:prstGeom prst="roundRect">
             <a:avLst/>
           </a:prstGeom>
           <a:solidFill>
-            <a:srgbClr val="1B365F"/>
+            <a:srgbClr val="122647"/>
           </a:solidFill>
           <a:ln>
             <a:noFill/>
@@ -5924,14 +6073,14 @@
         </p:nvSpPr>
         <p:spPr>
           <a:xfrm>
-            <a:off x="0" y="1097280"/>
-            <a:ext cx="9144000" cy="45720"/>
+            <a:off x="365760" y="274320"/>
+            <a:ext cx="8412480" cy="36576"/>
           </a:xfrm>
           <a:prstGeom prst="rect">
             <a:avLst/>
           </a:prstGeom>
           <a:solidFill>
-            <a:srgbClr val="CE1A2B"/>
+            <a:srgbClr val="2E75F7"/>
           </a:solidFill>
           <a:ln>
             <a:noFill/>
@@ -5967,8 +6116,8 @@
         </p:nvSpPr>
         <p:spPr>
           <a:xfrm>
-            <a:off x="457200" y="137160"/>
-            <a:ext cx="8229600" cy="822960"/>
+            <a:off x="731520" y="502920"/>
+            <a:ext cx="7680960" cy="640080"/>
           </a:xfrm>
           <a:prstGeom prst="rect">
             <a:avLst/>
@@ -5982,7 +6131,7 @@
           <a:lstStyle/>
           <a:p>
             <a:pPr algn="l">
-              <a:defRPr sz="2800" b="1">
+              <a:defRPr sz="2400" b="1">
                 <a:solidFill>
                   <a:srgbClr val="FFFFFF"/>
                 </a:solidFill>
@@ -5990,7 +6139,7 @@
               </a:defRPr>
             </a:pPr>
             <a:r>
-              <a:t>Summary — Key Takeaways</a:t>
+              <a:t>SUMMARY — KEY TAKEAWAYS</a:t>
             </a:r>
           </a:p>
         </p:txBody>
@@ -6003,8 +6152,8 @@
         </p:nvSpPr>
         <p:spPr>
           <a:xfrm>
-            <a:off x="640080" y="1371600"/>
-            <a:ext cx="7863840" cy="4572000"/>
+            <a:off x="822960" y="1234440"/>
+            <a:ext cx="7498079" cy="4800600"/>
           </a:xfrm>
           <a:prstGeom prst="rect">
             <a:avLst/>
@@ -6019,27 +6168,27 @@
           <a:p>
             <a:pPr>
               <a:spcAft>
-                <a:spcPts val="600"/>
-              </a:spcAft>
-              <a:defRPr sz="1700">
-                <a:solidFill>
-                  <a:srgbClr val="333333"/>
-                </a:solidFill>
-                <a:latin typeface="Calibri"/>
-              </a:defRPr>
-            </a:pPr>
-            <a:r>
-              <a:t>The Ohio Division of EMS website (ems.ohio.gov) is the authoritative source for all EMS and fire certification in Ohio</a:t>
-            </a:r>
-          </a:p>
-          <a:p>
-            <a:pPr>
-              <a:spcAft>
-                <a:spcPts val="600"/>
-              </a:spcAft>
-              <a:defRPr sz="1700">
-                <a:solidFill>
-                  <a:srgbClr val="333333"/>
+                <a:spcPts val="500"/>
+              </a:spcAft>
+              <a:defRPr sz="1500">
+                <a:solidFill>
+                  <a:srgbClr val="E2E8F0"/>
+                </a:solidFill>
+                <a:latin typeface="Calibri"/>
+              </a:defRPr>
+            </a:pPr>
+            <a:r>
+              <a:t>ems.ohio.gov is the authoritative source for all EMS and fire certification in Ohio</a:t>
+            </a:r>
+          </a:p>
+          <a:p>
+            <a:pPr>
+              <a:spcAft>
+                <a:spcPts val="500"/>
+              </a:spcAft>
+              <a:defRPr sz="1500">
+                <a:solidFill>
+                  <a:srgbClr val="E2E8F0"/>
                 </a:solidFill>
                 <a:latin typeface="Calibri"/>
               </a:defRPr>
@@ -6051,81 +6200,81 @@
           <a:p>
             <a:pPr>
               <a:spcAft>
-                <a:spcPts val="600"/>
-              </a:spcAft>
-              <a:defRPr sz="1700">
-                <a:solidFill>
-                  <a:srgbClr val="333333"/>
-                </a:solidFill>
-                <a:latin typeface="Calibri"/>
-              </a:defRPr>
-            </a:pPr>
-            <a:r>
-              <a:t>Fire certifications: Vol. FF, FF I (160 hrs), FF I&amp;II (244 hrs), FF II Transition (84 hrs), Inspector, Instructor</a:t>
-            </a:r>
-          </a:p>
-          <a:p>
-            <a:pPr>
-              <a:spcAft>
-                <a:spcPts val="600"/>
-              </a:spcAft>
-              <a:defRPr sz="1700">
-                <a:solidFill>
-                  <a:srgbClr val="333333"/>
-                </a:solidFill>
-                <a:latin typeface="Calibri"/>
-              </a:defRPr>
-            </a:pPr>
-            <a:r>
-              <a:t>Instructor certification requires 60-hour course + supervised teaching — OAC 4765-21</a:t>
-            </a:r>
-          </a:p>
-          <a:p>
-            <a:pPr>
-              <a:spcAft>
-                <a:spcPts val="600"/>
-              </a:spcAft>
-              <a:defRPr sz="1700">
-                <a:solidFill>
-                  <a:srgbClr val="333333"/>
-                </a:solidFill>
-                <a:latin typeface="Calibri"/>
-              </a:defRPr>
-            </a:pPr>
-            <a:r>
-              <a:t>CE and renewal requirements vary by level and cycle length — multiple renewal pathways</a:t>
-            </a:r>
-          </a:p>
-          <a:p>
-            <a:pPr>
-              <a:spcAft>
-                <a:spcPts val="600"/>
-              </a:spcAft>
-              <a:defRPr sz="1700">
-                <a:solidFill>
-                  <a:srgbClr val="333333"/>
-                </a:solidFill>
-                <a:latin typeface="Calibri"/>
-              </a:defRPr>
-            </a:pPr>
-            <a:r>
-              <a:t>The website provides verification tools, training directories, course packets, and downloadable OAC rules</a:t>
-            </a:r>
-          </a:p>
-          <a:p>
-            <a:pPr>
-              <a:spcAft>
-                <a:spcPts val="600"/>
-              </a:spcAft>
-              <a:defRPr sz="1700">
-                <a:solidFill>
-                  <a:srgbClr val="333333"/>
-                </a:solidFill>
-                <a:latin typeface="Calibri"/>
-              </a:defRPr>
-            </a:pPr>
-            <a:r>
-              <a:t>As future instructors, knowing this website inside and out is essential to guiding your students</a:t>
+                <a:spcPts val="500"/>
+              </a:spcAft>
+              <a:defRPr sz="1500">
+                <a:solidFill>
+                  <a:srgbClr val="E2E8F0"/>
+                </a:solidFill>
+                <a:latin typeface="Calibri"/>
+              </a:defRPr>
+            </a:pPr>
+            <a:r>
+              <a:t>Fire certs: Vol. FF, FF I (160 hrs), FF I&amp;II (244 hrs), FF II Transition (84 hrs)</a:t>
+            </a:r>
+          </a:p>
+          <a:p>
+            <a:pPr>
+              <a:spcAft>
+                <a:spcPts val="500"/>
+              </a:spcAft>
+              <a:defRPr sz="1500">
+                <a:solidFill>
+                  <a:srgbClr val="E2E8F0"/>
+                </a:solidFill>
+                <a:latin typeface="Calibri"/>
+              </a:defRPr>
+            </a:pPr>
+            <a:r>
+              <a:t>Instructor cert requires 60-hour course + supervised teaching — OAC 4765-21</a:t>
+            </a:r>
+          </a:p>
+          <a:p>
+            <a:pPr>
+              <a:spcAft>
+                <a:spcPts val="500"/>
+              </a:spcAft>
+              <a:defRPr sz="1500">
+                <a:solidFill>
+                  <a:srgbClr val="E2E8F0"/>
+                </a:solidFill>
+                <a:latin typeface="Calibri"/>
+              </a:defRPr>
+            </a:pPr>
+            <a:r>
+              <a:t>CE and renewal requirements vary by level and cycle length — multiple pathways</a:t>
+            </a:r>
+          </a:p>
+          <a:p>
+            <a:pPr>
+              <a:spcAft>
+                <a:spcPts val="500"/>
+              </a:spcAft>
+              <a:defRPr sz="1500">
+                <a:solidFill>
+                  <a:srgbClr val="E2E8F0"/>
+                </a:solidFill>
+                <a:latin typeface="Calibri"/>
+              </a:defRPr>
+            </a:pPr>
+            <a:r>
+              <a:t>The website provides verification tools, training directories, and downloadable OAC rules</a:t>
+            </a:r>
+          </a:p>
+          <a:p>
+            <a:pPr>
+              <a:spcAft>
+                <a:spcPts val="500"/>
+              </a:spcAft>
+              <a:defRPr sz="1500">
+                <a:solidFill>
+                  <a:srgbClr val="E2E8F0"/>
+                </a:solidFill>
+                <a:latin typeface="Calibri"/>
+              </a:defRPr>
+            </a:pPr>
+            <a:r>
+              <a:t>As future instructors, knowing this website inside and out is essential</a:t>
             </a:r>
           </a:p>
         </p:txBody>
@@ -6138,8 +6287,8 @@
         </p:nvSpPr>
         <p:spPr>
           <a:xfrm>
-            <a:off x="274320" y="6400800"/>
-            <a:ext cx="8595360" cy="365760"/>
+            <a:off x="457200" y="6400800"/>
+            <a:ext cx="8229600" cy="274320"/>
           </a:xfrm>
           <a:prstGeom prst="rect">
             <a:avLst/>
@@ -6153,15 +6302,15 @@
           <a:lstStyle/>
           <a:p>
             <a:pPr algn="ctr">
-              <a:defRPr sz="900" b="0">
-                <a:solidFill>
-                  <a:srgbClr val="999999"/>
-                </a:solidFill>
-                <a:latin typeface="Calibri"/>
-              </a:defRPr>
-            </a:pPr>
-            <a:r>
-              <a:t>Ohio Division of EMS  |  ems.ohio.gov</a:t>
+              <a:defRPr sz="800" b="0">
+                <a:solidFill>
+                  <a:srgbClr val="64748B"/>
+                </a:solidFill>
+                <a:latin typeface="Calibri"/>
+              </a:defRPr>
+            </a:pPr>
+            <a:r>
+              <a:t>ems.ohio.gov  |  Mileage Design</a:t>
             </a:r>
           </a:p>
         </p:txBody>
@@ -6180,7 +6329,7 @@
     <p:bg>
       <p:bgPr>
         <a:solidFill>
-          <a:srgbClr val="1B365F"/>
+          <a:srgbClr val="0B1A33"/>
         </a:solidFill>
         <a:effectLst/>
       </p:bgPr>
@@ -6194,20 +6343,20 @@
       <p:grpSpPr/>
       <p:sp>
         <p:nvSpPr>
-          <p:cNvPr id="2" name="Rectangle 1"/>
+          <p:cNvPr id="2" name="Rounded Rectangle 1"/>
           <p:cNvSpPr/>
           <p:nvPr/>
         </p:nvSpPr>
         <p:spPr>
           <a:xfrm>
-            <a:off x="0" y="2926080"/>
-            <a:ext cx="9144000" cy="54864"/>
-          </a:xfrm>
-          <a:prstGeom prst="rect">
+            <a:off x="1828800" y="1828800"/>
+            <a:ext cx="5486400" cy="3200400"/>
+          </a:xfrm>
+          <a:prstGeom prst="roundRect">
             <a:avLst/>
           </a:prstGeom>
           <a:solidFill>
-            <a:srgbClr val="CE1A2B"/>
+            <a:srgbClr val="122647"/>
           </a:solidFill>
           <a:ln>
             <a:noFill/>
@@ -6237,14 +6386,57 @@
       </p:sp>
       <p:sp>
         <p:nvSpPr>
-          <p:cNvPr id="3" name="TextBox 2"/>
+          <p:cNvPr id="3" name="Rectangle 2"/>
+          <p:cNvSpPr/>
+          <p:nvPr/>
+        </p:nvSpPr>
+        <p:spPr>
+          <a:xfrm>
+            <a:off x="1828800" y="1828800"/>
+            <a:ext cx="5486400" cy="36576"/>
+          </a:xfrm>
+          <a:prstGeom prst="rect">
+            <a:avLst/>
+          </a:prstGeom>
+          <a:solidFill>
+            <a:srgbClr val="2E75F7"/>
+          </a:solidFill>
+          <a:ln>
+            <a:noFill/>
+          </a:ln>
+        </p:spPr>
+        <p:style>
+          <a:lnRef idx="1">
+            <a:schemeClr val="accent1"/>
+          </a:lnRef>
+          <a:fillRef idx="3">
+            <a:schemeClr val="accent1"/>
+          </a:fillRef>
+          <a:effectRef idx="2">
+            <a:schemeClr val="accent1"/>
+          </a:effectRef>
+          <a:fontRef idx="minor">
+            <a:schemeClr val="lt1"/>
+          </a:fontRef>
+        </p:style>
+        <p:txBody>
+          <a:bodyPr rtlCol="0" anchor="ctr"/>
+          <a:lstStyle/>
+          <a:p>
+            <a:pPr algn="ctr"/>
+          </a:p>
+        </p:txBody>
+      </p:sp>
+      <p:sp>
+        <p:nvSpPr>
+          <p:cNvPr id="4" name="TextBox 3"/>
           <p:cNvSpPr txBox="1"/>
           <p:nvPr/>
         </p:nvSpPr>
         <p:spPr>
           <a:xfrm>
-            <a:off x="457200" y="1371600"/>
-            <a:ext cx="8229600" cy="1371600"/>
+            <a:off x="1828800" y="2286000"/>
+            <a:ext cx="5486400" cy="1371600"/>
           </a:xfrm>
           <a:prstGeom prst="rect">
             <a:avLst/>
@@ -6258,7 +6450,7 @@
           <a:lstStyle/>
           <a:p>
             <a:pPr algn="ctr">
-              <a:defRPr sz="4400" b="1">
+              <a:defRPr sz="4000" b="1">
                 <a:solidFill>
                   <a:srgbClr val="FFFFFF"/>
                 </a:solidFill>
@@ -6266,21 +6458,21 @@
               </a:defRPr>
             </a:pPr>
             <a:r>
-              <a:t>Quiz Time!</a:t>
-            </a:r>
-          </a:p>
-        </p:txBody>
-      </p:sp>
-      <p:sp>
-        <p:nvSpPr>
-          <p:cNvPr id="4" name="TextBox 3"/>
+              <a:t>QUIZ TIME</a:t>
+            </a:r>
+          </a:p>
+        </p:txBody>
+      </p:sp>
+      <p:sp>
+        <p:nvSpPr>
+          <p:cNvPr id="5" name="TextBox 4"/>
           <p:cNvSpPr txBox="1"/>
           <p:nvPr/>
         </p:nvSpPr>
         <p:spPr>
           <a:xfrm>
-            <a:off x="457200" y="3291840"/>
-            <a:ext cx="8229600" cy="914400"/>
+            <a:off x="1828800" y="3474720"/>
+            <a:ext cx="5486400" cy="731520"/>
           </a:xfrm>
           <a:prstGeom prst="rect">
             <a:avLst/>
@@ -6294,15 +6486,15 @@
           <a:lstStyle/>
           <a:p>
             <a:pPr algn="ctr">
-              <a:defRPr sz="2200" b="0">
-                <a:solidFill>
-                  <a:srgbClr val="CCCCCC"/>
-                </a:solidFill>
-                <a:latin typeface="Calibri"/>
-              </a:defRPr>
-            </a:pPr>
-            <a:r>
-              <a:t>10 Questions — Let's See What You Learned</a:t>
+              <a:defRPr sz="1600" b="0">
+                <a:solidFill>
+                  <a:srgbClr val="94A3B8"/>
+                </a:solidFill>
+                <a:latin typeface="Calibri"/>
+              </a:defRPr>
+            </a:pPr>
+            <a:r>
+              <a:t>10 Questions — Let’s See What You Learned</a:t>
             </a:r>
           </a:p>
         </p:txBody>
@@ -6321,7 +6513,7 @@
     <p:bg>
       <p:bgPr>
         <a:solidFill>
-          <a:srgbClr val="FFFFFF"/>
+          <a:srgbClr val="0B1A33"/>
         </a:solidFill>
         <a:effectLst/>
       </p:bgPr>
@@ -6335,20 +6527,20 @@
       <p:grpSpPr/>
       <p:sp>
         <p:nvSpPr>
-          <p:cNvPr id="2" name="Rectangle 1"/>
+          <p:cNvPr id="2" name="Rounded Rectangle 1"/>
           <p:cNvSpPr/>
           <p:nvPr/>
         </p:nvSpPr>
         <p:spPr>
           <a:xfrm>
-            <a:off x="0" y="0"/>
-            <a:ext cx="9144000" cy="1097280"/>
-          </a:xfrm>
-          <a:prstGeom prst="rect">
+            <a:off x="365760" y="274320"/>
+            <a:ext cx="8412480" cy="6309360"/>
+          </a:xfrm>
+          <a:prstGeom prst="roundRect">
             <a:avLst/>
           </a:prstGeom>
           <a:solidFill>
-            <a:srgbClr val="1B365F"/>
+            <a:srgbClr val="122647"/>
           </a:solidFill>
           <a:ln>
             <a:noFill/>
@@ -6384,14 +6576,14 @@
         </p:nvSpPr>
         <p:spPr>
           <a:xfrm>
-            <a:off x="0" y="1097280"/>
-            <a:ext cx="9144000" cy="45720"/>
+            <a:off x="365760" y="274320"/>
+            <a:ext cx="8412480" cy="36576"/>
           </a:xfrm>
           <a:prstGeom prst="rect">
             <a:avLst/>
           </a:prstGeom>
           <a:solidFill>
-            <a:srgbClr val="CE1A2B"/>
+            <a:srgbClr val="2E75F7"/>
           </a:solidFill>
           <a:ln>
             <a:noFill/>
@@ -6427,8 +6619,8 @@
         </p:nvSpPr>
         <p:spPr>
           <a:xfrm>
-            <a:off x="457200" y="137160"/>
-            <a:ext cx="8229600" cy="822960"/>
+            <a:off x="731520" y="548640"/>
+            <a:ext cx="7680960" cy="822960"/>
           </a:xfrm>
           <a:prstGeom prst="rect">
             <a:avLst/>
@@ -6442,7 +6634,7 @@
           <a:lstStyle/>
           <a:p>
             <a:pPr algn="l">
-              <a:defRPr sz="2400" b="1">
+              <a:defRPr sz="2200" b="1">
                 <a:solidFill>
                   <a:srgbClr val="FFFFFF"/>
                 </a:solidFill>
@@ -6463,8 +6655,8 @@
         </p:nvSpPr>
         <p:spPr>
           <a:xfrm>
-            <a:off x="914400" y="1828800"/>
-            <a:ext cx="7315200" cy="3657600"/>
+            <a:off x="1097280" y="1645920"/>
+            <a:ext cx="6949440" cy="3200400"/>
           </a:xfrm>
           <a:prstGeom prst="rect">
             <a:avLst/>
@@ -6479,65 +6671,65 @@
           <a:p>
             <a:pPr>
               <a:spcAft>
-                <a:spcPts val="1400"/>
-              </a:spcAft>
-              <a:defRPr sz="2000">
-                <a:solidFill>
-                  <a:srgbClr val="333333"/>
-                </a:solidFill>
-                <a:latin typeface="Calibri"/>
-              </a:defRPr>
-            </a:pPr>
-            <a:r>
-              <a:t>A) Ohio Department of Health</a:t>
-            </a:r>
-          </a:p>
-          <a:p>
-            <a:pPr>
-              <a:spcAft>
-                <a:spcPts val="1400"/>
-              </a:spcAft>
-              <a:defRPr sz="2000">
-                <a:solidFill>
-                  <a:srgbClr val="333333"/>
-                </a:solidFill>
-                <a:latin typeface="Calibri"/>
-              </a:defRPr>
-            </a:pPr>
-            <a:r>
-              <a:t>B) Ohio Department of Public Safety</a:t>
-            </a:r>
-          </a:p>
-          <a:p>
-            <a:pPr>
-              <a:spcAft>
-                <a:spcPts val="1400"/>
-              </a:spcAft>
-              <a:defRPr sz="2000">
-                <a:solidFill>
-                  <a:srgbClr val="333333"/>
-                </a:solidFill>
-                <a:latin typeface="Calibri"/>
-              </a:defRPr>
-            </a:pPr>
-            <a:r>
-              <a:t>C) Ohio Department of Education</a:t>
-            </a:r>
-          </a:p>
-          <a:p>
-            <a:pPr>
-              <a:spcAft>
-                <a:spcPts val="1400"/>
-              </a:spcAft>
-              <a:defRPr sz="2000">
-                <a:solidFill>
-                  <a:srgbClr val="333333"/>
-                </a:solidFill>
-                <a:latin typeface="Calibri"/>
-              </a:defRPr>
-            </a:pPr>
-            <a:r>
-              <a:t>D) Ohio Department of Commerce</a:t>
+                <a:spcPts val="1200"/>
+              </a:spcAft>
+              <a:defRPr sz="1800">
+                <a:solidFill>
+                  <a:srgbClr val="E2E8F0"/>
+                </a:solidFill>
+                <a:latin typeface="Calibri"/>
+              </a:defRPr>
+            </a:pPr>
+            <a:r>
+              <a:t>A) Ohio Dept. of Health</a:t>
+            </a:r>
+          </a:p>
+          <a:p>
+            <a:pPr>
+              <a:spcAft>
+                <a:spcPts val="1200"/>
+              </a:spcAft>
+              <a:defRPr sz="1800">
+                <a:solidFill>
+                  <a:srgbClr val="E2E8F0"/>
+                </a:solidFill>
+                <a:latin typeface="Calibri"/>
+              </a:defRPr>
+            </a:pPr>
+            <a:r>
+              <a:t>B) Ohio Dept. of Public Safety</a:t>
+            </a:r>
+          </a:p>
+          <a:p>
+            <a:pPr>
+              <a:spcAft>
+                <a:spcPts val="1200"/>
+              </a:spcAft>
+              <a:defRPr sz="1800">
+                <a:solidFill>
+                  <a:srgbClr val="E2E8F0"/>
+                </a:solidFill>
+                <a:latin typeface="Calibri"/>
+              </a:defRPr>
+            </a:pPr>
+            <a:r>
+              <a:t>C) Ohio Dept. of Education</a:t>
+            </a:r>
+          </a:p>
+          <a:p>
+            <a:pPr>
+              <a:spcAft>
+                <a:spcPts val="1200"/>
+              </a:spcAft>
+              <a:defRPr sz="1800">
+                <a:solidFill>
+                  <a:srgbClr val="E2E8F0"/>
+                </a:solidFill>
+                <a:latin typeface="Calibri"/>
+              </a:defRPr>
+            </a:pPr>
+            <a:r>
+              <a:t>D) Ohio Dept. of Commerce</a:t>
             </a:r>
           </a:p>
         </p:txBody>
@@ -6550,19 +6742,17 @@
         </p:nvSpPr>
         <p:spPr>
           <a:xfrm>
-            <a:off x="1371600" y="5029200"/>
-            <a:ext cx="6400800" cy="640080"/>
+            <a:off x="1371600" y="4846320"/>
+            <a:ext cx="6400800" cy="594360"/>
           </a:xfrm>
           <a:prstGeom prst="roundRect">
             <a:avLst/>
           </a:prstGeom>
           <a:solidFill>
-            <a:srgbClr val="E8F5E9"/>
+            <a:srgbClr val="0D2B1A"/>
           </a:solidFill>
           <a:ln>
-            <a:solidFill>
-              <a:srgbClr val="4CAF50"/>
-            </a:solidFill>
+            <a:noFill/>
           </a:ln>
         </p:spPr>
         <p:style>
@@ -6595,8 +6785,8 @@
         </p:nvSpPr>
         <p:spPr>
           <a:xfrm>
-            <a:off x="1554480" y="5074920"/>
-            <a:ext cx="6035040" cy="548640"/>
+            <a:off x="1554480" y="4892040"/>
+            <a:ext cx="6035040" cy="502920"/>
           </a:xfrm>
           <a:prstGeom prst="rect">
             <a:avLst/>
@@ -6610,9 +6800,9 @@
           <a:lstStyle/>
           <a:p>
             <a:pPr algn="ctr">
-              <a:defRPr sz="1800" b="1">
-                <a:solidFill>
-                  <a:srgbClr val="2E7D32"/>
+              <a:defRPr sz="1600" b="1">
+                <a:solidFill>
+                  <a:srgbClr val="22C55E"/>
                 </a:solidFill>
                 <a:latin typeface="Calibri"/>
               </a:defRPr>
@@ -6637,7 +6827,7 @@
     <p:bg>
       <p:bgPr>
         <a:solidFill>
-          <a:srgbClr val="FFFFFF"/>
+          <a:srgbClr val="0B1A33"/>
         </a:solidFill>
         <a:effectLst/>
       </p:bgPr>
@@ -6651,20 +6841,20 @@
       <p:grpSpPr/>
       <p:sp>
         <p:nvSpPr>
-          <p:cNvPr id="2" name="Rectangle 1"/>
+          <p:cNvPr id="2" name="Rounded Rectangle 1"/>
           <p:cNvSpPr/>
           <p:nvPr/>
         </p:nvSpPr>
         <p:spPr>
           <a:xfrm>
-            <a:off x="0" y="0"/>
-            <a:ext cx="9144000" cy="1097280"/>
-          </a:xfrm>
-          <a:prstGeom prst="rect">
+            <a:off x="365760" y="274320"/>
+            <a:ext cx="8412480" cy="6309360"/>
+          </a:xfrm>
+          <a:prstGeom prst="roundRect">
             <a:avLst/>
           </a:prstGeom>
           <a:solidFill>
-            <a:srgbClr val="1B365F"/>
+            <a:srgbClr val="122647"/>
           </a:solidFill>
           <a:ln>
             <a:noFill/>
@@ -6700,14 +6890,14 @@
         </p:nvSpPr>
         <p:spPr>
           <a:xfrm>
-            <a:off x="0" y="1097280"/>
-            <a:ext cx="9144000" cy="45720"/>
+            <a:off x="365760" y="274320"/>
+            <a:ext cx="8412480" cy="36576"/>
           </a:xfrm>
           <a:prstGeom prst="rect">
             <a:avLst/>
           </a:prstGeom>
           <a:solidFill>
-            <a:srgbClr val="CE1A2B"/>
+            <a:srgbClr val="2E75F7"/>
           </a:solidFill>
           <a:ln>
             <a:noFill/>
@@ -6743,8 +6933,8 @@
         </p:nvSpPr>
         <p:spPr>
           <a:xfrm>
-            <a:off x="457200" y="137160"/>
-            <a:ext cx="8229600" cy="822960"/>
+            <a:off x="731520" y="548640"/>
+            <a:ext cx="7680960" cy="822960"/>
           </a:xfrm>
           <a:prstGeom prst="rect">
             <a:avLst/>
@@ -6758,7 +6948,7 @@
           <a:lstStyle/>
           <a:p>
             <a:pPr algn="l">
-              <a:defRPr sz="2400" b="1">
+              <a:defRPr sz="2200" b="1">
                 <a:solidFill>
                   <a:srgbClr val="FFFFFF"/>
                 </a:solidFill>
@@ -6779,8 +6969,8 @@
         </p:nvSpPr>
         <p:spPr>
           <a:xfrm>
-            <a:off x="914400" y="1828800"/>
-            <a:ext cx="7315200" cy="3657600"/>
+            <a:off x="1097280" y="1645920"/>
+            <a:ext cx="6949440" cy="3200400"/>
           </a:xfrm>
           <a:prstGeom prst="rect">
             <a:avLst/>
@@ -6795,43 +6985,43 @@
           <a:p>
             <a:pPr>
               <a:spcAft>
-                <a:spcPts val="1400"/>
-              </a:spcAft>
-              <a:defRPr sz="2000">
-                <a:solidFill>
-                  <a:srgbClr val="333333"/>
-                </a:solidFill>
-                <a:latin typeface="Calibri"/>
-              </a:defRPr>
-            </a:pPr>
-            <a:r>
-              <a:t>A) Two (EMT and Paramedic)</a:t>
-            </a:r>
-          </a:p>
-          <a:p>
-            <a:pPr>
-              <a:spcAft>
-                <a:spcPts val="1400"/>
-              </a:spcAft>
-              <a:defRPr sz="2000">
-                <a:solidFill>
-                  <a:srgbClr val="333333"/>
-                </a:solidFill>
-                <a:latin typeface="Calibri"/>
-              </a:defRPr>
-            </a:pPr>
-            <a:r>
-              <a:t>B) Three (EMR, EMT, Paramedic)</a:t>
-            </a:r>
-          </a:p>
-          <a:p>
-            <a:pPr>
-              <a:spcAft>
-                <a:spcPts val="1400"/>
-              </a:spcAft>
-              <a:defRPr sz="2000">
-                <a:solidFill>
-                  <a:srgbClr val="333333"/>
+                <a:spcPts val="1200"/>
+              </a:spcAft>
+              <a:defRPr sz="1800">
+                <a:solidFill>
+                  <a:srgbClr val="E2E8F0"/>
+                </a:solidFill>
+                <a:latin typeface="Calibri"/>
+              </a:defRPr>
+            </a:pPr>
+            <a:r>
+              <a:t>A) Two</a:t>
+            </a:r>
+          </a:p>
+          <a:p>
+            <a:pPr>
+              <a:spcAft>
+                <a:spcPts val="1200"/>
+              </a:spcAft>
+              <a:defRPr sz="1800">
+                <a:solidFill>
+                  <a:srgbClr val="E2E8F0"/>
+                </a:solidFill>
+                <a:latin typeface="Calibri"/>
+              </a:defRPr>
+            </a:pPr>
+            <a:r>
+              <a:t>B) Three</a:t>
+            </a:r>
+          </a:p>
+          <a:p>
+            <a:pPr>
+              <a:spcAft>
+                <a:spcPts val="1200"/>
+              </a:spcAft>
+              <a:defRPr sz="1800">
+                <a:solidFill>
+                  <a:srgbClr val="E2E8F0"/>
                 </a:solidFill>
                 <a:latin typeface="Calibri"/>
               </a:defRPr>
@@ -6843,17 +7033,17 @@
           <a:p>
             <a:pPr>
               <a:spcAft>
-                <a:spcPts val="1400"/>
-              </a:spcAft>
-              <a:defRPr sz="2000">
-                <a:solidFill>
-                  <a:srgbClr val="333333"/>
-                </a:solidFill>
-                <a:latin typeface="Calibri"/>
-              </a:defRPr>
-            </a:pPr>
-            <a:r>
-              <a:t>D) Five (FR, EMR, EMT, AEMT, Paramedic)</a:t>
+                <a:spcPts val="1200"/>
+              </a:spcAft>
+              <a:defRPr sz="1800">
+                <a:solidFill>
+                  <a:srgbClr val="E2E8F0"/>
+                </a:solidFill>
+                <a:latin typeface="Calibri"/>
+              </a:defRPr>
+            </a:pPr>
+            <a:r>
+              <a:t>D) Five</a:t>
             </a:r>
           </a:p>
         </p:txBody>
@@ -6866,19 +7056,17 @@
         </p:nvSpPr>
         <p:spPr>
           <a:xfrm>
-            <a:off x="1371600" y="5029200"/>
-            <a:ext cx="6400800" cy="640080"/>
+            <a:off x="1371600" y="4846320"/>
+            <a:ext cx="6400800" cy="594360"/>
           </a:xfrm>
           <a:prstGeom prst="roundRect">
             <a:avLst/>
           </a:prstGeom>
           <a:solidFill>
-            <a:srgbClr val="E8F5E9"/>
+            <a:srgbClr val="0D2B1A"/>
           </a:solidFill>
           <a:ln>
-            <a:solidFill>
-              <a:srgbClr val="4CAF50"/>
-            </a:solidFill>
+            <a:noFill/>
           </a:ln>
         </p:spPr>
         <p:style>
@@ -6911,8 +7099,8 @@
         </p:nvSpPr>
         <p:spPr>
           <a:xfrm>
-            <a:off x="1554480" y="5074920"/>
-            <a:ext cx="6035040" cy="548640"/>
+            <a:off x="1554480" y="4892040"/>
+            <a:ext cx="6035040" cy="502920"/>
           </a:xfrm>
           <a:prstGeom prst="rect">
             <a:avLst/>
@@ -6926,9 +7114,9 @@
           <a:lstStyle/>
           <a:p>
             <a:pPr algn="ctr">
-              <a:defRPr sz="1800" b="1">
-                <a:solidFill>
-                  <a:srgbClr val="2E7D32"/>
+              <a:defRPr sz="1600" b="1">
+                <a:solidFill>
+                  <a:srgbClr val="22C55E"/>
                 </a:solidFill>
                 <a:latin typeface="Calibri"/>
               </a:defRPr>
@@ -6953,7 +7141,7 @@
     <p:bg>
       <p:bgPr>
         <a:solidFill>
-          <a:srgbClr val="FFFFFF"/>
+          <a:srgbClr val="0B1A33"/>
         </a:solidFill>
         <a:effectLst/>
       </p:bgPr>
@@ -6967,20 +7155,20 @@
       <p:grpSpPr/>
       <p:sp>
         <p:nvSpPr>
-          <p:cNvPr id="2" name="Rectangle 1"/>
+          <p:cNvPr id="2" name="Rounded Rectangle 1"/>
           <p:cNvSpPr/>
           <p:nvPr/>
         </p:nvSpPr>
         <p:spPr>
           <a:xfrm>
-            <a:off x="0" y="0"/>
-            <a:ext cx="9144000" cy="1097280"/>
-          </a:xfrm>
-          <a:prstGeom prst="rect">
+            <a:off x="365760" y="274320"/>
+            <a:ext cx="8412480" cy="6309360"/>
+          </a:xfrm>
+          <a:prstGeom prst="roundRect">
             <a:avLst/>
           </a:prstGeom>
           <a:solidFill>
-            <a:srgbClr val="1B365F"/>
+            <a:srgbClr val="122647"/>
           </a:solidFill>
           <a:ln>
             <a:noFill/>
@@ -7016,14 +7204,14 @@
         </p:nvSpPr>
         <p:spPr>
           <a:xfrm>
-            <a:off x="0" y="1097280"/>
-            <a:ext cx="9144000" cy="45720"/>
+            <a:off x="365760" y="274320"/>
+            <a:ext cx="8412480" cy="36576"/>
           </a:xfrm>
           <a:prstGeom prst="rect">
             <a:avLst/>
           </a:prstGeom>
           <a:solidFill>
-            <a:srgbClr val="CE1A2B"/>
+            <a:srgbClr val="2E75F7"/>
           </a:solidFill>
           <a:ln>
             <a:noFill/>
@@ -7059,8 +7247,8 @@
         </p:nvSpPr>
         <p:spPr>
           <a:xfrm>
-            <a:off x="457200" y="137160"/>
-            <a:ext cx="8229600" cy="822960"/>
+            <a:off x="731520" y="502920"/>
+            <a:ext cx="7680960" cy="640080"/>
           </a:xfrm>
           <a:prstGeom prst="rect">
             <a:avLst/>
@@ -7074,7 +7262,7 @@
           <a:lstStyle/>
           <a:p>
             <a:pPr algn="l">
-              <a:defRPr sz="2800" b="1">
+              <a:defRPr sz="2400" b="1">
                 <a:solidFill>
                   <a:srgbClr val="FFFFFF"/>
                 </a:solidFill>
@@ -7082,7 +7270,7 @@
               </a:defRPr>
             </a:pPr>
             <a:r>
-              <a:t>Learning Objectives</a:t>
+              <a:t>LEARNING OBJECTIVES</a:t>
             </a:r>
           </a:p>
         </p:txBody>
@@ -7095,8 +7283,8 @@
         </p:nvSpPr>
         <p:spPr>
           <a:xfrm>
-            <a:off x="640080" y="1371600"/>
-            <a:ext cx="7863840" cy="4572000"/>
+            <a:off x="822960" y="1234440"/>
+            <a:ext cx="7498079" cy="4800600"/>
           </a:xfrm>
           <a:prstGeom prst="rect">
             <a:avLst/>
@@ -7111,27 +7299,27 @@
           <a:p>
             <a:pPr>
               <a:spcAft>
-                <a:spcPts val="600"/>
-              </a:spcAft>
-              <a:defRPr sz="1700">
-                <a:solidFill>
-                  <a:srgbClr val="333333"/>
-                </a:solidFill>
-                <a:latin typeface="Calibri"/>
-              </a:defRPr>
-            </a:pPr>
-            <a:r>
-              <a:t>Identify the role and mission of the Ohio Division of EMS within the Department of Public Safety</a:t>
-            </a:r>
-          </a:p>
-          <a:p>
-            <a:pPr>
-              <a:spcAft>
-                <a:spcPts val="600"/>
-              </a:spcAft>
-              <a:defRPr sz="1700">
-                <a:solidFill>
-                  <a:srgbClr val="333333"/>
+                <a:spcPts val="500"/>
+              </a:spcAft>
+              <a:defRPr sz="1500">
+                <a:solidFill>
+                  <a:srgbClr val="E2E8F0"/>
+                </a:solidFill>
+                <a:latin typeface="Calibri"/>
+              </a:defRPr>
+            </a:pPr>
+            <a:r>
+              <a:t>Identify the role and mission of the Ohio Division of EMS within the Dept. of Public Safety</a:t>
+            </a:r>
+          </a:p>
+          <a:p>
+            <a:pPr>
+              <a:spcAft>
+                <a:spcPts val="500"/>
+              </a:spcAft>
+              <a:defRPr sz="1500">
+                <a:solidFill>
+                  <a:srgbClr val="E2E8F0"/>
                 </a:solidFill>
                 <a:latin typeface="Calibri"/>
               </a:defRPr>
@@ -7143,81 +7331,81 @@
           <a:p>
             <a:pPr>
               <a:spcAft>
-                <a:spcPts val="600"/>
-              </a:spcAft>
-              <a:defRPr sz="1700">
-                <a:solidFill>
-                  <a:srgbClr val="333333"/>
-                </a:solidFill>
-                <a:latin typeface="Calibri"/>
-              </a:defRPr>
-            </a:pPr>
-            <a:r>
-              <a:t>Describe the EMS certification levels in Ohio (EMR, EMT, AEMT, Paramedic)</a:t>
-            </a:r>
-          </a:p>
-          <a:p>
-            <a:pPr>
-              <a:spcAft>
-                <a:spcPts val="600"/>
-              </a:spcAft>
-              <a:defRPr sz="1700">
-                <a:solidFill>
-                  <a:srgbClr val="333333"/>
-                </a:solidFill>
-                <a:latin typeface="Calibri"/>
-              </a:defRPr>
-            </a:pPr>
-            <a:r>
-              <a:t>Describe the Fire certification pathways (Vol. FF, FF I, FF II, Inspector, Instructor)</a:t>
-            </a:r>
-          </a:p>
-          <a:p>
-            <a:pPr>
-              <a:spcAft>
-                <a:spcPts val="600"/>
-              </a:spcAft>
-              <a:defRPr sz="1700">
-                <a:solidFill>
-                  <a:srgbClr val="333333"/>
-                </a:solidFill>
-                <a:latin typeface="Calibri"/>
-              </a:defRPr>
-            </a:pPr>
-            <a:r>
-              <a:t>Locate the Ohio Administrative Code (OAC) rules that govern EMS and Fire certification</a:t>
-            </a:r>
-          </a:p>
-          <a:p>
-            <a:pPr>
-              <a:spcAft>
-                <a:spcPts val="600"/>
-              </a:spcAft>
-              <a:defRPr sz="1700">
-                <a:solidFill>
-                  <a:srgbClr val="333333"/>
-                </a:solidFill>
-                <a:latin typeface="Calibri"/>
-              </a:defRPr>
-            </a:pPr>
-            <a:r>
-              <a:t>Explain the continuing education and renewal requirements for EMS and Fire certifications</a:t>
-            </a:r>
-          </a:p>
-          <a:p>
-            <a:pPr>
-              <a:spcAft>
-                <a:spcPts val="600"/>
-              </a:spcAft>
-              <a:defRPr sz="1700">
-                <a:solidFill>
-                  <a:srgbClr val="333333"/>
-                </a:solidFill>
-                <a:latin typeface="Calibri"/>
-              </a:defRPr>
-            </a:pPr>
-            <a:r>
-              <a:t>Use website tools to verify certifications, find training programs, and access resources</a:t>
+                <a:spcPts val="500"/>
+              </a:spcAft>
+              <a:defRPr sz="1500">
+                <a:solidFill>
+                  <a:srgbClr val="E2E8F0"/>
+                </a:solidFill>
+                <a:latin typeface="Calibri"/>
+              </a:defRPr>
+            </a:pPr>
+            <a:r>
+              <a:t>Describe the four EMS certification levels (EMR, EMT, AEMT, Paramedic)</a:t>
+            </a:r>
+          </a:p>
+          <a:p>
+            <a:pPr>
+              <a:spcAft>
+                <a:spcPts val="500"/>
+              </a:spcAft>
+              <a:defRPr sz="1500">
+                <a:solidFill>
+                  <a:srgbClr val="E2E8F0"/>
+                </a:solidFill>
+                <a:latin typeface="Calibri"/>
+              </a:defRPr>
+            </a:pPr>
+            <a:r>
+              <a:t>Describe fire certification pathways (Vol. FF, FF I, FF II, Inspector, Instructor)</a:t>
+            </a:r>
+          </a:p>
+          <a:p>
+            <a:pPr>
+              <a:spcAft>
+                <a:spcPts val="500"/>
+              </a:spcAft>
+              <a:defRPr sz="1500">
+                <a:solidFill>
+                  <a:srgbClr val="E2E8F0"/>
+                </a:solidFill>
+                <a:latin typeface="Calibri"/>
+              </a:defRPr>
+            </a:pPr>
+            <a:r>
+              <a:t>Locate the Ohio Administrative Code (OAC) rules governing EMS and fire certification</a:t>
+            </a:r>
+          </a:p>
+          <a:p>
+            <a:pPr>
+              <a:spcAft>
+                <a:spcPts val="500"/>
+              </a:spcAft>
+              <a:defRPr sz="1500">
+                <a:solidFill>
+                  <a:srgbClr val="E2E8F0"/>
+                </a:solidFill>
+                <a:latin typeface="Calibri"/>
+              </a:defRPr>
+            </a:pPr>
+            <a:r>
+              <a:t>Explain continuing education and renewal requirements</a:t>
+            </a:r>
+          </a:p>
+          <a:p>
+            <a:pPr>
+              <a:spcAft>
+                <a:spcPts val="500"/>
+              </a:spcAft>
+              <a:defRPr sz="1500">
+                <a:solidFill>
+                  <a:srgbClr val="E2E8F0"/>
+                </a:solidFill>
+                <a:latin typeface="Calibri"/>
+              </a:defRPr>
+            </a:pPr>
+            <a:r>
+              <a:t>Use website tools to verify certifications, find programs, and access resources</a:t>
             </a:r>
           </a:p>
         </p:txBody>
@@ -7230,8 +7418,8 @@
         </p:nvSpPr>
         <p:spPr>
           <a:xfrm>
-            <a:off x="274320" y="6400800"/>
-            <a:ext cx="8595360" cy="365760"/>
+            <a:off x="457200" y="6400800"/>
+            <a:ext cx="8229600" cy="274320"/>
           </a:xfrm>
           <a:prstGeom prst="rect">
             <a:avLst/>
@@ -7245,15 +7433,15 @@
           <a:lstStyle/>
           <a:p>
             <a:pPr algn="ctr">
-              <a:defRPr sz="900" b="0">
-                <a:solidFill>
-                  <a:srgbClr val="999999"/>
-                </a:solidFill>
-                <a:latin typeface="Calibri"/>
-              </a:defRPr>
-            </a:pPr>
-            <a:r>
-              <a:t>Ohio Division of EMS  |  ems.ohio.gov</a:t>
+              <a:defRPr sz="800" b="0">
+                <a:solidFill>
+                  <a:srgbClr val="64748B"/>
+                </a:solidFill>
+                <a:latin typeface="Calibri"/>
+              </a:defRPr>
+            </a:pPr>
+            <a:r>
+              <a:t>ems.ohio.gov  |  Mileage Design</a:t>
             </a:r>
           </a:p>
         </p:txBody>
@@ -7272,7 +7460,7 @@
     <p:bg>
       <p:bgPr>
         <a:solidFill>
-          <a:srgbClr val="FFFFFF"/>
+          <a:srgbClr val="0B1A33"/>
         </a:solidFill>
         <a:effectLst/>
       </p:bgPr>
@@ -7286,20 +7474,20 @@
       <p:grpSpPr/>
       <p:sp>
         <p:nvSpPr>
-          <p:cNvPr id="2" name="Rectangle 1"/>
+          <p:cNvPr id="2" name="Rounded Rectangle 1"/>
           <p:cNvSpPr/>
           <p:nvPr/>
         </p:nvSpPr>
         <p:spPr>
           <a:xfrm>
-            <a:off x="0" y="0"/>
-            <a:ext cx="9144000" cy="1097280"/>
-          </a:xfrm>
-          <a:prstGeom prst="rect">
+            <a:off x="365760" y="274320"/>
+            <a:ext cx="8412480" cy="6309360"/>
+          </a:xfrm>
+          <a:prstGeom prst="roundRect">
             <a:avLst/>
           </a:prstGeom>
           <a:solidFill>
-            <a:srgbClr val="1B365F"/>
+            <a:srgbClr val="122647"/>
           </a:solidFill>
           <a:ln>
             <a:noFill/>
@@ -7335,14 +7523,14 @@
         </p:nvSpPr>
         <p:spPr>
           <a:xfrm>
-            <a:off x="0" y="1097280"/>
-            <a:ext cx="9144000" cy="45720"/>
+            <a:off x="365760" y="274320"/>
+            <a:ext cx="8412480" cy="36576"/>
           </a:xfrm>
           <a:prstGeom prst="rect">
             <a:avLst/>
           </a:prstGeom>
           <a:solidFill>
-            <a:srgbClr val="CE1A2B"/>
+            <a:srgbClr val="2E75F7"/>
           </a:solidFill>
           <a:ln>
             <a:noFill/>
@@ -7378,8 +7566,8 @@
         </p:nvSpPr>
         <p:spPr>
           <a:xfrm>
-            <a:off x="457200" y="137160"/>
-            <a:ext cx="8229600" cy="822960"/>
+            <a:off x="731520" y="548640"/>
+            <a:ext cx="7680960" cy="822960"/>
           </a:xfrm>
           <a:prstGeom prst="rect">
             <a:avLst/>
@@ -7393,7 +7581,7 @@
           <a:lstStyle/>
           <a:p>
             <a:pPr algn="l">
-              <a:defRPr sz="2400" b="1">
+              <a:defRPr sz="2200" b="1">
                 <a:solidFill>
                   <a:srgbClr val="FFFFFF"/>
                 </a:solidFill>
@@ -7401,7 +7589,7 @@
               </a:defRPr>
             </a:pPr>
             <a:r>
-              <a:t>Q3: How many training hours are required for a Firefighter I course in Ohio?</a:t>
+              <a:t>Q3: How many training hours for a Firefighter I course?</a:t>
             </a:r>
           </a:p>
         </p:txBody>
@@ -7414,8 +7602,8 @@
         </p:nvSpPr>
         <p:spPr>
           <a:xfrm>
-            <a:off x="914400" y="1828800"/>
-            <a:ext cx="7315200" cy="3657600"/>
+            <a:off x="1097280" y="1645920"/>
+            <a:ext cx="6949440" cy="3200400"/>
           </a:xfrm>
           <a:prstGeom prst="rect">
             <a:avLst/>
@@ -7430,11 +7618,11 @@
           <a:p>
             <a:pPr>
               <a:spcAft>
-                <a:spcPts val="1400"/>
-              </a:spcAft>
-              <a:defRPr sz="2000">
-                <a:solidFill>
-                  <a:srgbClr val="333333"/>
+                <a:spcPts val="1200"/>
+              </a:spcAft>
+              <a:defRPr sz="1800">
+                <a:solidFill>
+                  <a:srgbClr val="E2E8F0"/>
                 </a:solidFill>
                 <a:latin typeface="Calibri"/>
               </a:defRPr>
@@ -7446,11 +7634,11 @@
           <a:p>
             <a:pPr>
               <a:spcAft>
-                <a:spcPts val="1400"/>
-              </a:spcAft>
-              <a:defRPr sz="2000">
-                <a:solidFill>
-                  <a:srgbClr val="333333"/>
+                <a:spcPts val="1200"/>
+              </a:spcAft>
+              <a:defRPr sz="1800">
+                <a:solidFill>
+                  <a:srgbClr val="E2E8F0"/>
                 </a:solidFill>
                 <a:latin typeface="Calibri"/>
               </a:defRPr>
@@ -7462,11 +7650,11 @@
           <a:p>
             <a:pPr>
               <a:spcAft>
-                <a:spcPts val="1400"/>
-              </a:spcAft>
-              <a:defRPr sz="2000">
-                <a:solidFill>
-                  <a:srgbClr val="333333"/>
+                <a:spcPts val="1200"/>
+              </a:spcAft>
+              <a:defRPr sz="1800">
+                <a:solidFill>
+                  <a:srgbClr val="E2E8F0"/>
                 </a:solidFill>
                 <a:latin typeface="Calibri"/>
               </a:defRPr>
@@ -7478,11 +7666,11 @@
           <a:p>
             <a:pPr>
               <a:spcAft>
-                <a:spcPts val="1400"/>
-              </a:spcAft>
-              <a:defRPr sz="2000">
-                <a:solidFill>
-                  <a:srgbClr val="333333"/>
+                <a:spcPts val="1200"/>
+              </a:spcAft>
+              <a:defRPr sz="1800">
+                <a:solidFill>
+                  <a:srgbClr val="E2E8F0"/>
                 </a:solidFill>
                 <a:latin typeface="Calibri"/>
               </a:defRPr>
@@ -7501,19 +7689,17 @@
         </p:nvSpPr>
         <p:spPr>
           <a:xfrm>
-            <a:off x="1371600" y="5029200"/>
-            <a:ext cx="6400800" cy="640080"/>
+            <a:off x="1371600" y="4846320"/>
+            <a:ext cx="6400800" cy="594360"/>
           </a:xfrm>
           <a:prstGeom prst="roundRect">
             <a:avLst/>
           </a:prstGeom>
           <a:solidFill>
-            <a:srgbClr val="E8F5E9"/>
+            <a:srgbClr val="0D2B1A"/>
           </a:solidFill>
           <a:ln>
-            <a:solidFill>
-              <a:srgbClr val="4CAF50"/>
-            </a:solidFill>
+            <a:noFill/>
           </a:ln>
         </p:spPr>
         <p:style>
@@ -7546,8 +7732,8 @@
         </p:nvSpPr>
         <p:spPr>
           <a:xfrm>
-            <a:off x="1554480" y="5074920"/>
-            <a:ext cx="6035040" cy="548640"/>
+            <a:off x="1554480" y="4892040"/>
+            <a:ext cx="6035040" cy="502920"/>
           </a:xfrm>
           <a:prstGeom prst="rect">
             <a:avLst/>
@@ -7561,9 +7747,9 @@
           <a:lstStyle/>
           <a:p>
             <a:pPr algn="ctr">
-              <a:defRPr sz="1800" b="1">
-                <a:solidFill>
-                  <a:srgbClr val="2E7D32"/>
+              <a:defRPr sz="1600" b="1">
+                <a:solidFill>
+                  <a:srgbClr val="22C55E"/>
                 </a:solidFill>
                 <a:latin typeface="Calibri"/>
               </a:defRPr>
@@ -7588,7 +7774,7 @@
     <p:bg>
       <p:bgPr>
         <a:solidFill>
-          <a:srgbClr val="FFFFFF"/>
+          <a:srgbClr val="0B1A33"/>
         </a:solidFill>
         <a:effectLst/>
       </p:bgPr>
@@ -7602,20 +7788,20 @@
       <p:grpSpPr/>
       <p:sp>
         <p:nvSpPr>
-          <p:cNvPr id="2" name="Rectangle 1"/>
+          <p:cNvPr id="2" name="Rounded Rectangle 1"/>
           <p:cNvSpPr/>
           <p:nvPr/>
         </p:nvSpPr>
         <p:spPr>
           <a:xfrm>
-            <a:off x="0" y="0"/>
-            <a:ext cx="9144000" cy="1097280"/>
-          </a:xfrm>
-          <a:prstGeom prst="rect">
+            <a:off x="365760" y="274320"/>
+            <a:ext cx="8412480" cy="6309360"/>
+          </a:xfrm>
+          <a:prstGeom prst="roundRect">
             <a:avLst/>
           </a:prstGeom>
           <a:solidFill>
-            <a:srgbClr val="1B365F"/>
+            <a:srgbClr val="122647"/>
           </a:solidFill>
           <a:ln>
             <a:noFill/>
@@ -7651,14 +7837,14 @@
         </p:nvSpPr>
         <p:spPr>
           <a:xfrm>
-            <a:off x="0" y="1097280"/>
-            <a:ext cx="9144000" cy="45720"/>
+            <a:off x="365760" y="274320"/>
+            <a:ext cx="8412480" cy="36576"/>
           </a:xfrm>
           <a:prstGeom prst="rect">
             <a:avLst/>
           </a:prstGeom>
           <a:solidFill>
-            <a:srgbClr val="CE1A2B"/>
+            <a:srgbClr val="2E75F7"/>
           </a:solidFill>
           <a:ln>
             <a:noFill/>
@@ -7694,8 +7880,8 @@
         </p:nvSpPr>
         <p:spPr>
           <a:xfrm>
-            <a:off x="457200" y="137160"/>
-            <a:ext cx="8229600" cy="822960"/>
+            <a:off x="731520" y="548640"/>
+            <a:ext cx="7680960" cy="822960"/>
           </a:xfrm>
           <a:prstGeom prst="rect">
             <a:avLst/>
@@ -7709,7 +7895,7 @@
           <a:lstStyle/>
           <a:p>
             <a:pPr algn="l">
-              <a:defRPr sz="2400" b="1">
+              <a:defRPr sz="2200" b="1">
                 <a:solidFill>
                   <a:srgbClr val="FFFFFF"/>
                 </a:solidFill>
@@ -7730,8 +7916,8 @@
         </p:nvSpPr>
         <p:spPr>
           <a:xfrm>
-            <a:off x="914400" y="1828800"/>
-            <a:ext cx="7315200" cy="3657600"/>
+            <a:off x="1097280" y="1645920"/>
+            <a:ext cx="6949440" cy="3200400"/>
           </a:xfrm>
           <a:prstGeom prst="rect">
             <a:avLst/>
@@ -7746,11 +7932,11 @@
           <a:p>
             <a:pPr>
               <a:spcAft>
-                <a:spcPts val="1400"/>
-              </a:spcAft>
-              <a:defRPr sz="2000">
-                <a:solidFill>
-                  <a:srgbClr val="333333"/>
+                <a:spcPts val="1200"/>
+              </a:spcAft>
+              <a:defRPr sz="1800">
+                <a:solidFill>
+                  <a:srgbClr val="E2E8F0"/>
                 </a:solidFill>
                 <a:latin typeface="Calibri"/>
               </a:defRPr>
@@ -7762,11 +7948,11 @@
           <a:p>
             <a:pPr>
               <a:spcAft>
-                <a:spcPts val="1400"/>
-              </a:spcAft>
-              <a:defRPr sz="2000">
-                <a:solidFill>
-                  <a:srgbClr val="333333"/>
+                <a:spcPts val="1200"/>
+              </a:spcAft>
+              <a:defRPr sz="1800">
+                <a:solidFill>
+                  <a:srgbClr val="E2E8F0"/>
                 </a:solidFill>
                 <a:latin typeface="Calibri"/>
               </a:defRPr>
@@ -7778,11 +7964,11 @@
           <a:p>
             <a:pPr>
               <a:spcAft>
-                <a:spcPts val="1400"/>
-              </a:spcAft>
-              <a:defRPr sz="2000">
-                <a:solidFill>
-                  <a:srgbClr val="333333"/>
+                <a:spcPts val="1200"/>
+              </a:spcAft>
+              <a:defRPr sz="1800">
+                <a:solidFill>
+                  <a:srgbClr val="E2E8F0"/>
                 </a:solidFill>
                 <a:latin typeface="Calibri"/>
               </a:defRPr>
@@ -7794,11 +7980,11 @@
           <a:p>
             <a:pPr>
               <a:spcAft>
-                <a:spcPts val="1400"/>
-              </a:spcAft>
-              <a:defRPr sz="2000">
-                <a:solidFill>
-                  <a:srgbClr val="333333"/>
+                <a:spcPts val="1200"/>
+              </a:spcAft>
+              <a:defRPr sz="1800">
+                <a:solidFill>
+                  <a:srgbClr val="E2E8F0"/>
                 </a:solidFill>
                 <a:latin typeface="Calibri"/>
               </a:defRPr>
@@ -7817,19 +8003,17 @@
         </p:nvSpPr>
         <p:spPr>
           <a:xfrm>
-            <a:off x="1371600" y="5029200"/>
-            <a:ext cx="6400800" cy="640080"/>
+            <a:off x="1371600" y="4846320"/>
+            <a:ext cx="6400800" cy="594360"/>
           </a:xfrm>
           <a:prstGeom prst="roundRect">
             <a:avLst/>
           </a:prstGeom>
           <a:solidFill>
-            <a:srgbClr val="E8F5E9"/>
+            <a:srgbClr val="0D2B1A"/>
           </a:solidFill>
           <a:ln>
-            <a:solidFill>
-              <a:srgbClr val="4CAF50"/>
-            </a:solidFill>
+            <a:noFill/>
           </a:ln>
         </p:spPr>
         <p:style>
@@ -7862,8 +8046,8 @@
         </p:nvSpPr>
         <p:spPr>
           <a:xfrm>
-            <a:off x="1554480" y="5074920"/>
-            <a:ext cx="6035040" cy="548640"/>
+            <a:off x="1554480" y="4892040"/>
+            <a:ext cx="6035040" cy="502920"/>
           </a:xfrm>
           <a:prstGeom prst="rect">
             <a:avLst/>
@@ -7877,9 +8061,9 @@
           <a:lstStyle/>
           <a:p>
             <a:pPr algn="ctr">
-              <a:defRPr sz="1800" b="1">
-                <a:solidFill>
-                  <a:srgbClr val="2E7D32"/>
+              <a:defRPr sz="1600" b="1">
+                <a:solidFill>
+                  <a:srgbClr val="22C55E"/>
                 </a:solidFill>
                 <a:latin typeface="Calibri"/>
               </a:defRPr>
@@ -7904,7 +8088,7 @@
     <p:bg>
       <p:bgPr>
         <a:solidFill>
-          <a:srgbClr val="FFFFFF"/>
+          <a:srgbClr val="0B1A33"/>
         </a:solidFill>
         <a:effectLst/>
       </p:bgPr>
@@ -7918,20 +8102,20 @@
       <p:grpSpPr/>
       <p:sp>
         <p:nvSpPr>
-          <p:cNvPr id="2" name="Rectangle 1"/>
+          <p:cNvPr id="2" name="Rounded Rectangle 1"/>
           <p:cNvSpPr/>
           <p:nvPr/>
         </p:nvSpPr>
         <p:spPr>
           <a:xfrm>
-            <a:off x="0" y="0"/>
-            <a:ext cx="9144000" cy="1097280"/>
-          </a:xfrm>
-          <a:prstGeom prst="rect">
+            <a:off x="365760" y="274320"/>
+            <a:ext cx="8412480" cy="6309360"/>
+          </a:xfrm>
+          <a:prstGeom prst="roundRect">
             <a:avLst/>
           </a:prstGeom>
           <a:solidFill>
-            <a:srgbClr val="1B365F"/>
+            <a:srgbClr val="122647"/>
           </a:solidFill>
           <a:ln>
             <a:noFill/>
@@ -7967,14 +8151,14 @@
         </p:nvSpPr>
         <p:spPr>
           <a:xfrm>
-            <a:off x="0" y="1097280"/>
-            <a:ext cx="9144000" cy="45720"/>
+            <a:off x="365760" y="274320"/>
+            <a:ext cx="8412480" cy="36576"/>
           </a:xfrm>
           <a:prstGeom prst="rect">
             <a:avLst/>
           </a:prstGeom>
           <a:solidFill>
-            <a:srgbClr val="CE1A2B"/>
+            <a:srgbClr val="2E75F7"/>
           </a:solidFill>
           <a:ln>
             <a:noFill/>
@@ -8010,8 +8194,8 @@
         </p:nvSpPr>
         <p:spPr>
           <a:xfrm>
-            <a:off x="457200" y="137160"/>
-            <a:ext cx="8229600" cy="822960"/>
+            <a:off x="731520" y="548640"/>
+            <a:ext cx="7680960" cy="822960"/>
           </a:xfrm>
           <a:prstGeom prst="rect">
             <a:avLst/>
@@ -8025,7 +8209,7 @@
           <a:lstStyle/>
           <a:p>
             <a:pPr algn="l">
-              <a:defRPr sz="2400" b="1">
+              <a:defRPr sz="2200" b="1">
                 <a:solidFill>
                   <a:srgbClr val="FFFFFF"/>
                 </a:solidFill>
@@ -8046,8 +8230,8 @@
         </p:nvSpPr>
         <p:spPr>
           <a:xfrm>
-            <a:off x="914400" y="1828800"/>
-            <a:ext cx="7315200" cy="3657600"/>
+            <a:off x="1097280" y="1645920"/>
+            <a:ext cx="6949440" cy="3200400"/>
           </a:xfrm>
           <a:prstGeom prst="rect">
             <a:avLst/>
@@ -8062,11 +8246,11 @@
           <a:p>
             <a:pPr>
               <a:spcAft>
-                <a:spcPts val="1400"/>
-              </a:spcAft>
-              <a:defRPr sz="2000">
-                <a:solidFill>
-                  <a:srgbClr val="333333"/>
+                <a:spcPts val="1200"/>
+              </a:spcAft>
+              <a:defRPr sz="1800">
+                <a:solidFill>
+                  <a:srgbClr val="E2E8F0"/>
                 </a:solidFill>
                 <a:latin typeface="Calibri"/>
               </a:defRPr>
@@ -8078,11 +8262,11 @@
           <a:p>
             <a:pPr>
               <a:spcAft>
-                <a:spcPts val="1400"/>
-              </a:spcAft>
-              <a:defRPr sz="2000">
-                <a:solidFill>
-                  <a:srgbClr val="333333"/>
+                <a:spcPts val="1200"/>
+              </a:spcAft>
+              <a:defRPr sz="1800">
+                <a:solidFill>
+                  <a:srgbClr val="E2E8F0"/>
                 </a:solidFill>
                 <a:latin typeface="Calibri"/>
               </a:defRPr>
@@ -8094,11 +8278,11 @@
           <a:p>
             <a:pPr>
               <a:spcAft>
-                <a:spcPts val="1400"/>
-              </a:spcAft>
-              <a:defRPr sz="2000">
-                <a:solidFill>
-                  <a:srgbClr val="333333"/>
+                <a:spcPts val="1200"/>
+              </a:spcAft>
+              <a:defRPr sz="1800">
+                <a:solidFill>
+                  <a:srgbClr val="E2E8F0"/>
                 </a:solidFill>
                 <a:latin typeface="Calibri"/>
               </a:defRPr>
@@ -8110,11 +8294,11 @@
           <a:p>
             <a:pPr>
               <a:spcAft>
-                <a:spcPts val="1400"/>
-              </a:spcAft>
-              <a:defRPr sz="2000">
-                <a:solidFill>
-                  <a:srgbClr val="333333"/>
+                <a:spcPts val="1200"/>
+              </a:spcAft>
+              <a:defRPr sz="1800">
+                <a:solidFill>
+                  <a:srgbClr val="E2E8F0"/>
                 </a:solidFill>
                 <a:latin typeface="Calibri"/>
               </a:defRPr>
@@ -8133,19 +8317,17 @@
         </p:nvSpPr>
         <p:spPr>
           <a:xfrm>
-            <a:off x="1371600" y="5029200"/>
-            <a:ext cx="6400800" cy="640080"/>
+            <a:off x="1371600" y="4846320"/>
+            <a:ext cx="6400800" cy="594360"/>
           </a:xfrm>
           <a:prstGeom prst="roundRect">
             <a:avLst/>
           </a:prstGeom>
           <a:solidFill>
-            <a:srgbClr val="E8F5E9"/>
+            <a:srgbClr val="0D2B1A"/>
           </a:solidFill>
           <a:ln>
-            <a:solidFill>
-              <a:srgbClr val="4CAF50"/>
-            </a:solidFill>
+            <a:noFill/>
           </a:ln>
         </p:spPr>
         <p:style>
@@ -8178,8 +8360,8 @@
         </p:nvSpPr>
         <p:spPr>
           <a:xfrm>
-            <a:off x="1554480" y="5074920"/>
-            <a:ext cx="6035040" cy="548640"/>
+            <a:off x="1554480" y="4892040"/>
+            <a:ext cx="6035040" cy="502920"/>
           </a:xfrm>
           <a:prstGeom prst="rect">
             <a:avLst/>
@@ -8193,9 +8375,9 @@
           <a:lstStyle/>
           <a:p>
             <a:pPr algn="ctr">
-              <a:defRPr sz="1800" b="1">
-                <a:solidFill>
-                  <a:srgbClr val="2E7D32"/>
+              <a:defRPr sz="1600" b="1">
+                <a:solidFill>
+                  <a:srgbClr val="22C55E"/>
                 </a:solidFill>
                 <a:latin typeface="Calibri"/>
               </a:defRPr>
@@ -8220,7 +8402,7 @@
     <p:bg>
       <p:bgPr>
         <a:solidFill>
-          <a:srgbClr val="FFFFFF"/>
+          <a:srgbClr val="0B1A33"/>
         </a:solidFill>
         <a:effectLst/>
       </p:bgPr>
@@ -8234,20 +8416,20 @@
       <p:grpSpPr/>
       <p:sp>
         <p:nvSpPr>
-          <p:cNvPr id="2" name="Rectangle 1"/>
+          <p:cNvPr id="2" name="Rounded Rectangle 1"/>
           <p:cNvSpPr/>
           <p:nvPr/>
         </p:nvSpPr>
         <p:spPr>
           <a:xfrm>
-            <a:off x="0" y="0"/>
-            <a:ext cx="9144000" cy="1097280"/>
-          </a:xfrm>
-          <a:prstGeom prst="rect">
+            <a:off x="365760" y="274320"/>
+            <a:ext cx="8412480" cy="6309360"/>
+          </a:xfrm>
+          <a:prstGeom prst="roundRect">
             <a:avLst/>
           </a:prstGeom>
           <a:solidFill>
-            <a:srgbClr val="1B365F"/>
+            <a:srgbClr val="122647"/>
           </a:solidFill>
           <a:ln>
             <a:noFill/>
@@ -8283,14 +8465,14 @@
         </p:nvSpPr>
         <p:spPr>
           <a:xfrm>
-            <a:off x="0" y="1097280"/>
-            <a:ext cx="9144000" cy="45720"/>
+            <a:off x="365760" y="274320"/>
+            <a:ext cx="8412480" cy="36576"/>
           </a:xfrm>
           <a:prstGeom prst="rect">
             <a:avLst/>
           </a:prstGeom>
           <a:solidFill>
-            <a:srgbClr val="CE1A2B"/>
+            <a:srgbClr val="2E75F7"/>
           </a:solidFill>
           <a:ln>
             <a:noFill/>
@@ -8326,8 +8508,8 @@
         </p:nvSpPr>
         <p:spPr>
           <a:xfrm>
-            <a:off x="457200" y="137160"/>
-            <a:ext cx="8229600" cy="822960"/>
+            <a:off x="731520" y="548640"/>
+            <a:ext cx="7680960" cy="822960"/>
           </a:xfrm>
           <a:prstGeom prst="rect">
             <a:avLst/>
@@ -8341,7 +8523,7 @@
           <a:lstStyle/>
           <a:p>
             <a:pPr algn="l">
-              <a:defRPr sz="2400" b="1">
+              <a:defRPr sz="2200" b="1">
                 <a:solidFill>
                   <a:srgbClr val="FFFFFF"/>
                 </a:solidFill>
@@ -8349,7 +8531,7 @@
               </a:defRPr>
             </a:pPr>
             <a:r>
-              <a:t>Q6: What is the minimum number of supervised teaching hours required for fire instructor certification?</a:t>
+              <a:t>Q6: Minimum supervised teaching hours for fire instructor cert?</a:t>
             </a:r>
           </a:p>
         </p:txBody>
@@ -8362,8 +8544,8 @@
         </p:nvSpPr>
         <p:spPr>
           <a:xfrm>
-            <a:off x="914400" y="1828800"/>
-            <a:ext cx="7315200" cy="3657600"/>
+            <a:off x="1097280" y="1645920"/>
+            <a:ext cx="6949440" cy="3200400"/>
           </a:xfrm>
           <a:prstGeom prst="rect">
             <a:avLst/>
@@ -8378,11 +8560,11 @@
           <a:p>
             <a:pPr>
               <a:spcAft>
-                <a:spcPts val="1400"/>
-              </a:spcAft>
-              <a:defRPr sz="2000">
-                <a:solidFill>
-                  <a:srgbClr val="333333"/>
+                <a:spcPts val="1200"/>
+              </a:spcAft>
+              <a:defRPr sz="1800">
+                <a:solidFill>
+                  <a:srgbClr val="E2E8F0"/>
                 </a:solidFill>
                 <a:latin typeface="Calibri"/>
               </a:defRPr>
@@ -8394,11 +8576,11 @@
           <a:p>
             <a:pPr>
               <a:spcAft>
-                <a:spcPts val="1400"/>
-              </a:spcAft>
-              <a:defRPr sz="2000">
-                <a:solidFill>
-                  <a:srgbClr val="333333"/>
+                <a:spcPts val="1200"/>
+              </a:spcAft>
+              <a:defRPr sz="1800">
+                <a:solidFill>
+                  <a:srgbClr val="E2E8F0"/>
                 </a:solidFill>
                 <a:latin typeface="Calibri"/>
               </a:defRPr>
@@ -8410,11 +8592,11 @@
           <a:p>
             <a:pPr>
               <a:spcAft>
-                <a:spcPts val="1400"/>
-              </a:spcAft>
-              <a:defRPr sz="2000">
-                <a:solidFill>
-                  <a:srgbClr val="333333"/>
+                <a:spcPts val="1200"/>
+              </a:spcAft>
+              <a:defRPr sz="1800">
+                <a:solidFill>
+                  <a:srgbClr val="E2E8F0"/>
                 </a:solidFill>
                 <a:latin typeface="Calibri"/>
               </a:defRPr>
@@ -8426,11 +8608,11 @@
           <a:p>
             <a:pPr>
               <a:spcAft>
-                <a:spcPts val="1400"/>
-              </a:spcAft>
-              <a:defRPr sz="2000">
-                <a:solidFill>
-                  <a:srgbClr val="333333"/>
+                <a:spcPts val="1200"/>
+              </a:spcAft>
+              <a:defRPr sz="1800">
+                <a:solidFill>
+                  <a:srgbClr val="E2E8F0"/>
                 </a:solidFill>
                 <a:latin typeface="Calibri"/>
               </a:defRPr>
@@ -8449,19 +8631,17 @@
         </p:nvSpPr>
         <p:spPr>
           <a:xfrm>
-            <a:off x="1371600" y="5029200"/>
-            <a:ext cx="6400800" cy="640080"/>
+            <a:off x="1371600" y="4846320"/>
+            <a:ext cx="6400800" cy="594360"/>
           </a:xfrm>
           <a:prstGeom prst="roundRect">
             <a:avLst/>
           </a:prstGeom>
           <a:solidFill>
-            <a:srgbClr val="E8F5E9"/>
+            <a:srgbClr val="0D2B1A"/>
           </a:solidFill>
           <a:ln>
-            <a:solidFill>
-              <a:srgbClr val="4CAF50"/>
-            </a:solidFill>
+            <a:noFill/>
           </a:ln>
         </p:spPr>
         <p:style>
@@ -8494,8 +8674,8 @@
         </p:nvSpPr>
         <p:spPr>
           <a:xfrm>
-            <a:off x="1554480" y="5074920"/>
-            <a:ext cx="6035040" cy="548640"/>
+            <a:off x="1554480" y="4892040"/>
+            <a:ext cx="6035040" cy="502920"/>
           </a:xfrm>
           <a:prstGeom prst="rect">
             <a:avLst/>
@@ -8509,15 +8689,15 @@
           <a:lstStyle/>
           <a:p>
             <a:pPr algn="ctr">
-              <a:defRPr sz="1800" b="1">
-                <a:solidFill>
-                  <a:srgbClr val="2E7D32"/>
-                </a:solidFill>
-                <a:latin typeface="Calibri"/>
-              </a:defRPr>
-            </a:pPr>
-            <a:r>
-              <a:t>Answer: D) 10 hours (min. 6 classroom + up to 4 practical)</a:t>
+              <a:defRPr sz="1600" b="1">
+                <a:solidFill>
+                  <a:srgbClr val="22C55E"/>
+                </a:solidFill>
+                <a:latin typeface="Calibri"/>
+              </a:defRPr>
+            </a:pPr>
+            <a:r>
+              <a:t>Answer: D) 10 hours (min 6 classroom + up to 4 practical)</a:t>
             </a:r>
           </a:p>
         </p:txBody>
@@ -8536,7 +8716,7 @@
     <p:bg>
       <p:bgPr>
         <a:solidFill>
-          <a:srgbClr val="FFFFFF"/>
+          <a:srgbClr val="0B1A33"/>
         </a:solidFill>
         <a:effectLst/>
       </p:bgPr>
@@ -8550,20 +8730,20 @@
       <p:grpSpPr/>
       <p:sp>
         <p:nvSpPr>
-          <p:cNvPr id="2" name="Rectangle 1"/>
+          <p:cNvPr id="2" name="Rounded Rectangle 1"/>
           <p:cNvSpPr/>
           <p:nvPr/>
         </p:nvSpPr>
         <p:spPr>
           <a:xfrm>
-            <a:off x="0" y="0"/>
-            <a:ext cx="9144000" cy="1097280"/>
-          </a:xfrm>
-          <a:prstGeom prst="rect">
+            <a:off x="365760" y="274320"/>
+            <a:ext cx="8412480" cy="6309360"/>
+          </a:xfrm>
+          <a:prstGeom prst="roundRect">
             <a:avLst/>
           </a:prstGeom>
           <a:solidFill>
-            <a:srgbClr val="1B365F"/>
+            <a:srgbClr val="122647"/>
           </a:solidFill>
           <a:ln>
             <a:noFill/>
@@ -8599,14 +8779,14 @@
         </p:nvSpPr>
         <p:spPr>
           <a:xfrm>
-            <a:off x="0" y="1097280"/>
-            <a:ext cx="9144000" cy="45720"/>
+            <a:off x="365760" y="274320"/>
+            <a:ext cx="8412480" cy="36576"/>
           </a:xfrm>
           <a:prstGeom prst="rect">
             <a:avLst/>
           </a:prstGeom>
           <a:solidFill>
-            <a:srgbClr val="CE1A2B"/>
+            <a:srgbClr val="2E75F7"/>
           </a:solidFill>
           <a:ln>
             <a:noFill/>
@@ -8642,8 +8822,8 @@
         </p:nvSpPr>
         <p:spPr>
           <a:xfrm>
-            <a:off x="457200" y="137160"/>
-            <a:ext cx="8229600" cy="822960"/>
+            <a:off x="731520" y="548640"/>
+            <a:ext cx="7680960" cy="822960"/>
           </a:xfrm>
           <a:prstGeom prst="rect">
             <a:avLst/>
@@ -8657,7 +8837,7 @@
           <a:lstStyle/>
           <a:p>
             <a:pPr algn="l">
-              <a:defRPr sz="2400" b="1">
+              <a:defRPr sz="2200" b="1">
                 <a:solidFill>
                   <a:srgbClr val="FFFFFF"/>
                 </a:solidFill>
@@ -8665,7 +8845,7 @@
               </a:defRPr>
             </a:pPr>
             <a:r>
-              <a:t>Q7: Which organization develops and administers the Testing in Lieu of CE exams?</a:t>
+              <a:t>Q7: Who develops the Testing in Lieu of CE exams?</a:t>
             </a:r>
           </a:p>
         </p:txBody>
@@ -8678,8 +8858,8 @@
         </p:nvSpPr>
         <p:spPr>
           <a:xfrm>
-            <a:off x="914400" y="1828800"/>
-            <a:ext cx="7315200" cy="3657600"/>
+            <a:off x="1097280" y="1645920"/>
+            <a:ext cx="6949440" cy="3200400"/>
           </a:xfrm>
           <a:prstGeom prst="rect">
             <a:avLst/>
@@ -8694,11 +8874,11 @@
           <a:p>
             <a:pPr>
               <a:spcAft>
-                <a:spcPts val="1400"/>
-              </a:spcAft>
-              <a:defRPr sz="2000">
-                <a:solidFill>
-                  <a:srgbClr val="333333"/>
+                <a:spcPts val="1200"/>
+              </a:spcAft>
+              <a:defRPr sz="1800">
+                <a:solidFill>
+                  <a:srgbClr val="E2E8F0"/>
                 </a:solidFill>
                 <a:latin typeface="Calibri"/>
               </a:defRPr>
@@ -8710,11 +8890,11 @@
           <a:p>
             <a:pPr>
               <a:spcAft>
-                <a:spcPts val="1400"/>
-              </a:spcAft>
-              <a:defRPr sz="2000">
-                <a:solidFill>
-                  <a:srgbClr val="333333"/>
+                <a:spcPts val="1200"/>
+              </a:spcAft>
+              <a:defRPr sz="1800">
+                <a:solidFill>
+                  <a:srgbClr val="E2E8F0"/>
                 </a:solidFill>
                 <a:latin typeface="Calibri"/>
               </a:defRPr>
@@ -8726,27 +8906,27 @@
           <a:p>
             <a:pPr>
               <a:spcAft>
-                <a:spcPts val="1400"/>
-              </a:spcAft>
-              <a:defRPr sz="2000">
-                <a:solidFill>
-                  <a:srgbClr val="333333"/>
-                </a:solidFill>
-                <a:latin typeface="Calibri"/>
-              </a:defRPr>
-            </a:pPr>
-            <a:r>
-              <a:t>C) National Registry of EMTs (NREMT)</a:t>
-            </a:r>
-          </a:p>
-          <a:p>
-            <a:pPr>
-              <a:spcAft>
-                <a:spcPts val="1400"/>
-              </a:spcAft>
-              <a:defRPr sz="2000">
-                <a:solidFill>
-                  <a:srgbClr val="333333"/>
+                <a:spcPts val="1200"/>
+              </a:spcAft>
+              <a:defRPr sz="1800">
+                <a:solidFill>
+                  <a:srgbClr val="E2E8F0"/>
+                </a:solidFill>
+                <a:latin typeface="Calibri"/>
+              </a:defRPr>
+            </a:pPr>
+            <a:r>
+              <a:t>C) NREMT</a:t>
+            </a:r>
+          </a:p>
+          <a:p>
+            <a:pPr>
+              <a:spcAft>
+                <a:spcPts val="1200"/>
+              </a:spcAft>
+              <a:defRPr sz="1800">
+                <a:solidFill>
+                  <a:srgbClr val="E2E8F0"/>
                 </a:solidFill>
                 <a:latin typeface="Calibri"/>
               </a:defRPr>
@@ -8765,19 +8945,17 @@
         </p:nvSpPr>
         <p:spPr>
           <a:xfrm>
-            <a:off x="1371600" y="5029200"/>
-            <a:ext cx="6400800" cy="640080"/>
+            <a:off x="1371600" y="4846320"/>
+            <a:ext cx="6400800" cy="594360"/>
           </a:xfrm>
           <a:prstGeom prst="roundRect">
             <a:avLst/>
           </a:prstGeom>
           <a:solidFill>
-            <a:srgbClr val="E8F5E9"/>
+            <a:srgbClr val="0D2B1A"/>
           </a:solidFill>
           <a:ln>
-            <a:solidFill>
-              <a:srgbClr val="4CAF50"/>
-            </a:solidFill>
+            <a:noFill/>
           </a:ln>
         </p:spPr>
         <p:style>
@@ -8810,8 +8988,8 @@
         </p:nvSpPr>
         <p:spPr>
           <a:xfrm>
-            <a:off x="1554480" y="5074920"/>
-            <a:ext cx="6035040" cy="548640"/>
+            <a:off x="1554480" y="4892040"/>
+            <a:ext cx="6035040" cy="502920"/>
           </a:xfrm>
           <a:prstGeom prst="rect">
             <a:avLst/>
@@ -8825,9 +9003,9 @@
           <a:lstStyle/>
           <a:p>
             <a:pPr algn="ctr">
-              <a:defRPr sz="1800" b="1">
-                <a:solidFill>
-                  <a:srgbClr val="2E7D32"/>
+              <a:defRPr sz="1600" b="1">
+                <a:solidFill>
+                  <a:srgbClr val="22C55E"/>
                 </a:solidFill>
                 <a:latin typeface="Calibri"/>
               </a:defRPr>
@@ -8852,7 +9030,7 @@
     <p:bg>
       <p:bgPr>
         <a:solidFill>
-          <a:srgbClr val="FFFFFF"/>
+          <a:srgbClr val="0B1A33"/>
         </a:solidFill>
         <a:effectLst/>
       </p:bgPr>
@@ -8866,20 +9044,20 @@
       <p:grpSpPr/>
       <p:sp>
         <p:nvSpPr>
-          <p:cNvPr id="2" name="Rectangle 1"/>
+          <p:cNvPr id="2" name="Rounded Rectangle 1"/>
           <p:cNvSpPr/>
           <p:nvPr/>
         </p:nvSpPr>
         <p:spPr>
           <a:xfrm>
-            <a:off x="0" y="0"/>
-            <a:ext cx="9144000" cy="1097280"/>
-          </a:xfrm>
-          <a:prstGeom prst="rect">
+            <a:off x="365760" y="274320"/>
+            <a:ext cx="8412480" cy="6309360"/>
+          </a:xfrm>
+          <a:prstGeom prst="roundRect">
             <a:avLst/>
           </a:prstGeom>
           <a:solidFill>
-            <a:srgbClr val="1B365F"/>
+            <a:srgbClr val="122647"/>
           </a:solidFill>
           <a:ln>
             <a:noFill/>
@@ -8915,14 +9093,14 @@
         </p:nvSpPr>
         <p:spPr>
           <a:xfrm>
-            <a:off x="0" y="1097280"/>
-            <a:ext cx="9144000" cy="45720"/>
+            <a:off x="365760" y="274320"/>
+            <a:ext cx="8412480" cy="36576"/>
           </a:xfrm>
           <a:prstGeom prst="rect">
             <a:avLst/>
           </a:prstGeom>
           <a:solidFill>
-            <a:srgbClr val="CE1A2B"/>
+            <a:srgbClr val="2E75F7"/>
           </a:solidFill>
           <a:ln>
             <a:noFill/>
@@ -8958,8 +9136,8 @@
         </p:nvSpPr>
         <p:spPr>
           <a:xfrm>
-            <a:off x="457200" y="137160"/>
-            <a:ext cx="8229600" cy="822960"/>
+            <a:off x="731520" y="548640"/>
+            <a:ext cx="7680960" cy="822960"/>
           </a:xfrm>
           <a:prstGeom prst="rect">
             <a:avLst/>
@@ -8973,7 +9151,7 @@
           <a:lstStyle/>
           <a:p>
             <a:pPr algn="l">
-              <a:defRPr sz="2400" b="1">
+              <a:defRPr sz="2200" b="1">
                 <a:solidFill>
                   <a:srgbClr val="FFFFFF"/>
                 </a:solidFill>
@@ -8981,7 +9159,7 @@
               </a:defRPr>
             </a:pPr>
             <a:r>
-              <a:t>Q8: A combined Firefighter I and II course requires how many hours?</a:t>
+              <a:t>Q8: Combined FF I and II course requires how many hours?</a:t>
             </a:r>
           </a:p>
         </p:txBody>
@@ -8994,8 +9172,8 @@
         </p:nvSpPr>
         <p:spPr>
           <a:xfrm>
-            <a:off x="914400" y="1828800"/>
-            <a:ext cx="7315200" cy="3657600"/>
+            <a:off x="1097280" y="1645920"/>
+            <a:ext cx="6949440" cy="3200400"/>
           </a:xfrm>
           <a:prstGeom prst="rect">
             <a:avLst/>
@@ -9010,11 +9188,11 @@
           <a:p>
             <a:pPr>
               <a:spcAft>
-                <a:spcPts val="1400"/>
-              </a:spcAft>
-              <a:defRPr sz="2000">
-                <a:solidFill>
-                  <a:srgbClr val="333333"/>
+                <a:spcPts val="1200"/>
+              </a:spcAft>
+              <a:defRPr sz="1800">
+                <a:solidFill>
+                  <a:srgbClr val="E2E8F0"/>
                 </a:solidFill>
                 <a:latin typeface="Calibri"/>
               </a:defRPr>
@@ -9026,11 +9204,11 @@
           <a:p>
             <a:pPr>
               <a:spcAft>
-                <a:spcPts val="1400"/>
-              </a:spcAft>
-              <a:defRPr sz="2000">
-                <a:solidFill>
-                  <a:srgbClr val="333333"/>
+                <a:spcPts val="1200"/>
+              </a:spcAft>
+              <a:defRPr sz="1800">
+                <a:solidFill>
+                  <a:srgbClr val="E2E8F0"/>
                 </a:solidFill>
                 <a:latin typeface="Calibri"/>
               </a:defRPr>
@@ -9042,11 +9220,11 @@
           <a:p>
             <a:pPr>
               <a:spcAft>
-                <a:spcPts val="1400"/>
-              </a:spcAft>
-              <a:defRPr sz="2000">
-                <a:solidFill>
-                  <a:srgbClr val="333333"/>
+                <a:spcPts val="1200"/>
+              </a:spcAft>
+              <a:defRPr sz="1800">
+                <a:solidFill>
+                  <a:srgbClr val="E2E8F0"/>
                 </a:solidFill>
                 <a:latin typeface="Calibri"/>
               </a:defRPr>
@@ -9058,11 +9236,11 @@
           <a:p>
             <a:pPr>
               <a:spcAft>
-                <a:spcPts val="1400"/>
-              </a:spcAft>
-              <a:defRPr sz="2000">
-                <a:solidFill>
-                  <a:srgbClr val="333333"/>
+                <a:spcPts val="1200"/>
+              </a:spcAft>
+              <a:defRPr sz="1800">
+                <a:solidFill>
+                  <a:srgbClr val="E2E8F0"/>
                 </a:solidFill>
                 <a:latin typeface="Calibri"/>
               </a:defRPr>
@@ -9081,19 +9259,17 @@
         </p:nvSpPr>
         <p:spPr>
           <a:xfrm>
-            <a:off x="1371600" y="5029200"/>
-            <a:ext cx="6400800" cy="640080"/>
+            <a:off x="1371600" y="4846320"/>
+            <a:ext cx="6400800" cy="594360"/>
           </a:xfrm>
           <a:prstGeom prst="roundRect">
             <a:avLst/>
           </a:prstGeom>
           <a:solidFill>
-            <a:srgbClr val="E8F5E9"/>
+            <a:srgbClr val="0D2B1A"/>
           </a:solidFill>
           <a:ln>
-            <a:solidFill>
-              <a:srgbClr val="4CAF50"/>
-            </a:solidFill>
+            <a:noFill/>
           </a:ln>
         </p:spPr>
         <p:style>
@@ -9126,8 +9302,8 @@
         </p:nvSpPr>
         <p:spPr>
           <a:xfrm>
-            <a:off x="1554480" y="5074920"/>
-            <a:ext cx="6035040" cy="548640"/>
+            <a:off x="1554480" y="4892040"/>
+            <a:ext cx="6035040" cy="502920"/>
           </a:xfrm>
           <a:prstGeom prst="rect">
             <a:avLst/>
@@ -9141,9 +9317,9 @@
           <a:lstStyle/>
           <a:p>
             <a:pPr algn="ctr">
-              <a:defRPr sz="1800" b="1">
-                <a:solidFill>
-                  <a:srgbClr val="2E7D32"/>
+              <a:defRPr sz="1600" b="1">
+                <a:solidFill>
+                  <a:srgbClr val="22C55E"/>
                 </a:solidFill>
                 <a:latin typeface="Calibri"/>
               </a:defRPr>
@@ -9168,7 +9344,7 @@
     <p:bg>
       <p:bgPr>
         <a:solidFill>
-          <a:srgbClr val="FFFFFF"/>
+          <a:srgbClr val="0B1A33"/>
         </a:solidFill>
         <a:effectLst/>
       </p:bgPr>
@@ -9182,20 +9358,20 @@
       <p:grpSpPr/>
       <p:sp>
         <p:nvSpPr>
-          <p:cNvPr id="2" name="Rectangle 1"/>
+          <p:cNvPr id="2" name="Rounded Rectangle 1"/>
           <p:cNvSpPr/>
           <p:nvPr/>
         </p:nvSpPr>
         <p:spPr>
           <a:xfrm>
-            <a:off x="0" y="0"/>
-            <a:ext cx="9144000" cy="1097280"/>
-          </a:xfrm>
-          <a:prstGeom prst="rect">
+            <a:off x="365760" y="274320"/>
+            <a:ext cx="8412480" cy="6309360"/>
+          </a:xfrm>
+          <a:prstGeom prst="roundRect">
             <a:avLst/>
           </a:prstGeom>
           <a:solidFill>
-            <a:srgbClr val="1B365F"/>
+            <a:srgbClr val="122647"/>
           </a:solidFill>
           <a:ln>
             <a:noFill/>
@@ -9231,14 +9407,14 @@
         </p:nvSpPr>
         <p:spPr>
           <a:xfrm>
-            <a:off x="0" y="1097280"/>
-            <a:ext cx="9144000" cy="45720"/>
+            <a:off x="365760" y="274320"/>
+            <a:ext cx="8412480" cy="36576"/>
           </a:xfrm>
           <a:prstGeom prst="rect">
             <a:avLst/>
           </a:prstGeom>
           <a:solidFill>
-            <a:srgbClr val="CE1A2B"/>
+            <a:srgbClr val="2E75F7"/>
           </a:solidFill>
           <a:ln>
             <a:noFill/>
@@ -9274,8 +9450,8 @@
         </p:nvSpPr>
         <p:spPr>
           <a:xfrm>
-            <a:off x="457200" y="137160"/>
-            <a:ext cx="8229600" cy="822960"/>
+            <a:off x="731520" y="548640"/>
+            <a:ext cx="7680960" cy="822960"/>
           </a:xfrm>
           <a:prstGeom prst="rect">
             <a:avLst/>
@@ -9289,7 +9465,7 @@
           <a:lstStyle/>
           <a:p>
             <a:pPr algn="l">
-              <a:defRPr sz="2400" b="1">
+              <a:defRPr sz="2200" b="1">
                 <a:solidFill>
                   <a:srgbClr val="FFFFFF"/>
                 </a:solidFill>
@@ -9297,7 +9473,7 @@
               </a:defRPr>
             </a:pPr>
             <a:r>
-              <a:t>Q9: The fire instructor training course requires a minimum of how many hours?</a:t>
+              <a:t>Q9: Fire instructor training course minimum hours?</a:t>
             </a:r>
           </a:p>
         </p:txBody>
@@ -9310,8 +9486,8 @@
         </p:nvSpPr>
         <p:spPr>
           <a:xfrm>
-            <a:off x="914400" y="1828800"/>
-            <a:ext cx="7315200" cy="3657600"/>
+            <a:off x="1097280" y="1645920"/>
+            <a:ext cx="6949440" cy="3200400"/>
           </a:xfrm>
           <a:prstGeom prst="rect">
             <a:avLst/>
@@ -9326,11 +9502,11 @@
           <a:p>
             <a:pPr>
               <a:spcAft>
-                <a:spcPts val="1400"/>
-              </a:spcAft>
-              <a:defRPr sz="2000">
-                <a:solidFill>
-                  <a:srgbClr val="333333"/>
+                <a:spcPts val="1200"/>
+              </a:spcAft>
+              <a:defRPr sz="1800">
+                <a:solidFill>
+                  <a:srgbClr val="E2E8F0"/>
                 </a:solidFill>
                 <a:latin typeface="Calibri"/>
               </a:defRPr>
@@ -9342,11 +9518,11 @@
           <a:p>
             <a:pPr>
               <a:spcAft>
-                <a:spcPts val="1400"/>
-              </a:spcAft>
-              <a:defRPr sz="2000">
-                <a:solidFill>
-                  <a:srgbClr val="333333"/>
+                <a:spcPts val="1200"/>
+              </a:spcAft>
+              <a:defRPr sz="1800">
+                <a:solidFill>
+                  <a:srgbClr val="E2E8F0"/>
                 </a:solidFill>
                 <a:latin typeface="Calibri"/>
               </a:defRPr>
@@ -9358,11 +9534,11 @@
           <a:p>
             <a:pPr>
               <a:spcAft>
-                <a:spcPts val="1400"/>
-              </a:spcAft>
-              <a:defRPr sz="2000">
-                <a:solidFill>
-                  <a:srgbClr val="333333"/>
+                <a:spcPts val="1200"/>
+              </a:spcAft>
+              <a:defRPr sz="1800">
+                <a:solidFill>
+                  <a:srgbClr val="E2E8F0"/>
                 </a:solidFill>
                 <a:latin typeface="Calibri"/>
               </a:defRPr>
@@ -9374,11 +9550,11 @@
           <a:p>
             <a:pPr>
               <a:spcAft>
-                <a:spcPts val="1400"/>
-              </a:spcAft>
-              <a:defRPr sz="2000">
-                <a:solidFill>
-                  <a:srgbClr val="333333"/>
+                <a:spcPts val="1200"/>
+              </a:spcAft>
+              <a:defRPr sz="1800">
+                <a:solidFill>
+                  <a:srgbClr val="E2E8F0"/>
                 </a:solidFill>
                 <a:latin typeface="Calibri"/>
               </a:defRPr>
@@ -9397,19 +9573,17 @@
         </p:nvSpPr>
         <p:spPr>
           <a:xfrm>
-            <a:off x="1371600" y="5029200"/>
-            <a:ext cx="6400800" cy="640080"/>
+            <a:off x="1371600" y="4846320"/>
+            <a:ext cx="6400800" cy="594360"/>
           </a:xfrm>
           <a:prstGeom prst="roundRect">
             <a:avLst/>
           </a:prstGeom>
           <a:solidFill>
-            <a:srgbClr val="E8F5E9"/>
+            <a:srgbClr val="0D2B1A"/>
           </a:solidFill>
           <a:ln>
-            <a:solidFill>
-              <a:srgbClr val="4CAF50"/>
-            </a:solidFill>
+            <a:noFill/>
           </a:ln>
         </p:spPr>
         <p:style>
@@ -9442,8 +9616,8 @@
         </p:nvSpPr>
         <p:spPr>
           <a:xfrm>
-            <a:off x="1554480" y="5074920"/>
-            <a:ext cx="6035040" cy="548640"/>
+            <a:off x="1554480" y="4892040"/>
+            <a:ext cx="6035040" cy="502920"/>
           </a:xfrm>
           <a:prstGeom prst="rect">
             <a:avLst/>
@@ -9457,9 +9631,9 @@
           <a:lstStyle/>
           <a:p>
             <a:pPr algn="ctr">
-              <a:defRPr sz="1800" b="1">
-                <a:solidFill>
-                  <a:srgbClr val="2E7D32"/>
+              <a:defRPr sz="1600" b="1">
+                <a:solidFill>
+                  <a:srgbClr val="22C55E"/>
                 </a:solidFill>
                 <a:latin typeface="Calibri"/>
               </a:defRPr>
@@ -9484,7 +9658,7 @@
     <p:bg>
       <p:bgPr>
         <a:solidFill>
-          <a:srgbClr val="FFFFFF"/>
+          <a:srgbClr val="0B1A33"/>
         </a:solidFill>
         <a:effectLst/>
       </p:bgPr>
@@ -9498,20 +9672,20 @@
       <p:grpSpPr/>
       <p:sp>
         <p:nvSpPr>
-          <p:cNvPr id="2" name="Rectangle 1"/>
+          <p:cNvPr id="2" name="Rounded Rectangle 1"/>
           <p:cNvSpPr/>
           <p:nvPr/>
         </p:nvSpPr>
         <p:spPr>
           <a:xfrm>
-            <a:off x="0" y="0"/>
-            <a:ext cx="9144000" cy="1097280"/>
-          </a:xfrm>
-          <a:prstGeom prst="rect">
+            <a:off x="365760" y="274320"/>
+            <a:ext cx="8412480" cy="6309360"/>
+          </a:xfrm>
+          <a:prstGeom prst="roundRect">
             <a:avLst/>
           </a:prstGeom>
           <a:solidFill>
-            <a:srgbClr val="1B365F"/>
+            <a:srgbClr val="122647"/>
           </a:solidFill>
           <a:ln>
             <a:noFill/>
@@ -9547,14 +9721,14 @@
         </p:nvSpPr>
         <p:spPr>
           <a:xfrm>
-            <a:off x="0" y="1097280"/>
-            <a:ext cx="9144000" cy="45720"/>
+            <a:off x="365760" y="274320"/>
+            <a:ext cx="8412480" cy="36576"/>
           </a:xfrm>
           <a:prstGeom prst="rect">
             <a:avLst/>
           </a:prstGeom>
           <a:solidFill>
-            <a:srgbClr val="CE1A2B"/>
+            <a:srgbClr val="2E75F7"/>
           </a:solidFill>
           <a:ln>
             <a:noFill/>
@@ -9590,8 +9764,8 @@
         </p:nvSpPr>
         <p:spPr>
           <a:xfrm>
-            <a:off x="457200" y="137160"/>
-            <a:ext cx="8229600" cy="822960"/>
+            <a:off x="731520" y="548640"/>
+            <a:ext cx="7680960" cy="822960"/>
           </a:xfrm>
           <a:prstGeom prst="rect">
             <a:avLst/>
@@ -9605,7 +9779,7 @@
           <a:lstStyle/>
           <a:p>
             <a:pPr algn="l">
-              <a:defRPr sz="2400" b="1">
+              <a:defRPr sz="2200" b="1">
                 <a:solidFill>
                   <a:srgbClr val="FFFFFF"/>
                 </a:solidFill>
@@ -9613,7 +9787,7 @@
               </a:defRPr>
             </a:pPr>
             <a:r>
-              <a:t>Q10: What is the website address for the Ohio Division of EMS?</a:t>
+              <a:t>Q10: Official website for the Ohio Division of EMS?</a:t>
             </a:r>
           </a:p>
         </p:txBody>
@@ -9626,8 +9800,8 @@
         </p:nvSpPr>
         <p:spPr>
           <a:xfrm>
-            <a:off x="914400" y="1828800"/>
-            <a:ext cx="7315200" cy="3657600"/>
+            <a:off x="1097280" y="1645920"/>
+            <a:ext cx="6949440" cy="3200400"/>
           </a:xfrm>
           <a:prstGeom prst="rect">
             <a:avLst/>
@@ -9642,11 +9816,11 @@
           <a:p>
             <a:pPr>
               <a:spcAft>
-                <a:spcPts val="1400"/>
-              </a:spcAft>
-              <a:defRPr sz="2000">
-                <a:solidFill>
-                  <a:srgbClr val="333333"/>
+                <a:spcPts val="1200"/>
+              </a:spcAft>
+              <a:defRPr sz="1800">
+                <a:solidFill>
+                  <a:srgbClr val="E2E8F0"/>
                 </a:solidFill>
                 <a:latin typeface="Calibri"/>
               </a:defRPr>
@@ -9658,11 +9832,11 @@
           <a:p>
             <a:pPr>
               <a:spcAft>
-                <a:spcPts val="1400"/>
-              </a:spcAft>
-              <a:defRPr sz="2000">
-                <a:solidFill>
-                  <a:srgbClr val="333333"/>
+                <a:spcPts val="1200"/>
+              </a:spcAft>
+              <a:defRPr sz="1800">
+                <a:solidFill>
+                  <a:srgbClr val="E2E8F0"/>
                 </a:solidFill>
                 <a:latin typeface="Calibri"/>
               </a:defRPr>
@@ -9674,11 +9848,11 @@
           <a:p>
             <a:pPr>
               <a:spcAft>
-                <a:spcPts val="1400"/>
-              </a:spcAft>
-              <a:defRPr sz="2000">
-                <a:solidFill>
-                  <a:srgbClr val="333333"/>
+                <a:spcPts val="1200"/>
+              </a:spcAft>
+              <a:defRPr sz="1800">
+                <a:solidFill>
+                  <a:srgbClr val="E2E8F0"/>
                 </a:solidFill>
                 <a:latin typeface="Calibri"/>
               </a:defRPr>
@@ -9690,11 +9864,11 @@
           <a:p>
             <a:pPr>
               <a:spcAft>
-                <a:spcPts val="1400"/>
-              </a:spcAft>
-              <a:defRPr sz="2000">
-                <a:solidFill>
-                  <a:srgbClr val="333333"/>
+                <a:spcPts val="1200"/>
+              </a:spcAft>
+              <a:defRPr sz="1800">
+                <a:solidFill>
+                  <a:srgbClr val="E2E8F0"/>
                 </a:solidFill>
                 <a:latin typeface="Calibri"/>
               </a:defRPr>
@@ -9713,19 +9887,17 @@
         </p:nvSpPr>
         <p:spPr>
           <a:xfrm>
-            <a:off x="1371600" y="5029200"/>
-            <a:ext cx="6400800" cy="640080"/>
+            <a:off x="1371600" y="4846320"/>
+            <a:ext cx="6400800" cy="594360"/>
           </a:xfrm>
           <a:prstGeom prst="roundRect">
             <a:avLst/>
           </a:prstGeom>
           <a:solidFill>
-            <a:srgbClr val="E8F5E9"/>
+            <a:srgbClr val="0D2B1A"/>
           </a:solidFill>
           <a:ln>
-            <a:solidFill>
-              <a:srgbClr val="4CAF50"/>
-            </a:solidFill>
+            <a:noFill/>
           </a:ln>
         </p:spPr>
         <p:style>
@@ -9758,8 +9930,8 @@
         </p:nvSpPr>
         <p:spPr>
           <a:xfrm>
-            <a:off x="1554480" y="5074920"/>
-            <a:ext cx="6035040" cy="548640"/>
+            <a:off x="1554480" y="4892040"/>
+            <a:ext cx="6035040" cy="502920"/>
           </a:xfrm>
           <a:prstGeom prst="rect">
             <a:avLst/>
@@ -9773,9 +9945,9 @@
           <a:lstStyle/>
           <a:p>
             <a:pPr algn="ctr">
-              <a:defRPr sz="1800" b="1">
-                <a:solidFill>
-                  <a:srgbClr val="2E7D32"/>
+              <a:defRPr sz="1600" b="1">
+                <a:solidFill>
+                  <a:srgbClr val="22C55E"/>
                 </a:solidFill>
                 <a:latin typeface="Calibri"/>
               </a:defRPr>
@@ -9800,7 +9972,7 @@
     <p:bg>
       <p:bgPr>
         <a:solidFill>
-          <a:srgbClr val="FFFFFF"/>
+          <a:srgbClr val="0B1A33"/>
         </a:solidFill>
         <a:effectLst/>
       </p:bgPr>
@@ -9814,20 +9986,20 @@
       <p:grpSpPr/>
       <p:sp>
         <p:nvSpPr>
-          <p:cNvPr id="2" name="Rectangle 1"/>
+          <p:cNvPr id="2" name="Rounded Rectangle 1"/>
           <p:cNvSpPr/>
           <p:nvPr/>
         </p:nvSpPr>
         <p:spPr>
           <a:xfrm>
-            <a:off x="0" y="0"/>
-            <a:ext cx="9144000" cy="1097280"/>
-          </a:xfrm>
-          <a:prstGeom prst="rect">
+            <a:off x="365760" y="274320"/>
+            <a:ext cx="8412480" cy="6309360"/>
+          </a:xfrm>
+          <a:prstGeom prst="roundRect">
             <a:avLst/>
           </a:prstGeom>
           <a:solidFill>
-            <a:srgbClr val="1B365F"/>
+            <a:srgbClr val="122647"/>
           </a:solidFill>
           <a:ln>
             <a:noFill/>
@@ -9863,14 +10035,14 @@
         </p:nvSpPr>
         <p:spPr>
           <a:xfrm>
-            <a:off x="0" y="1097280"/>
-            <a:ext cx="9144000" cy="45720"/>
+            <a:off x="365760" y="274320"/>
+            <a:ext cx="8412480" cy="36576"/>
           </a:xfrm>
           <a:prstGeom prst="rect">
             <a:avLst/>
           </a:prstGeom>
           <a:solidFill>
-            <a:srgbClr val="CE1A2B"/>
+            <a:srgbClr val="2E75F7"/>
           </a:solidFill>
           <a:ln>
             <a:noFill/>
@@ -9906,8 +10078,8 @@
         </p:nvSpPr>
         <p:spPr>
           <a:xfrm>
-            <a:off x="457200" y="137160"/>
-            <a:ext cx="8229600" cy="822960"/>
+            <a:off x="731520" y="502920"/>
+            <a:ext cx="7680960" cy="640080"/>
           </a:xfrm>
           <a:prstGeom prst="rect">
             <a:avLst/>
@@ -9921,7 +10093,7 @@
           <a:lstStyle/>
           <a:p>
             <a:pPr algn="l">
-              <a:defRPr sz="2800" b="1">
+              <a:defRPr sz="2400" b="1">
                 <a:solidFill>
                   <a:srgbClr val="FFFFFF"/>
                 </a:solidFill>
@@ -9929,7 +10101,7 @@
               </a:defRPr>
             </a:pPr>
             <a:r>
-              <a:t>References</a:t>
+              <a:t>REFERENCES</a:t>
             </a:r>
           </a:p>
         </p:txBody>
@@ -9942,8 +10114,8 @@
         </p:nvSpPr>
         <p:spPr>
           <a:xfrm>
-            <a:off x="640080" y="1371600"/>
-            <a:ext cx="7863840" cy="4572000"/>
+            <a:off x="822960" y="1234440"/>
+            <a:ext cx="7498079" cy="4800600"/>
           </a:xfrm>
           <a:prstGeom prst="rect">
             <a:avLst/>
@@ -9958,129 +10130,129 @@
           <a:p>
             <a:pPr>
               <a:spcAft>
-                <a:spcPts val="600"/>
-              </a:spcAft>
-              <a:defRPr sz="1700">
-                <a:solidFill>
-                  <a:srgbClr val="333333"/>
-                </a:solidFill>
-                <a:latin typeface="Calibri"/>
-              </a:defRPr>
-            </a:pPr>
-            <a:r>
-              <a:t>Ohio Division of EMS. (n.d.). Ohio Emergency Medical Services. https://ems.ohio.gov</a:t>
-            </a:r>
-          </a:p>
-          <a:p>
-            <a:pPr>
-              <a:spcAft>
-                <a:spcPts val="600"/>
-              </a:spcAft>
-              <a:defRPr sz="1700">
-                <a:solidFill>
-                  <a:srgbClr val="333333"/>
-                </a:solidFill>
-                <a:latin typeface="Calibri"/>
-              </a:defRPr>
-            </a:pPr>
-            <a:r>
-              <a:t>Ohio Administrative Code, Title 4765. Ohio Laws and Administrative Rules. https://codes.ohio.gov/ohio-administrative-code/chapter-4765</a:t>
-            </a:r>
-          </a:p>
-          <a:p>
-            <a:pPr>
-              <a:spcAft>
-                <a:spcPts val="600"/>
-              </a:spcAft>
-              <a:defRPr sz="1700">
-                <a:solidFill>
-                  <a:srgbClr val="333333"/>
-                </a:solidFill>
-                <a:latin typeface="Calibri"/>
-              </a:defRPr>
-            </a:pPr>
-            <a:r>
-              <a:t>Ohio Division of EMS. (n.d.). Testing in Lieu of CE. https://ems.ohio.gov/education-and-testing/testing-in-lieu-of-ce</a:t>
-            </a:r>
-          </a:p>
-          <a:p>
-            <a:pPr>
-              <a:spcAft>
-                <a:spcPts val="600"/>
-              </a:spcAft>
-              <a:defRPr sz="1700">
-                <a:solidFill>
-                  <a:srgbClr val="333333"/>
-                </a:solidFill>
-                <a:latin typeface="Calibri"/>
-              </a:defRPr>
-            </a:pPr>
-            <a:r>
-              <a:t>Ohio Division of EMS. (n.d.). Firefighter I and II Course Packet. https://dam.assets.ohio.gov/image/upload/ems.ohio.gov/links/ems0315.pdf</a:t>
-            </a:r>
-          </a:p>
-          <a:p>
-            <a:pPr>
-              <a:spcAft>
-                <a:spcPts val="600"/>
-              </a:spcAft>
-              <a:defRPr sz="1700">
-                <a:solidFill>
-                  <a:srgbClr val="333333"/>
-                </a:solidFill>
-                <a:latin typeface="Calibri"/>
-              </a:defRPr>
-            </a:pPr>
-            <a:r>
-              <a:t>Ohio Division of EMS. (n.d.). Firefighter II Transition Course Packet. https://dam.assets.ohio.gov/image/upload/ems.ohio.gov/links/ems0308.pdf</a:t>
-            </a:r>
-          </a:p>
-          <a:p>
-            <a:pPr>
-              <a:spcAft>
-                <a:spcPts val="600"/>
-              </a:spcAft>
-              <a:defRPr sz="1700">
-                <a:solidFill>
-                  <a:srgbClr val="333333"/>
-                </a:solidFill>
-                <a:latin typeface="Calibri"/>
-              </a:defRPr>
-            </a:pPr>
-            <a:r>
-              <a:t>Ohio Dept. of Public Safety. (n.d.). EMS/Fire Provider Verification. https://services.dps.ohio.gov/EMSProviders/Verification</a:t>
-            </a:r>
-          </a:p>
-          <a:p>
-            <a:pPr>
-              <a:spcAft>
-                <a:spcPts val="600"/>
-              </a:spcAft>
-              <a:defRPr sz="1700">
-                <a:solidFill>
-                  <a:srgbClr val="333333"/>
-                </a:solidFill>
-                <a:latin typeface="Calibri"/>
-              </a:defRPr>
-            </a:pPr>
-            <a:r>
-              <a:t>Ohio Fire Online Training Service. (n.d.). OFOTS. https://ofots.com</a:t>
-            </a:r>
-          </a:p>
-          <a:p>
-            <a:pPr>
-              <a:spcAft>
-                <a:spcPts val="600"/>
-              </a:spcAft>
-              <a:defRPr sz="1700">
-                <a:solidFill>
-                  <a:srgbClr val="333333"/>
-                </a:solidFill>
-                <a:latin typeface="Calibri"/>
-              </a:defRPr>
-            </a:pPr>
-            <a:r>
-              <a:t>National Registry of EMTs. (n.d.). Ohio DPS/Division of EMS. https://www.nremt.org/resources/state-ems-offices/OH</a:t>
+                <a:spcPts val="500"/>
+              </a:spcAft>
+              <a:defRPr sz="1500">
+                <a:solidFill>
+                  <a:srgbClr val="E2E8F0"/>
+                </a:solidFill>
+                <a:latin typeface="Calibri"/>
+              </a:defRPr>
+            </a:pPr>
+            <a:r>
+              <a:t>Ohio Division of EMS. (n.d.). https://ems.ohio.gov</a:t>
+            </a:r>
+          </a:p>
+          <a:p>
+            <a:pPr>
+              <a:spcAft>
+                <a:spcPts val="500"/>
+              </a:spcAft>
+              <a:defRPr sz="1500">
+                <a:solidFill>
+                  <a:srgbClr val="E2E8F0"/>
+                </a:solidFill>
+                <a:latin typeface="Calibri"/>
+              </a:defRPr>
+            </a:pPr>
+            <a:r>
+              <a:t>Ohio Administrative Code, Title 4765. https://codes.ohio.gov/ohio-administrative-code/chapter-4765</a:t>
+            </a:r>
+          </a:p>
+          <a:p>
+            <a:pPr>
+              <a:spcAft>
+                <a:spcPts val="500"/>
+              </a:spcAft>
+              <a:defRPr sz="1500">
+                <a:solidFill>
+                  <a:srgbClr val="E2E8F0"/>
+                </a:solidFill>
+                <a:latin typeface="Calibri"/>
+              </a:defRPr>
+            </a:pPr>
+            <a:r>
+              <a:t>Ohio Division of EMS. Testing in Lieu of CE. https://ems.ohio.gov/education-and-testing/testing-in-lieu-of-ce</a:t>
+            </a:r>
+          </a:p>
+          <a:p>
+            <a:pPr>
+              <a:spcAft>
+                <a:spcPts val="500"/>
+              </a:spcAft>
+              <a:defRPr sz="1500">
+                <a:solidFill>
+                  <a:srgbClr val="E2E8F0"/>
+                </a:solidFill>
+                <a:latin typeface="Calibri"/>
+              </a:defRPr>
+            </a:pPr>
+            <a:r>
+              <a:t>Ohio Division of EMS. FF I and II Course Packet. dam.assets.ohio.gov/.../ems0315.pdf</a:t>
+            </a:r>
+          </a:p>
+          <a:p>
+            <a:pPr>
+              <a:spcAft>
+                <a:spcPts val="500"/>
+              </a:spcAft>
+              <a:defRPr sz="1500">
+                <a:solidFill>
+                  <a:srgbClr val="E2E8F0"/>
+                </a:solidFill>
+                <a:latin typeface="Calibri"/>
+              </a:defRPr>
+            </a:pPr>
+            <a:r>
+              <a:t>Ohio Division of EMS. FF II Transition Course Packet. dam.assets.ohio.gov/.../ems0308.pdf</a:t>
+            </a:r>
+          </a:p>
+          <a:p>
+            <a:pPr>
+              <a:spcAft>
+                <a:spcPts val="500"/>
+              </a:spcAft>
+              <a:defRPr sz="1500">
+                <a:solidFill>
+                  <a:srgbClr val="E2E8F0"/>
+                </a:solidFill>
+                <a:latin typeface="Calibri"/>
+              </a:defRPr>
+            </a:pPr>
+            <a:r>
+              <a:t>Ohio Dept. of Public Safety. EMS/Fire Provider Verification. services.dps.ohio.gov/EMSProviders/Verification</a:t>
+            </a:r>
+          </a:p>
+          <a:p>
+            <a:pPr>
+              <a:spcAft>
+                <a:spcPts val="500"/>
+              </a:spcAft>
+              <a:defRPr sz="1500">
+                <a:solidFill>
+                  <a:srgbClr val="E2E8F0"/>
+                </a:solidFill>
+                <a:latin typeface="Calibri"/>
+              </a:defRPr>
+            </a:pPr>
+            <a:r>
+              <a:t>Ohio Fire Online Training Service (OFOTS). https://ofots.com</a:t>
+            </a:r>
+          </a:p>
+          <a:p>
+            <a:pPr>
+              <a:spcAft>
+                <a:spcPts val="500"/>
+              </a:spcAft>
+              <a:defRPr sz="1500">
+                <a:solidFill>
+                  <a:srgbClr val="E2E8F0"/>
+                </a:solidFill>
+                <a:latin typeface="Calibri"/>
+              </a:defRPr>
+            </a:pPr>
+            <a:r>
+              <a:t>National Registry of EMTs. Ohio DPS/Division of EMS. https://nremt.org/resources/state-ems-offices/OH</a:t>
             </a:r>
           </a:p>
         </p:txBody>
@@ -10093,8 +10265,8 @@
         </p:nvSpPr>
         <p:spPr>
           <a:xfrm>
-            <a:off x="274320" y="6400800"/>
-            <a:ext cx="8595360" cy="365760"/>
+            <a:off x="457200" y="6400800"/>
+            <a:ext cx="8229600" cy="274320"/>
           </a:xfrm>
           <a:prstGeom prst="rect">
             <a:avLst/>
@@ -10108,15 +10280,15 @@
           <a:lstStyle/>
           <a:p>
             <a:pPr algn="ctr">
-              <a:defRPr sz="900" b="0">
-                <a:solidFill>
-                  <a:srgbClr val="999999"/>
-                </a:solidFill>
-                <a:latin typeface="Calibri"/>
-              </a:defRPr>
-            </a:pPr>
-            <a:r>
-              <a:t>Ohio Division of EMS  |  ems.ohio.gov</a:t>
+              <a:defRPr sz="800" b="0">
+                <a:solidFill>
+                  <a:srgbClr val="64748B"/>
+                </a:solidFill>
+                <a:latin typeface="Calibri"/>
+              </a:defRPr>
+            </a:pPr>
+            <a:r>
+              <a:t>ems.ohio.gov  |  Mileage Design</a:t>
             </a:r>
           </a:p>
         </p:txBody>
@@ -10135,7 +10307,7 @@
     <p:bg>
       <p:bgPr>
         <a:solidFill>
-          <a:srgbClr val="1B365F"/>
+          <a:srgbClr val="0B1A33"/>
         </a:solidFill>
         <a:effectLst/>
       </p:bgPr>
@@ -10149,20 +10321,20 @@
       <p:grpSpPr/>
       <p:sp>
         <p:nvSpPr>
-          <p:cNvPr id="2" name="Rectangle 1"/>
+          <p:cNvPr id="2" name="Rounded Rectangle 1"/>
           <p:cNvSpPr/>
           <p:nvPr/>
         </p:nvSpPr>
         <p:spPr>
           <a:xfrm>
-            <a:off x="0" y="2926080"/>
-            <a:ext cx="9144000" cy="54864"/>
-          </a:xfrm>
-          <a:prstGeom prst="rect">
+            <a:off x="1828800" y="1828800"/>
+            <a:ext cx="5486400" cy="3200400"/>
+          </a:xfrm>
+          <a:prstGeom prst="roundRect">
             <a:avLst/>
           </a:prstGeom>
           <a:solidFill>
-            <a:srgbClr val="CE1A2B"/>
+            <a:srgbClr val="122647"/>
           </a:solidFill>
           <a:ln>
             <a:noFill/>
@@ -10192,14 +10364,57 @@
       </p:sp>
       <p:sp>
         <p:nvSpPr>
-          <p:cNvPr id="3" name="TextBox 2"/>
+          <p:cNvPr id="3" name="Rectangle 2"/>
+          <p:cNvSpPr/>
+          <p:nvPr/>
+        </p:nvSpPr>
+        <p:spPr>
+          <a:xfrm>
+            <a:off x="1828800" y="1828800"/>
+            <a:ext cx="5486400" cy="36576"/>
+          </a:xfrm>
+          <a:prstGeom prst="rect">
+            <a:avLst/>
+          </a:prstGeom>
+          <a:solidFill>
+            <a:srgbClr val="2E75F7"/>
+          </a:solidFill>
+          <a:ln>
+            <a:noFill/>
+          </a:ln>
+        </p:spPr>
+        <p:style>
+          <a:lnRef idx="1">
+            <a:schemeClr val="accent1"/>
+          </a:lnRef>
+          <a:fillRef idx="3">
+            <a:schemeClr val="accent1"/>
+          </a:fillRef>
+          <a:effectRef idx="2">
+            <a:schemeClr val="accent1"/>
+          </a:effectRef>
+          <a:fontRef idx="minor">
+            <a:schemeClr val="lt1"/>
+          </a:fontRef>
+        </p:style>
+        <p:txBody>
+          <a:bodyPr rtlCol="0" anchor="ctr"/>
+          <a:lstStyle/>
+          <a:p>
+            <a:pPr algn="ctr"/>
+          </a:p>
+        </p:txBody>
+      </p:sp>
+      <p:sp>
+        <p:nvSpPr>
+          <p:cNvPr id="4" name="TextBox 3"/>
           <p:cNvSpPr txBox="1"/>
           <p:nvPr/>
         </p:nvSpPr>
         <p:spPr>
           <a:xfrm>
-            <a:off x="457200" y="1097280"/>
-            <a:ext cx="8229600" cy="1371600"/>
+            <a:off x="1828800" y="2103120"/>
+            <a:ext cx="5486400" cy="914400"/>
           </a:xfrm>
           <a:prstGeom prst="rect">
             <a:avLst/>
@@ -10213,7 +10428,7 @@
           <a:lstStyle/>
           <a:p>
             <a:pPr algn="ctr">
-              <a:defRPr sz="4000" b="1">
+              <a:defRPr sz="3200" b="1">
                 <a:solidFill>
                   <a:srgbClr val="FFFFFF"/>
                 </a:solidFill>
@@ -10221,21 +10436,21 @@
               </a:defRPr>
             </a:pPr>
             <a:r>
-              <a:t>Student Evaluation</a:t>
-            </a:r>
-          </a:p>
-        </p:txBody>
-      </p:sp>
-      <p:sp>
-        <p:nvSpPr>
-          <p:cNvPr id="4" name="TextBox 3"/>
+              <a:t>STUDENT EVALUATION</a:t>
+            </a:r>
+          </a:p>
+        </p:txBody>
+      </p:sp>
+      <p:sp>
+        <p:nvSpPr>
+          <p:cNvPr id="5" name="TextBox 4"/>
           <p:cNvSpPr txBox="1"/>
           <p:nvPr/>
         </p:nvSpPr>
         <p:spPr>
           <a:xfrm>
-            <a:off x="457200" y="3200400"/>
-            <a:ext cx="8229600" cy="914400"/>
+            <a:off x="1828800" y="3200400"/>
+            <a:ext cx="5486400" cy="731520"/>
           </a:xfrm>
           <a:prstGeom prst="rect">
             <a:avLst/>
@@ -10249,9 +10464,9 @@
           <a:lstStyle/>
           <a:p>
             <a:pPr algn="ctr">
-              <a:defRPr sz="2200" b="0">
-                <a:solidFill>
-                  <a:srgbClr val="CCCCCC"/>
+              <a:defRPr sz="1600" b="0">
+                <a:solidFill>
+                  <a:srgbClr val="94A3B8"/>
                 </a:solidFill>
                 <a:latin typeface="Calibri"/>
               </a:defRPr>
@@ -10264,14 +10479,14 @@
       </p:sp>
       <p:sp>
         <p:nvSpPr>
-          <p:cNvPr id="5" name="TextBox 4"/>
+          <p:cNvPr id="6" name="TextBox 5"/>
           <p:cNvSpPr txBox="1"/>
           <p:nvPr/>
         </p:nvSpPr>
         <p:spPr>
           <a:xfrm>
-            <a:off x="457200" y="4114800"/>
-            <a:ext cx="8229600" cy="914400"/>
+            <a:off x="1828800" y="3931920"/>
+            <a:ext cx="5486400" cy="457200"/>
           </a:xfrm>
           <a:prstGeom prst="rect">
             <a:avLst/>
@@ -10285,9 +10500,9 @@
           <a:lstStyle/>
           <a:p>
             <a:pPr algn="ctr">
-              <a:defRPr sz="1800" b="0">
-                <a:solidFill>
-                  <a:srgbClr val="99BBDD"/>
+              <a:defRPr sz="1300" b="0">
+                <a:solidFill>
+                  <a:srgbClr val="64748B"/>
                 </a:solidFill>
                 <a:latin typeface="Calibri"/>
               </a:defRPr>
@@ -10312,7 +10527,7 @@
     <p:bg>
       <p:bgPr>
         <a:solidFill>
-          <a:srgbClr val="FFFFFF"/>
+          <a:srgbClr val="0B1A33"/>
         </a:solidFill>
         <a:effectLst/>
       </p:bgPr>
@@ -10326,20 +10541,20 @@
       <p:grpSpPr/>
       <p:sp>
         <p:nvSpPr>
-          <p:cNvPr id="2" name="Rectangle 1"/>
+          <p:cNvPr id="2" name="Rounded Rectangle 1"/>
           <p:cNvSpPr/>
           <p:nvPr/>
         </p:nvSpPr>
         <p:spPr>
           <a:xfrm>
-            <a:off x="0" y="0"/>
-            <a:ext cx="9144000" cy="1097280"/>
-          </a:xfrm>
-          <a:prstGeom prst="rect">
+            <a:off x="365760" y="274320"/>
+            <a:ext cx="8412480" cy="6309360"/>
+          </a:xfrm>
+          <a:prstGeom prst="roundRect">
             <a:avLst/>
           </a:prstGeom>
           <a:solidFill>
-            <a:srgbClr val="1B365F"/>
+            <a:srgbClr val="122647"/>
           </a:solidFill>
           <a:ln>
             <a:noFill/>
@@ -10375,14 +10590,14 @@
         </p:nvSpPr>
         <p:spPr>
           <a:xfrm>
-            <a:off x="0" y="1097280"/>
-            <a:ext cx="9144000" cy="45720"/>
+            <a:off x="365760" y="274320"/>
+            <a:ext cx="8412480" cy="36576"/>
           </a:xfrm>
           <a:prstGeom prst="rect">
             <a:avLst/>
           </a:prstGeom>
           <a:solidFill>
-            <a:srgbClr val="CE1A2B"/>
+            <a:srgbClr val="2E75F7"/>
           </a:solidFill>
           <a:ln>
             <a:noFill/>
@@ -10418,8 +10633,8 @@
         </p:nvSpPr>
         <p:spPr>
           <a:xfrm>
-            <a:off x="457200" y="137160"/>
-            <a:ext cx="8229600" cy="822960"/>
+            <a:off x="731520" y="502920"/>
+            <a:ext cx="7680960" cy="640080"/>
           </a:xfrm>
           <a:prstGeom prst="rect">
             <a:avLst/>
@@ -10433,7 +10648,7 @@
           <a:lstStyle/>
           <a:p>
             <a:pPr algn="l">
-              <a:defRPr sz="2800" b="1">
+              <a:defRPr sz="2400" b="1">
                 <a:solidFill>
                   <a:srgbClr val="FFFFFF"/>
                 </a:solidFill>
@@ -10441,7 +10656,7 @@
               </a:defRPr>
             </a:pPr>
             <a:r>
-              <a:t>Learner Characteristics</a:t>
+              <a:t>LEARNER CHARACTERISTICS</a:t>
             </a:r>
           </a:p>
         </p:txBody>
@@ -10454,8 +10669,8 @@
         </p:nvSpPr>
         <p:spPr>
           <a:xfrm>
-            <a:off x="457200" y="1234440"/>
-            <a:ext cx="8229600" cy="457200"/>
+            <a:off x="731520" y="1097280"/>
+            <a:ext cx="7680960" cy="365760"/>
           </a:xfrm>
           <a:prstGeom prst="rect">
             <a:avLst/>
@@ -10469,9 +10684,9 @@
           <a:lstStyle/>
           <a:p>
             <a:pPr algn="l">
-              <a:defRPr sz="1400" b="0">
-                <a:solidFill>
-                  <a:srgbClr val="666666"/>
+              <a:defRPr sz="1200" b="0">
+                <a:solidFill>
+                  <a:srgbClr val="94A3B8"/>
                 </a:solidFill>
                 <a:latin typeface="Calibri"/>
               </a:defRPr>
@@ -10490,8 +10705,8 @@
         </p:nvSpPr>
         <p:spPr>
           <a:xfrm>
-            <a:off x="640080" y="1691640"/>
-            <a:ext cx="7863840" cy="4251960"/>
+            <a:off x="822960" y="1463040"/>
+            <a:ext cx="7498079" cy="4572000"/>
           </a:xfrm>
           <a:prstGeom prst="rect">
             <a:avLst/>
@@ -10506,11 +10721,11 @@
           <a:p>
             <a:pPr>
               <a:spcAft>
-                <a:spcPts val="600"/>
-              </a:spcAft>
-              <a:defRPr sz="1700">
-                <a:solidFill>
-                  <a:srgbClr val="333333"/>
+                <a:spcPts val="500"/>
+              </a:spcAft>
+              <a:defRPr sz="1500">
+                <a:solidFill>
+                  <a:srgbClr val="E2E8F0"/>
                 </a:solidFill>
                 <a:latin typeface="Calibri"/>
               </a:defRPr>
@@ -10522,11 +10737,11 @@
           <a:p>
             <a:pPr>
               <a:spcAft>
-                <a:spcPts val="600"/>
-              </a:spcAft>
-              <a:defRPr sz="1700">
-                <a:solidFill>
-                  <a:srgbClr val="333333"/>
+                <a:spcPts val="500"/>
+              </a:spcAft>
+              <a:defRPr sz="1500">
+                <a:solidFill>
+                  <a:srgbClr val="E2E8F0"/>
                 </a:solidFill>
                 <a:latin typeface="Calibri"/>
               </a:defRPr>
@@ -10538,11 +10753,11 @@
           <a:p>
             <a:pPr>
               <a:spcAft>
-                <a:spcPts val="600"/>
-              </a:spcAft>
-              <a:defRPr sz="1700">
-                <a:solidFill>
-                  <a:srgbClr val="333333"/>
+                <a:spcPts val="500"/>
+              </a:spcAft>
+              <a:defRPr sz="1500">
+                <a:solidFill>
+                  <a:srgbClr val="E2E8F0"/>
                 </a:solidFill>
                 <a:latin typeface="Calibri"/>
               </a:defRPr>
@@ -10554,11 +10769,11 @@
           <a:p>
             <a:pPr>
               <a:spcAft>
-                <a:spcPts val="600"/>
-              </a:spcAft>
-              <a:defRPr sz="1700">
-                <a:solidFill>
-                  <a:srgbClr val="333333"/>
+                <a:spcPts val="500"/>
+              </a:spcAft>
+              <a:defRPr sz="1500">
+                <a:solidFill>
+                  <a:srgbClr val="E2E8F0"/>
                 </a:solidFill>
                 <a:latin typeface="Calibri"/>
               </a:defRPr>
@@ -10570,11 +10785,11 @@
           <a:p>
             <a:pPr>
               <a:spcAft>
-                <a:spcPts val="600"/>
-              </a:spcAft>
-              <a:defRPr sz="1700">
-                <a:solidFill>
-                  <a:srgbClr val="333333"/>
+                <a:spcPts val="500"/>
+              </a:spcAft>
+              <a:defRPr sz="1500">
+                <a:solidFill>
+                  <a:srgbClr val="E2E8F0"/>
                 </a:solidFill>
                 <a:latin typeface="Calibri"/>
               </a:defRPr>
@@ -10586,11 +10801,11 @@
           <a:p>
             <a:pPr>
               <a:spcAft>
-                <a:spcPts val="600"/>
-              </a:spcAft>
-              <a:defRPr sz="1700">
-                <a:solidFill>
-                  <a:srgbClr val="333333"/>
+                <a:spcPts val="500"/>
+              </a:spcAft>
+              <a:defRPr sz="1500">
+                <a:solidFill>
+                  <a:srgbClr val="E2E8F0"/>
                 </a:solidFill>
                 <a:latin typeface="Calibri"/>
               </a:defRPr>
@@ -10609,8 +10824,8 @@
         </p:nvSpPr>
         <p:spPr>
           <a:xfrm>
-            <a:off x="274320" y="6400800"/>
-            <a:ext cx="8595360" cy="365760"/>
+            <a:off x="457200" y="6400800"/>
+            <a:ext cx="8229600" cy="274320"/>
           </a:xfrm>
           <a:prstGeom prst="rect">
             <a:avLst/>
@@ -10624,15 +10839,15 @@
           <a:lstStyle/>
           <a:p>
             <a:pPr algn="ctr">
-              <a:defRPr sz="900" b="0">
-                <a:solidFill>
-                  <a:srgbClr val="999999"/>
-                </a:solidFill>
-                <a:latin typeface="Calibri"/>
-              </a:defRPr>
-            </a:pPr>
-            <a:r>
-              <a:t>Ohio Division of EMS  |  ems.ohio.gov</a:t>
+              <a:defRPr sz="800" b="0">
+                <a:solidFill>
+                  <a:srgbClr val="64748B"/>
+                </a:solidFill>
+                <a:latin typeface="Calibri"/>
+              </a:defRPr>
+            </a:pPr>
+            <a:r>
+              <a:t>ems.ohio.gov  |  Mileage Design</a:t>
             </a:r>
           </a:p>
         </p:txBody>
@@ -10651,7 +10866,7 @@
     <p:bg>
       <p:bgPr>
         <a:solidFill>
-          <a:srgbClr val="1B365F"/>
+          <a:srgbClr val="0B1A33"/>
         </a:solidFill>
         <a:effectLst/>
       </p:bgPr>
@@ -10671,14 +10886,14 @@
         </p:nvSpPr>
         <p:spPr>
           <a:xfrm>
-            <a:off x="0" y="3200400"/>
-            <a:ext cx="9144000" cy="54864"/>
+            <a:off x="0" y="3291840"/>
+            <a:ext cx="9144000" cy="36576"/>
           </a:xfrm>
           <a:prstGeom prst="rect">
             <a:avLst/>
           </a:prstGeom>
           <a:solidFill>
-            <a:srgbClr val="CE1A2B"/>
+            <a:srgbClr val="2E75F7"/>
           </a:solidFill>
           <a:ln>
             <a:noFill/>
@@ -10708,13 +10923,56 @@
       </p:sp>
       <p:sp>
         <p:nvSpPr>
-          <p:cNvPr id="3" name="TextBox 2"/>
+          <p:cNvPr id="3" name="Rectangle 2"/>
+          <p:cNvSpPr/>
+          <p:nvPr/>
+        </p:nvSpPr>
+        <p:spPr>
+          <a:xfrm>
+            <a:off x="4572000" y="3291840"/>
+            <a:ext cx="4572000" cy="36576"/>
+          </a:xfrm>
+          <a:prstGeom prst="rect">
+            <a:avLst/>
+          </a:prstGeom>
+          <a:solidFill>
+            <a:srgbClr val="0B1A33"/>
+          </a:solidFill>
+          <a:ln>
+            <a:noFill/>
+          </a:ln>
+        </p:spPr>
+        <p:style>
+          <a:lnRef idx="1">
+            <a:schemeClr val="accent1"/>
+          </a:lnRef>
+          <a:fillRef idx="3">
+            <a:schemeClr val="accent1"/>
+          </a:fillRef>
+          <a:effectRef idx="2">
+            <a:schemeClr val="accent1"/>
+          </a:effectRef>
+          <a:fontRef idx="minor">
+            <a:schemeClr val="lt1"/>
+          </a:fontRef>
+        </p:style>
+        <p:txBody>
+          <a:bodyPr rtlCol="0" anchor="ctr"/>
+          <a:lstStyle/>
+          <a:p>
+            <a:pPr algn="ctr"/>
+          </a:p>
+        </p:txBody>
+      </p:sp>
+      <p:sp>
+        <p:nvSpPr>
+          <p:cNvPr id="4" name="TextBox 3"/>
           <p:cNvSpPr txBox="1"/>
           <p:nvPr/>
         </p:nvSpPr>
         <p:spPr>
           <a:xfrm>
-            <a:off x="457200" y="1371600"/>
+            <a:off x="457200" y="1828800"/>
             <a:ext cx="8229600" cy="1371600"/>
           </a:xfrm>
           <a:prstGeom prst="rect">
@@ -10737,21 +10995,21 @@
               </a:defRPr>
             </a:pPr>
             <a:r>
-              <a:t>Thank You!</a:t>
-            </a:r>
-          </a:p>
-        </p:txBody>
-      </p:sp>
-      <p:sp>
-        <p:nvSpPr>
-          <p:cNvPr id="4" name="TextBox 3"/>
+              <a:t>THANK YOU</a:t>
+            </a:r>
+          </a:p>
+        </p:txBody>
+      </p:sp>
+      <p:sp>
+        <p:nvSpPr>
+          <p:cNvPr id="5" name="TextBox 4"/>
           <p:cNvSpPr txBox="1"/>
           <p:nvPr/>
         </p:nvSpPr>
         <p:spPr>
           <a:xfrm>
-            <a:off x="457200" y="3474720"/>
-            <a:ext cx="8229600" cy="914400"/>
+            <a:off x="457200" y="3657600"/>
+            <a:ext cx="8229600" cy="731520"/>
           </a:xfrm>
           <a:prstGeom prst="rect">
             <a:avLst/>
@@ -10765,9 +11023,9 @@
           <a:lstStyle/>
           <a:p>
             <a:pPr algn="ctr">
-              <a:defRPr sz="2800" b="0">
-                <a:solidFill>
-                  <a:srgbClr val="CCCCCC"/>
+              <a:defRPr sz="2400" b="0">
+                <a:solidFill>
+                  <a:srgbClr val="94A3B8"/>
                 </a:solidFill>
                 <a:latin typeface="Calibri"/>
               </a:defRPr>
@@ -10780,14 +11038,14 @@
       </p:sp>
       <p:sp>
         <p:nvSpPr>
-          <p:cNvPr id="5" name="TextBox 4"/>
+          <p:cNvPr id="6" name="TextBox 5"/>
           <p:cNvSpPr txBox="1"/>
           <p:nvPr/>
         </p:nvSpPr>
         <p:spPr>
           <a:xfrm>
-            <a:off x="457200" y="4572000"/>
-            <a:ext cx="8229600" cy="731520"/>
+            <a:off x="457200" y="4754880"/>
+            <a:ext cx="8229600" cy="457200"/>
           </a:xfrm>
           <a:prstGeom prst="rect">
             <a:avLst/>
@@ -10801,9 +11059,9 @@
           <a:lstStyle/>
           <a:p>
             <a:pPr algn="ctr">
-              <a:defRPr sz="1600" b="0">
-                <a:solidFill>
-                  <a:srgbClr val="99BBDD"/>
+              <a:defRPr sz="1400" b="0">
+                <a:solidFill>
+                  <a:srgbClr val="5B9BFF"/>
                 </a:solidFill>
                 <a:latin typeface="Calibri"/>
               </a:defRPr>
@@ -10828,7 +11086,7 @@
     <p:bg>
       <p:bgPr>
         <a:solidFill>
-          <a:srgbClr val="FFFFFF"/>
+          <a:srgbClr val="0B1A33"/>
         </a:solidFill>
         <a:effectLst/>
       </p:bgPr>
@@ -10842,20 +11100,20 @@
       <p:grpSpPr/>
       <p:sp>
         <p:nvSpPr>
-          <p:cNvPr id="2" name="Rectangle 1"/>
+          <p:cNvPr id="2" name="Rounded Rectangle 1"/>
           <p:cNvSpPr/>
           <p:nvPr/>
         </p:nvSpPr>
         <p:spPr>
           <a:xfrm>
-            <a:off x="0" y="0"/>
-            <a:ext cx="9144000" cy="1097280"/>
-          </a:xfrm>
-          <a:prstGeom prst="rect">
+            <a:off x="365760" y="274320"/>
+            <a:ext cx="8412480" cy="6309360"/>
+          </a:xfrm>
+          <a:prstGeom prst="roundRect">
             <a:avLst/>
           </a:prstGeom>
           <a:solidFill>
-            <a:srgbClr val="1B365F"/>
+            <a:srgbClr val="122647"/>
           </a:solidFill>
           <a:ln>
             <a:noFill/>
@@ -10891,14 +11149,14 @@
         </p:nvSpPr>
         <p:spPr>
           <a:xfrm>
-            <a:off x="0" y="1097280"/>
-            <a:ext cx="9144000" cy="45720"/>
+            <a:off x="365760" y="274320"/>
+            <a:ext cx="8412480" cy="36576"/>
           </a:xfrm>
           <a:prstGeom prst="rect">
             <a:avLst/>
           </a:prstGeom>
           <a:solidFill>
-            <a:srgbClr val="CE1A2B"/>
+            <a:srgbClr val="2E75F7"/>
           </a:solidFill>
           <a:ln>
             <a:noFill/>
@@ -10934,8 +11192,8 @@
         </p:nvSpPr>
         <p:spPr>
           <a:xfrm>
-            <a:off x="457200" y="137160"/>
-            <a:ext cx="8229600" cy="822960"/>
+            <a:off x="731520" y="502920"/>
+            <a:ext cx="7680960" cy="640080"/>
           </a:xfrm>
           <a:prstGeom prst="rect">
             <a:avLst/>
@@ -10949,7 +11207,7 @@
           <a:lstStyle/>
           <a:p>
             <a:pPr algn="l">
-              <a:defRPr sz="2800" b="1">
+              <a:defRPr sz="2400" b="1">
                 <a:solidFill>
                   <a:srgbClr val="FFFFFF"/>
                 </a:solidFill>
@@ -10957,7 +11215,7 @@
               </a:defRPr>
             </a:pPr>
             <a:r>
-              <a:t>What Is the Ohio Division of EMS?</a:t>
+              <a:t>WHAT IS THE OHIO DIVISION OF EMS?</a:t>
             </a:r>
           </a:p>
         </p:txBody>
@@ -10970,8 +11228,8 @@
         </p:nvSpPr>
         <p:spPr>
           <a:xfrm>
-            <a:off x="640080" y="1371600"/>
-            <a:ext cx="7863840" cy="4572000"/>
+            <a:off x="822960" y="1234440"/>
+            <a:ext cx="7498079" cy="4800600"/>
           </a:xfrm>
           <a:prstGeom prst="rect">
             <a:avLst/>
@@ -10986,11 +11244,11 @@
           <a:p>
             <a:pPr>
               <a:spcAft>
-                <a:spcPts val="600"/>
-              </a:spcAft>
-              <a:defRPr sz="1700">
-                <a:solidFill>
-                  <a:srgbClr val="333333"/>
+                <a:spcPts val="500"/>
+              </a:spcAft>
+              <a:defRPr sz="1500">
+                <a:solidFill>
+                  <a:srgbClr val="E2E8F0"/>
                 </a:solidFill>
                 <a:latin typeface="Calibri"/>
               </a:defRPr>
@@ -11002,27 +11260,27 @@
           <a:p>
             <a:pPr>
               <a:spcAft>
-                <a:spcPts val="600"/>
-              </a:spcAft>
-              <a:defRPr sz="1700">
-                <a:solidFill>
-                  <a:srgbClr val="333333"/>
-                </a:solidFill>
-                <a:latin typeface="Calibri"/>
-              </a:defRPr>
-            </a:pPr>
-            <a:r>
-              <a:t>Administrative arm of the State Board of Emergency Medical, Fire, and Transportation Services (EMFTS)</a:t>
-            </a:r>
-          </a:p>
-          <a:p>
-            <a:pPr>
-              <a:spcAft>
-                <a:spcPts val="600"/>
-              </a:spcAft>
-              <a:defRPr sz="1700">
-                <a:solidFill>
-                  <a:srgbClr val="333333"/>
+                <a:spcPts val="500"/>
+              </a:spcAft>
+              <a:defRPr sz="1500">
+                <a:solidFill>
+                  <a:srgbClr val="E2E8F0"/>
+                </a:solidFill>
+                <a:latin typeface="Calibri"/>
+              </a:defRPr>
+            </a:pPr>
+            <a:r>
+              <a:t>Administrative arm of the State Board of EMFTS</a:t>
+            </a:r>
+          </a:p>
+          <a:p>
+            <a:pPr>
+              <a:spcAft>
+                <a:spcPts val="500"/>
+              </a:spcAft>
+              <a:defRPr sz="1500">
+                <a:solidFill>
+                  <a:srgbClr val="E2E8F0"/>
                 </a:solidFill>
                 <a:latin typeface="Calibri"/>
               </a:defRPr>
@@ -11034,11 +11292,11 @@
           <a:p>
             <a:pPr>
               <a:spcAft>
-                <a:spcPts val="600"/>
-              </a:spcAft>
-              <a:defRPr sz="1700">
-                <a:solidFill>
-                  <a:srgbClr val="333333"/>
+                <a:spcPts val="500"/>
+              </a:spcAft>
+              <a:defRPr sz="1500">
+                <a:solidFill>
+                  <a:srgbClr val="E2E8F0"/>
                 </a:solidFill>
                 <a:latin typeface="Calibri"/>
               </a:defRPr>
@@ -11050,11 +11308,11 @@
           <a:p>
             <a:pPr lvl="1">
               <a:spcAft>
-                <a:spcPts val="600"/>
-              </a:spcAft>
-              <a:defRPr sz="1500">
-                <a:solidFill>
-                  <a:srgbClr val="555555"/>
+                <a:spcPts val="500"/>
+              </a:spcAft>
+              <a:defRPr sz="1300">
+                <a:solidFill>
+                  <a:srgbClr val="94A3B8"/>
                 </a:solidFill>
                 <a:latin typeface="Calibri"/>
               </a:defRPr>
@@ -11066,11 +11324,11 @@
           <a:p>
             <a:pPr lvl="1">
               <a:spcAft>
-                <a:spcPts val="600"/>
-              </a:spcAft>
-              <a:defRPr sz="1500">
-                <a:solidFill>
-                  <a:srgbClr val="555555"/>
+                <a:spcPts val="500"/>
+              </a:spcAft>
+              <a:defRPr sz="1300">
+                <a:solidFill>
+                  <a:srgbClr val="94A3B8"/>
                 </a:solidFill>
                 <a:latin typeface="Calibri"/>
               </a:defRPr>
@@ -11082,11 +11340,11 @@
           <a:p>
             <a:pPr lvl="1">
               <a:spcAft>
-                <a:spcPts val="600"/>
-              </a:spcAft>
-              <a:defRPr sz="1500">
-                <a:solidFill>
-                  <a:srgbClr val="555555"/>
+                <a:spcPts val="500"/>
+              </a:spcAft>
+              <a:defRPr sz="1300">
+                <a:solidFill>
+                  <a:srgbClr val="94A3B8"/>
                 </a:solidFill>
                 <a:latin typeface="Calibri"/>
               </a:defRPr>
@@ -11098,11 +11356,11 @@
           <a:p>
             <a:pPr lvl="1">
               <a:spcAft>
-                <a:spcPts val="600"/>
-              </a:spcAft>
-              <a:defRPr sz="1500">
-                <a:solidFill>
-                  <a:srgbClr val="555555"/>
+                <a:spcPts val="500"/>
+              </a:spcAft>
+              <a:defRPr sz="1300">
+                <a:solidFill>
+                  <a:srgbClr val="94A3B8"/>
                 </a:solidFill>
                 <a:latin typeface="Calibri"/>
               </a:defRPr>
@@ -11114,17 +11372,17 @@
           <a:p>
             <a:pPr lvl="1">
               <a:spcAft>
-                <a:spcPts val="600"/>
-              </a:spcAft>
-              <a:defRPr sz="1500">
-                <a:solidFill>
-                  <a:srgbClr val="555555"/>
-                </a:solidFill>
-                <a:latin typeface="Calibri"/>
-              </a:defRPr>
-            </a:pPr>
-            <a:r>
-              <a:t>Lead agency for Ohio's trauma system</a:t>
+                <a:spcPts val="500"/>
+              </a:spcAft>
+              <a:defRPr sz="1300">
+                <a:solidFill>
+                  <a:srgbClr val="94A3B8"/>
+                </a:solidFill>
+                <a:latin typeface="Calibri"/>
+              </a:defRPr>
+            </a:pPr>
+            <a:r>
+              <a:t>Lead agency for Ohio’s trauma system</a:t>
             </a:r>
           </a:p>
         </p:txBody>
@@ -11137,8 +11395,8 @@
         </p:nvSpPr>
         <p:spPr>
           <a:xfrm>
-            <a:off x="274320" y="6400800"/>
-            <a:ext cx="8595360" cy="365760"/>
+            <a:off x="457200" y="6400800"/>
+            <a:ext cx="8229600" cy="274320"/>
           </a:xfrm>
           <a:prstGeom prst="rect">
             <a:avLst/>
@@ -11152,15 +11410,15 @@
           <a:lstStyle/>
           <a:p>
             <a:pPr algn="ctr">
-              <a:defRPr sz="900" b="0">
-                <a:solidFill>
-                  <a:srgbClr val="999999"/>
-                </a:solidFill>
-                <a:latin typeface="Calibri"/>
-              </a:defRPr>
-            </a:pPr>
-            <a:r>
-              <a:t>Ohio Division of EMS  |  ems.ohio.gov</a:t>
+              <a:defRPr sz="800" b="0">
+                <a:solidFill>
+                  <a:srgbClr val="64748B"/>
+                </a:solidFill>
+                <a:latin typeface="Calibri"/>
+              </a:defRPr>
+            </a:pPr>
+            <a:r>
+              <a:t>ems.ohio.gov  |  Mileage Design</a:t>
             </a:r>
           </a:p>
         </p:txBody>
@@ -11179,7 +11437,7 @@
     <p:bg>
       <p:bgPr>
         <a:solidFill>
-          <a:srgbClr val="FFFFFF"/>
+          <a:srgbClr val="0B1A33"/>
         </a:solidFill>
         <a:effectLst/>
       </p:bgPr>
@@ -11193,20 +11451,20 @@
       <p:grpSpPr/>
       <p:sp>
         <p:nvSpPr>
-          <p:cNvPr id="2" name="Rectangle 1"/>
+          <p:cNvPr id="2" name="Rounded Rectangle 1"/>
           <p:cNvSpPr/>
           <p:nvPr/>
         </p:nvSpPr>
         <p:spPr>
           <a:xfrm>
-            <a:off x="0" y="0"/>
-            <a:ext cx="9144000" cy="1097280"/>
-          </a:xfrm>
-          <a:prstGeom prst="rect">
+            <a:off x="365760" y="274320"/>
+            <a:ext cx="8412480" cy="6309360"/>
+          </a:xfrm>
+          <a:prstGeom prst="roundRect">
             <a:avLst/>
           </a:prstGeom>
           <a:solidFill>
-            <a:srgbClr val="1B365F"/>
+            <a:srgbClr val="122647"/>
           </a:solidFill>
           <a:ln>
             <a:noFill/>
@@ -11242,14 +11500,14 @@
         </p:nvSpPr>
         <p:spPr>
           <a:xfrm>
-            <a:off x="0" y="1097280"/>
-            <a:ext cx="9144000" cy="45720"/>
+            <a:off x="365760" y="274320"/>
+            <a:ext cx="8412480" cy="36576"/>
           </a:xfrm>
           <a:prstGeom prst="rect">
             <a:avLst/>
           </a:prstGeom>
           <a:solidFill>
-            <a:srgbClr val="CE1A2B"/>
+            <a:srgbClr val="2E75F7"/>
           </a:solidFill>
           <a:ln>
             <a:noFill/>
@@ -11285,8 +11543,8 @@
         </p:nvSpPr>
         <p:spPr>
           <a:xfrm>
-            <a:off x="457200" y="137160"/>
-            <a:ext cx="8229600" cy="822960"/>
+            <a:off x="731520" y="502920"/>
+            <a:ext cx="7680960" cy="640080"/>
           </a:xfrm>
           <a:prstGeom prst="rect">
             <a:avLst/>
@@ -11300,7 +11558,7 @@
           <a:lstStyle/>
           <a:p>
             <a:pPr algn="l">
-              <a:defRPr sz="2800" b="1">
+              <a:defRPr sz="2400" b="1">
                 <a:solidFill>
                   <a:srgbClr val="FFFFFF"/>
                 </a:solidFill>
@@ -11308,7 +11566,7 @@
               </a:defRPr>
             </a:pPr>
             <a:r>
-              <a:t>Website Overview: ems.ohio.gov</a:t>
+              <a:t>WEBSITE OVERVIEW: EMS.OHIO.GOV</a:t>
             </a:r>
           </a:p>
         </p:txBody>
@@ -11321,8 +11579,8 @@
         </p:nvSpPr>
         <p:spPr>
           <a:xfrm>
-            <a:off x="457200" y="1234440"/>
-            <a:ext cx="8229600" cy="457200"/>
+            <a:off x="731520" y="1097280"/>
+            <a:ext cx="7680960" cy="365760"/>
           </a:xfrm>
           <a:prstGeom prst="rect">
             <a:avLst/>
@@ -11336,9 +11594,9 @@
           <a:lstStyle/>
           <a:p>
             <a:pPr algn="l">
-              <a:defRPr sz="1400" b="0">
-                <a:solidFill>
-                  <a:srgbClr val="666666"/>
+              <a:defRPr sz="1200" b="0">
+                <a:solidFill>
+                  <a:srgbClr val="94A3B8"/>
                 </a:solidFill>
                 <a:latin typeface="Calibri"/>
               </a:defRPr>
@@ -11357,8 +11615,8 @@
         </p:nvSpPr>
         <p:spPr>
           <a:xfrm>
-            <a:off x="640080" y="1691640"/>
-            <a:ext cx="7863840" cy="4251960"/>
+            <a:off x="822960" y="1463040"/>
+            <a:ext cx="7498079" cy="4572000"/>
           </a:xfrm>
           <a:prstGeom prst="rect">
             <a:avLst/>
@@ -11373,11 +11631,11 @@
           <a:p>
             <a:pPr>
               <a:spcAft>
-                <a:spcPts val="600"/>
-              </a:spcAft>
-              <a:defRPr sz="1700">
-                <a:solidFill>
-                  <a:srgbClr val="333333"/>
+                <a:spcPts val="500"/>
+              </a:spcAft>
+              <a:defRPr sz="1500">
+                <a:solidFill>
+                  <a:srgbClr val="E2E8F0"/>
                 </a:solidFill>
                 <a:latin typeface="Calibri"/>
               </a:defRPr>
@@ -11389,11 +11647,11 @@
           <a:p>
             <a:pPr>
               <a:spcAft>
-                <a:spcPts val="600"/>
-              </a:spcAft>
-              <a:defRPr sz="1700">
-                <a:solidFill>
-                  <a:srgbClr val="333333"/>
+                <a:spcPts val="500"/>
+              </a:spcAft>
+              <a:defRPr sz="1500">
+                <a:solidFill>
+                  <a:srgbClr val="E2E8F0"/>
                 </a:solidFill>
                 <a:latin typeface="Calibri"/>
               </a:defRPr>
@@ -11405,97 +11663,97 @@
           <a:p>
             <a:pPr lvl="1">
               <a:spcAft>
-                <a:spcPts val="600"/>
+                <a:spcPts val="500"/>
+              </a:spcAft>
+              <a:defRPr sz="1300">
+                <a:solidFill>
+                  <a:srgbClr val="94A3B8"/>
+                </a:solidFill>
+                <a:latin typeface="Calibri"/>
+              </a:defRPr>
+            </a:pPr>
+            <a:r>
+              <a:t>Certifications (initial, renewal, reinstatement, reciprocity, verification)</a:t>
+            </a:r>
+          </a:p>
+          <a:p>
+            <a:pPr lvl="1">
+              <a:spcAft>
+                <a:spcPts val="500"/>
+              </a:spcAft>
+              <a:defRPr sz="1300">
+                <a:solidFill>
+                  <a:srgbClr val="94A3B8"/>
+                </a:solidFill>
+                <a:latin typeface="Calibri"/>
+              </a:defRPr>
+            </a:pPr>
+            <a:r>
+              <a:t>Education &amp; Testing (training facilities, CE requirements, testing options)</a:t>
+            </a:r>
+          </a:p>
+          <a:p>
+            <a:pPr lvl="1">
+              <a:spcAft>
+                <a:spcPts val="500"/>
+              </a:spcAft>
+              <a:defRPr sz="1300">
+                <a:solidFill>
+                  <a:srgbClr val="94A3B8"/>
+                </a:solidFill>
+                <a:latin typeface="Calibri"/>
+              </a:defRPr>
+            </a:pPr>
+            <a:r>
+              <a:t>Programs &amp; Services (trauma system, grants, community resources)</a:t>
+            </a:r>
+          </a:p>
+          <a:p>
+            <a:pPr lvl="1">
+              <a:spcAft>
+                <a:spcPts val="500"/>
+              </a:spcAft>
+              <a:defRPr sz="1300">
+                <a:solidFill>
+                  <a:srgbClr val="94A3B8"/>
+                </a:solidFill>
+                <a:latin typeface="Calibri"/>
+              </a:defRPr>
+            </a:pPr>
+            <a:r>
+              <a:t>About Us (State Board info, newsroom, policies, strategic plan)</a:t>
+            </a:r>
+          </a:p>
+          <a:p>
+            <a:pPr lvl="1">
+              <a:spcAft>
+                <a:spcPts val="500"/>
+              </a:spcAft>
+              <a:defRPr sz="1300">
+                <a:solidFill>
+                  <a:srgbClr val="94A3B8"/>
+                </a:solidFill>
+                <a:latin typeface="Calibri"/>
+              </a:defRPr>
+            </a:pPr>
+            <a:r>
+              <a:t>Help Center (agency directory, forms, contact info)</a:t>
+            </a:r>
+          </a:p>
+          <a:p>
+            <a:pPr>
+              <a:spcAft>
+                <a:spcPts val="500"/>
               </a:spcAft>
               <a:defRPr sz="1500">
                 <a:solidFill>
-                  <a:srgbClr val="555555"/>
-                </a:solidFill>
-                <a:latin typeface="Calibri"/>
-              </a:defRPr>
-            </a:pPr>
-            <a:r>
-              <a:t>Certifications (initial, renewal, reinstatement, reciprocity, verification)</a:t>
-            </a:r>
-          </a:p>
-          <a:p>
-            <a:pPr lvl="1">
-              <a:spcAft>
-                <a:spcPts val="600"/>
-              </a:spcAft>
-              <a:defRPr sz="1500">
-                <a:solidFill>
-                  <a:srgbClr val="555555"/>
-                </a:solidFill>
-                <a:latin typeface="Calibri"/>
-              </a:defRPr>
-            </a:pPr>
-            <a:r>
-              <a:t>Education &amp; Testing (training facilities, CE requirements, testing options)</a:t>
-            </a:r>
-          </a:p>
-          <a:p>
-            <a:pPr lvl="1">
-              <a:spcAft>
-                <a:spcPts val="600"/>
-              </a:spcAft>
-              <a:defRPr sz="1500">
-                <a:solidFill>
-                  <a:srgbClr val="555555"/>
-                </a:solidFill>
-                <a:latin typeface="Calibri"/>
-              </a:defRPr>
-            </a:pPr>
-            <a:r>
-              <a:t>Programs &amp; Services (trauma system, grants, community resources)</a:t>
-            </a:r>
-          </a:p>
-          <a:p>
-            <a:pPr lvl="1">
-              <a:spcAft>
-                <a:spcPts val="600"/>
-              </a:spcAft>
-              <a:defRPr sz="1500">
-                <a:solidFill>
-                  <a:srgbClr val="555555"/>
-                </a:solidFill>
-                <a:latin typeface="Calibri"/>
-              </a:defRPr>
-            </a:pPr>
-            <a:r>
-              <a:t>About Us (State Board info, newsroom, policies, strategic plan)</a:t>
-            </a:r>
-          </a:p>
-          <a:p>
-            <a:pPr lvl="1">
-              <a:spcAft>
-                <a:spcPts val="600"/>
-              </a:spcAft>
-              <a:defRPr sz="1500">
-                <a:solidFill>
-                  <a:srgbClr val="555555"/>
-                </a:solidFill>
-                <a:latin typeface="Calibri"/>
-              </a:defRPr>
-            </a:pPr>
-            <a:r>
-              <a:t>Help Center (agency directory, forms, contact info)</a:t>
-            </a:r>
-          </a:p>
-          <a:p>
-            <a:pPr>
-              <a:spcAft>
-                <a:spcPts val="600"/>
-              </a:spcAft>
-              <a:defRPr sz="1700">
-                <a:solidFill>
-                  <a:srgbClr val="333333"/>
-                </a:solidFill>
-                <a:latin typeface="Calibri"/>
-              </a:defRPr>
-            </a:pPr>
-            <a:r>
-              <a:t>Also hosts downloadable course packets, OAC rule references, and scope of practice documents</a:t>
+                  <a:srgbClr val="E2E8F0"/>
+                </a:solidFill>
+                <a:latin typeface="Calibri"/>
+              </a:defRPr>
+            </a:pPr>
+            <a:r>
+              <a:t>Hosts downloadable course packets, OAC rule references, and scope of practice documents</a:t>
             </a:r>
           </a:p>
         </p:txBody>
@@ -11508,8 +11766,8 @@
         </p:nvSpPr>
         <p:spPr>
           <a:xfrm>
-            <a:off x="274320" y="6400800"/>
-            <a:ext cx="8595360" cy="365760"/>
+            <a:off x="457200" y="6400800"/>
+            <a:ext cx="8229600" cy="274320"/>
           </a:xfrm>
           <a:prstGeom prst="rect">
             <a:avLst/>
@@ -11523,15 +11781,15 @@
           <a:lstStyle/>
           <a:p>
             <a:pPr algn="ctr">
-              <a:defRPr sz="900" b="0">
-                <a:solidFill>
-                  <a:srgbClr val="999999"/>
-                </a:solidFill>
-                <a:latin typeface="Calibri"/>
-              </a:defRPr>
-            </a:pPr>
-            <a:r>
-              <a:t>Ohio Division of EMS  |  ems.ohio.gov</a:t>
+              <a:defRPr sz="800" b="0">
+                <a:solidFill>
+                  <a:srgbClr val="64748B"/>
+                </a:solidFill>
+                <a:latin typeface="Calibri"/>
+              </a:defRPr>
+            </a:pPr>
+            <a:r>
+              <a:t>ems.ohio.gov  |  Mileage Design</a:t>
             </a:r>
           </a:p>
         </p:txBody>
@@ -11550,7 +11808,7 @@
     <p:bg>
       <p:bgPr>
         <a:solidFill>
-          <a:srgbClr val="FFFFFF"/>
+          <a:srgbClr val="0B1A33"/>
         </a:solidFill>
         <a:effectLst/>
       </p:bgPr>
@@ -11564,20 +11822,20 @@
       <p:grpSpPr/>
       <p:sp>
         <p:nvSpPr>
-          <p:cNvPr id="2" name="Rectangle 1"/>
+          <p:cNvPr id="2" name="Rounded Rectangle 1"/>
           <p:cNvSpPr/>
           <p:nvPr/>
         </p:nvSpPr>
         <p:spPr>
           <a:xfrm>
-            <a:off x="0" y="0"/>
-            <a:ext cx="9144000" cy="1097280"/>
-          </a:xfrm>
-          <a:prstGeom prst="rect">
+            <a:off x="365760" y="274320"/>
+            <a:ext cx="8412480" cy="6309360"/>
+          </a:xfrm>
+          <a:prstGeom prst="roundRect">
             <a:avLst/>
           </a:prstGeom>
           <a:solidFill>
-            <a:srgbClr val="1B365F"/>
+            <a:srgbClr val="122647"/>
           </a:solidFill>
           <a:ln>
             <a:noFill/>
@@ -11613,14 +11871,14 @@
         </p:nvSpPr>
         <p:spPr>
           <a:xfrm>
-            <a:off x="0" y="1097280"/>
-            <a:ext cx="9144000" cy="45720"/>
+            <a:off x="365760" y="274320"/>
+            <a:ext cx="8412480" cy="36576"/>
           </a:xfrm>
           <a:prstGeom prst="rect">
             <a:avLst/>
           </a:prstGeom>
           <a:solidFill>
-            <a:srgbClr val="CE1A2B"/>
+            <a:srgbClr val="2E75F7"/>
           </a:solidFill>
           <a:ln>
             <a:noFill/>
@@ -11656,8 +11914,8 @@
         </p:nvSpPr>
         <p:spPr>
           <a:xfrm>
-            <a:off x="457200" y="137160"/>
-            <a:ext cx="8229600" cy="822960"/>
+            <a:off x="731520" y="502920"/>
+            <a:ext cx="7680960" cy="640080"/>
           </a:xfrm>
           <a:prstGeom prst="rect">
             <a:avLst/>
@@ -11671,7 +11929,7 @@
           <a:lstStyle/>
           <a:p>
             <a:pPr algn="l">
-              <a:defRPr sz="2800" b="1">
+              <a:defRPr sz="2400" b="1">
                 <a:solidFill>
                   <a:srgbClr val="FFFFFF"/>
                 </a:solidFill>
@@ -11679,7 +11937,7 @@
               </a:defRPr>
             </a:pPr>
             <a:r>
-              <a:t>EMS Certification Levels in Ohio</a:t>
+              <a:t>EMS CERTIFICATION LEVELS IN OHIO</a:t>
             </a:r>
           </a:p>
         </p:txBody>
@@ -11692,8 +11950,8 @@
         </p:nvSpPr>
         <p:spPr>
           <a:xfrm>
-            <a:off x="640080" y="1371600"/>
-            <a:ext cx="7863840" cy="4572000"/>
+            <a:off x="822960" y="1234440"/>
+            <a:ext cx="7498079" cy="4800600"/>
           </a:xfrm>
           <a:prstGeom prst="rect">
             <a:avLst/>
@@ -11708,11 +11966,11 @@
           <a:p>
             <a:pPr>
               <a:spcAft>
-                <a:spcPts val="600"/>
-              </a:spcAft>
-              <a:defRPr sz="1700">
-                <a:solidFill>
-                  <a:srgbClr val="333333"/>
+                <a:spcPts val="500"/>
+              </a:spcAft>
+              <a:defRPr sz="1500">
+                <a:solidFill>
+                  <a:srgbClr val="E2E8F0"/>
                 </a:solidFill>
                 <a:latin typeface="Calibri"/>
               </a:defRPr>
@@ -11724,27 +11982,27 @@
           <a:p>
             <a:pPr lvl="1">
               <a:spcAft>
-                <a:spcPts val="600"/>
+                <a:spcPts val="500"/>
+              </a:spcAft>
+              <a:defRPr sz="1300">
+                <a:solidFill>
+                  <a:srgbClr val="94A3B8"/>
+                </a:solidFill>
+                <a:latin typeface="Calibri"/>
+              </a:defRPr>
+            </a:pPr>
+            <a:r>
+              <a:t>Entry-level; basic emergency care and CPR</a:t>
+            </a:r>
+          </a:p>
+          <a:p>
+            <a:pPr>
+              <a:spcAft>
+                <a:spcPts val="500"/>
               </a:spcAft>
               <a:defRPr sz="1500">
                 <a:solidFill>
-                  <a:srgbClr val="555555"/>
-                </a:solidFill>
-                <a:latin typeface="Calibri"/>
-              </a:defRPr>
-            </a:pPr>
-            <a:r>
-              <a:t>Entry-level; basic emergency care and CPR</a:t>
-            </a:r>
-          </a:p>
-          <a:p>
-            <a:pPr>
-              <a:spcAft>
-                <a:spcPts val="600"/>
-              </a:spcAft>
-              <a:defRPr sz="1700">
-                <a:solidFill>
-                  <a:srgbClr val="333333"/>
+                  <a:srgbClr val="E2E8F0"/>
                 </a:solidFill>
                 <a:latin typeface="Calibri"/>
               </a:defRPr>
@@ -11756,27 +12014,27 @@
           <a:p>
             <a:pPr lvl="1">
               <a:spcAft>
-                <a:spcPts val="600"/>
+                <a:spcPts val="500"/>
+              </a:spcAft>
+              <a:defRPr sz="1300">
+                <a:solidFill>
+                  <a:srgbClr val="94A3B8"/>
+                </a:solidFill>
+                <a:latin typeface="Calibri"/>
+              </a:defRPr>
+            </a:pPr>
+            <a:r>
+              <a:t>BLS care, patient assessment, medication administration</a:t>
+            </a:r>
+          </a:p>
+          <a:p>
+            <a:pPr>
+              <a:spcAft>
+                <a:spcPts val="500"/>
               </a:spcAft>
               <a:defRPr sz="1500">
                 <a:solidFill>
-                  <a:srgbClr val="555555"/>
-                </a:solidFill>
-                <a:latin typeface="Calibri"/>
-              </a:defRPr>
-            </a:pPr>
-            <a:r>
-              <a:t>BLS care, patient assessment, medication administration</a:t>
-            </a:r>
-          </a:p>
-          <a:p>
-            <a:pPr>
-              <a:spcAft>
-                <a:spcPts val="600"/>
-              </a:spcAft>
-              <a:defRPr sz="1700">
-                <a:solidFill>
-                  <a:srgbClr val="333333"/>
+                  <a:srgbClr val="E2E8F0"/>
                 </a:solidFill>
                 <a:latin typeface="Calibri"/>
               </a:defRPr>
@@ -11788,27 +12046,27 @@
           <a:p>
             <a:pPr lvl="1">
               <a:spcAft>
-                <a:spcPts val="600"/>
+                <a:spcPts val="500"/>
+              </a:spcAft>
+              <a:defRPr sz="1300">
+                <a:solidFill>
+                  <a:srgbClr val="94A3B8"/>
+                </a:solidFill>
+                <a:latin typeface="Calibri"/>
+              </a:defRPr>
+            </a:pPr>
+            <a:r>
+              <a:t>IV access, advanced airway management, select medications</a:t>
+            </a:r>
+          </a:p>
+          <a:p>
+            <a:pPr>
+              <a:spcAft>
+                <a:spcPts val="500"/>
               </a:spcAft>
               <a:defRPr sz="1500">
                 <a:solidFill>
-                  <a:srgbClr val="555555"/>
-                </a:solidFill>
-                <a:latin typeface="Calibri"/>
-              </a:defRPr>
-            </a:pPr>
-            <a:r>
-              <a:t>IV access, advanced airway management, select medications</a:t>
-            </a:r>
-          </a:p>
-          <a:p>
-            <a:pPr>
-              <a:spcAft>
-                <a:spcPts val="600"/>
-              </a:spcAft>
-              <a:defRPr sz="1700">
-                <a:solidFill>
-                  <a:srgbClr val="333333"/>
+                  <a:srgbClr val="E2E8F0"/>
                 </a:solidFill>
                 <a:latin typeface="Calibri"/>
               </a:defRPr>
@@ -11820,11 +12078,11 @@
           <a:p>
             <a:pPr lvl="1">
               <a:spcAft>
-                <a:spcPts val="600"/>
-              </a:spcAft>
-              <a:defRPr sz="1500">
-                <a:solidFill>
-                  <a:srgbClr val="555555"/>
+                <a:spcPts val="500"/>
+              </a:spcAft>
+              <a:defRPr sz="1300">
+                <a:solidFill>
+                  <a:srgbClr val="94A3B8"/>
                 </a:solidFill>
                 <a:latin typeface="Calibri"/>
               </a:defRPr>
@@ -11836,33 +12094,17 @@
           <a:p>
             <a:pPr lvl="1">
               <a:spcAft>
-                <a:spcPts val="600"/>
-              </a:spcAft>
-              <a:defRPr sz="1500">
-                <a:solidFill>
-                  <a:srgbClr val="555555"/>
+                <a:spcPts val="500"/>
+              </a:spcAft>
+              <a:defRPr sz="1300">
+                <a:solidFill>
+                  <a:srgbClr val="94A3B8"/>
                 </a:solidFill>
                 <a:latin typeface="Calibri"/>
               </a:defRPr>
             </a:pPr>
             <a:r>
               <a:t>Minimum 500 hrs didactic/lab + 400 hrs clinical/field</a:t>
-            </a:r>
-          </a:p>
-          <a:p>
-            <a:pPr>
-              <a:spcAft>
-                <a:spcPts val="600"/>
-              </a:spcAft>
-              <a:defRPr sz="1700">
-                <a:solidFill>
-                  <a:srgbClr val="333333"/>
-                </a:solidFill>
-                <a:latin typeface="Calibri"/>
-              </a:defRPr>
-            </a:pPr>
-            <a:r>
-              <a:t>All certification details and scope of practice available at ems.ohio.gov</a:t>
             </a:r>
           </a:p>
         </p:txBody>
@@ -11875,8 +12117,8 @@
         </p:nvSpPr>
         <p:spPr>
           <a:xfrm>
-            <a:off x="274320" y="6400800"/>
-            <a:ext cx="8595360" cy="365760"/>
+            <a:off x="457200" y="6400800"/>
+            <a:ext cx="8229600" cy="274320"/>
           </a:xfrm>
           <a:prstGeom prst="rect">
             <a:avLst/>
@@ -11890,15 +12132,15 @@
           <a:lstStyle/>
           <a:p>
             <a:pPr algn="ctr">
-              <a:defRPr sz="900" b="0">
-                <a:solidFill>
-                  <a:srgbClr val="999999"/>
-                </a:solidFill>
-                <a:latin typeface="Calibri"/>
-              </a:defRPr>
-            </a:pPr>
-            <a:r>
-              <a:t>Ohio Division of EMS  |  ems.ohio.gov</a:t>
+              <a:defRPr sz="800" b="0">
+                <a:solidFill>
+                  <a:srgbClr val="64748B"/>
+                </a:solidFill>
+                <a:latin typeface="Calibri"/>
+              </a:defRPr>
+            </a:pPr>
+            <a:r>
+              <a:t>ems.ohio.gov  |  Mileage Design</a:t>
             </a:r>
           </a:p>
         </p:txBody>
@@ -11917,7 +12159,7 @@
     <p:bg>
       <p:bgPr>
         <a:solidFill>
-          <a:srgbClr val="FFFFFF"/>
+          <a:srgbClr val="0B1A33"/>
         </a:solidFill>
         <a:effectLst/>
       </p:bgPr>
@@ -11931,20 +12173,20 @@
       <p:grpSpPr/>
       <p:sp>
         <p:nvSpPr>
-          <p:cNvPr id="2" name="Rectangle 1"/>
+          <p:cNvPr id="2" name="Rounded Rectangle 1"/>
           <p:cNvSpPr/>
           <p:nvPr/>
         </p:nvSpPr>
         <p:spPr>
           <a:xfrm>
-            <a:off x="0" y="0"/>
-            <a:ext cx="9144000" cy="1097280"/>
-          </a:xfrm>
-          <a:prstGeom prst="rect">
+            <a:off x="365760" y="274320"/>
+            <a:ext cx="8412480" cy="6309360"/>
+          </a:xfrm>
+          <a:prstGeom prst="roundRect">
             <a:avLst/>
           </a:prstGeom>
           <a:solidFill>
-            <a:srgbClr val="1B365F"/>
+            <a:srgbClr val="122647"/>
           </a:solidFill>
           <a:ln>
             <a:noFill/>
@@ -11980,14 +12222,14 @@
         </p:nvSpPr>
         <p:spPr>
           <a:xfrm>
-            <a:off x="0" y="1097280"/>
-            <a:ext cx="9144000" cy="45720"/>
+            <a:off x="365760" y="274320"/>
+            <a:ext cx="8412480" cy="36576"/>
           </a:xfrm>
           <a:prstGeom prst="rect">
             <a:avLst/>
           </a:prstGeom>
           <a:solidFill>
-            <a:srgbClr val="CE1A2B"/>
+            <a:srgbClr val="2E75F7"/>
           </a:solidFill>
           <a:ln>
             <a:noFill/>
@@ -12023,8 +12265,8 @@
         </p:nvSpPr>
         <p:spPr>
           <a:xfrm>
-            <a:off x="457200" y="137160"/>
-            <a:ext cx="8229600" cy="822960"/>
+            <a:off x="731520" y="502920"/>
+            <a:ext cx="7680960" cy="640080"/>
           </a:xfrm>
           <a:prstGeom prst="rect">
             <a:avLst/>
@@ -12038,7 +12280,7 @@
           <a:lstStyle/>
           <a:p>
             <a:pPr algn="l">
-              <a:defRPr sz="2800" b="1">
+              <a:defRPr sz="2400" b="1">
                 <a:solidFill>
                   <a:srgbClr val="FFFFFF"/>
                 </a:solidFill>
@@ -12046,7 +12288,7 @@
               </a:defRPr>
             </a:pPr>
             <a:r>
-              <a:t>EMS Initial Certification Process</a:t>
+              <a:t>EMS INITIAL CERTIFICATION PROCESS</a:t>
             </a:r>
           </a:p>
         </p:txBody>
@@ -12059,8 +12301,8 @@
         </p:nvSpPr>
         <p:spPr>
           <a:xfrm>
-            <a:off x="640080" y="1371600"/>
-            <a:ext cx="7863840" cy="4572000"/>
+            <a:off x="822960" y="1234440"/>
+            <a:ext cx="7498079" cy="4800600"/>
           </a:xfrm>
           <a:prstGeom prst="rect">
             <a:avLst/>
@@ -12075,11 +12317,11 @@
           <a:p>
             <a:pPr>
               <a:spcAft>
-                <a:spcPts val="600"/>
-              </a:spcAft>
-              <a:defRPr sz="1700">
-                <a:solidFill>
-                  <a:srgbClr val="333333"/>
+                <a:spcPts val="500"/>
+              </a:spcAft>
+              <a:defRPr sz="1500">
+                <a:solidFill>
+                  <a:srgbClr val="E2E8F0"/>
                 </a:solidFill>
                 <a:latin typeface="Calibri"/>
               </a:defRPr>
@@ -12091,11 +12333,11 @@
           <a:p>
             <a:pPr>
               <a:spcAft>
-                <a:spcPts val="600"/>
-              </a:spcAft>
-              <a:defRPr sz="1700">
-                <a:solidFill>
-                  <a:srgbClr val="333333"/>
+                <a:spcPts val="500"/>
+              </a:spcAft>
+              <a:defRPr sz="1500">
+                <a:solidFill>
+                  <a:srgbClr val="E2E8F0"/>
                 </a:solidFill>
                 <a:latin typeface="Calibri"/>
               </a:defRPr>
@@ -12107,11 +12349,11 @@
           <a:p>
             <a:pPr>
               <a:spcAft>
-                <a:spcPts val="600"/>
-              </a:spcAft>
-              <a:defRPr sz="1700">
-                <a:solidFill>
-                  <a:srgbClr val="333333"/>
+                <a:spcPts val="500"/>
+              </a:spcAft>
+              <a:defRPr sz="1500">
+                <a:solidFill>
+                  <a:srgbClr val="E2E8F0"/>
                 </a:solidFill>
                 <a:latin typeface="Calibri"/>
               </a:defRPr>
@@ -12123,11 +12365,11 @@
           <a:p>
             <a:pPr>
               <a:spcAft>
-                <a:spcPts val="600"/>
-              </a:spcAft>
-              <a:defRPr sz="1700">
-                <a:solidFill>
-                  <a:srgbClr val="333333"/>
+                <a:spcPts val="500"/>
+              </a:spcAft>
+              <a:defRPr sz="1500">
+                <a:solidFill>
+                  <a:srgbClr val="E2E8F0"/>
                 </a:solidFill>
                 <a:latin typeface="Calibri"/>
               </a:defRPr>
@@ -12139,11 +12381,11 @@
           <a:p>
             <a:pPr>
               <a:spcAft>
-                <a:spcPts val="600"/>
-              </a:spcAft>
-              <a:defRPr sz="1700">
-                <a:solidFill>
-                  <a:srgbClr val="333333"/>
+                <a:spcPts val="500"/>
+              </a:spcAft>
+              <a:defRPr sz="1500">
+                <a:solidFill>
+                  <a:srgbClr val="E2E8F0"/>
                 </a:solidFill>
                 <a:latin typeface="Calibri"/>
               </a:defRPr>
@@ -12155,27 +12397,27 @@
           <a:p>
             <a:pPr>
               <a:spcAft>
-                <a:spcPts val="600"/>
-              </a:spcAft>
-              <a:defRPr sz="1700">
-                <a:solidFill>
-                  <a:srgbClr val="333333"/>
-                </a:solidFill>
-                <a:latin typeface="Calibri"/>
-              </a:defRPr>
-            </a:pPr>
-            <a:r>
-              <a:t>Certification is valid for a defined cycle (typically 3 years)</a:t>
-            </a:r>
-          </a:p>
-          <a:p>
-            <a:pPr>
-              <a:spcAft>
-                <a:spcPts val="600"/>
-              </a:spcAft>
-              <a:defRPr sz="1700">
-                <a:solidFill>
-                  <a:srgbClr val="333333"/>
+                <a:spcPts val="500"/>
+              </a:spcAft>
+              <a:defRPr sz="1500">
+                <a:solidFill>
+                  <a:srgbClr val="E2E8F0"/>
+                </a:solidFill>
+                <a:latin typeface="Calibri"/>
+              </a:defRPr>
+            </a:pPr>
+            <a:r>
+              <a:t>Certification valid for a defined cycle (typically 3 years)</a:t>
+            </a:r>
+          </a:p>
+          <a:p>
+            <a:pPr>
+              <a:spcAft>
+                <a:spcPts val="500"/>
+              </a:spcAft>
+              <a:defRPr sz="1500">
+                <a:solidFill>
+                  <a:srgbClr val="E2E8F0"/>
                 </a:solidFill>
                 <a:latin typeface="Calibri"/>
               </a:defRPr>
@@ -12194,8 +12436,8 @@
         </p:nvSpPr>
         <p:spPr>
           <a:xfrm>
-            <a:off x="274320" y="6400800"/>
-            <a:ext cx="8595360" cy="365760"/>
+            <a:off x="457200" y="6400800"/>
+            <a:ext cx="8229600" cy="274320"/>
           </a:xfrm>
           <a:prstGeom prst="rect">
             <a:avLst/>
@@ -12209,15 +12451,15 @@
           <a:lstStyle/>
           <a:p>
             <a:pPr algn="ctr">
-              <a:defRPr sz="900" b="0">
-                <a:solidFill>
-                  <a:srgbClr val="999999"/>
-                </a:solidFill>
-                <a:latin typeface="Calibri"/>
-              </a:defRPr>
-            </a:pPr>
-            <a:r>
-              <a:t>Ohio Division of EMS  |  ems.ohio.gov</a:t>
+              <a:defRPr sz="800" b="0">
+                <a:solidFill>
+                  <a:srgbClr val="64748B"/>
+                </a:solidFill>
+                <a:latin typeface="Calibri"/>
+              </a:defRPr>
+            </a:pPr>
+            <a:r>
+              <a:t>ems.ohio.gov  |  Mileage Design</a:t>
             </a:r>
           </a:p>
         </p:txBody>
@@ -12236,7 +12478,7 @@
     <p:bg>
       <p:bgPr>
         <a:solidFill>
-          <a:srgbClr val="FFFFFF"/>
+          <a:srgbClr val="0B1A33"/>
         </a:solidFill>
         <a:effectLst/>
       </p:bgPr>
@@ -12250,20 +12492,20 @@
       <p:grpSpPr/>
       <p:sp>
         <p:nvSpPr>
-          <p:cNvPr id="2" name="Rectangle 1"/>
+          <p:cNvPr id="2" name="Rounded Rectangle 1"/>
           <p:cNvSpPr/>
           <p:nvPr/>
         </p:nvSpPr>
         <p:spPr>
           <a:xfrm>
-            <a:off x="0" y="0"/>
-            <a:ext cx="9144000" cy="1097280"/>
-          </a:xfrm>
-          <a:prstGeom prst="rect">
+            <a:off x="365760" y="274320"/>
+            <a:ext cx="8412480" cy="6309360"/>
+          </a:xfrm>
+          <a:prstGeom prst="roundRect">
             <a:avLst/>
           </a:prstGeom>
           <a:solidFill>
-            <a:srgbClr val="1B365F"/>
+            <a:srgbClr val="122647"/>
           </a:solidFill>
           <a:ln>
             <a:noFill/>
@@ -12299,14 +12541,14 @@
         </p:nvSpPr>
         <p:spPr>
           <a:xfrm>
-            <a:off x="0" y="1097280"/>
-            <a:ext cx="9144000" cy="45720"/>
+            <a:off x="365760" y="274320"/>
+            <a:ext cx="8412480" cy="36576"/>
           </a:xfrm>
           <a:prstGeom prst="rect">
             <a:avLst/>
           </a:prstGeom>
           <a:solidFill>
-            <a:srgbClr val="CE1A2B"/>
+            <a:srgbClr val="2E75F7"/>
           </a:solidFill>
           <a:ln>
             <a:noFill/>
@@ -12342,8 +12584,8 @@
         </p:nvSpPr>
         <p:spPr>
           <a:xfrm>
-            <a:off x="457200" y="137160"/>
-            <a:ext cx="8229600" cy="822960"/>
+            <a:off x="731520" y="502920"/>
+            <a:ext cx="7680960" cy="640080"/>
           </a:xfrm>
           <a:prstGeom prst="rect">
             <a:avLst/>
@@ -12357,7 +12599,7 @@
           <a:lstStyle/>
           <a:p>
             <a:pPr algn="l">
-              <a:defRPr sz="2800" b="1">
+              <a:defRPr sz="2400" b="1">
                 <a:solidFill>
                   <a:srgbClr val="FFFFFF"/>
                 </a:solidFill>
@@ -12365,7 +12607,7 @@
               </a:defRPr>
             </a:pPr>
             <a:r>
-              <a:t>Fire Certification Pathways</a:t>
+              <a:t>FIRE CERTIFICATION PATHWAYS</a:t>
             </a:r>
           </a:p>
         </p:txBody>
@@ -12378,14 +12620,14 @@
         </p:nvSpPr>
         <p:spPr>
           <a:xfrm>
-            <a:off x="365760" y="1371600"/>
-            <a:ext cx="3931920" cy="457200"/>
+            <a:off x="548640" y="1280160"/>
+            <a:ext cx="3840480" cy="411480"/>
           </a:xfrm>
           <a:prstGeom prst="roundRect">
             <a:avLst/>
           </a:prstGeom>
           <a:solidFill>
-            <a:srgbClr val="1B365F"/>
+            <a:srgbClr val="2E75F7"/>
           </a:solidFill>
           <a:ln>
             <a:noFill/>
@@ -12421,8 +12663,8 @@
         </p:nvSpPr>
         <p:spPr>
           <a:xfrm>
-            <a:off x="457200" y="1389888"/>
-            <a:ext cx="3749039" cy="411480"/>
+            <a:off x="640080" y="1298448"/>
+            <a:ext cx="3657600" cy="365760"/>
           </a:xfrm>
           <a:prstGeom prst="rect">
             <a:avLst/>
@@ -12436,7 +12678,7 @@
           <a:lstStyle/>
           <a:p>
             <a:pPr algn="ctr">
-              <a:defRPr sz="1600" b="1">
+              <a:defRPr sz="1300" b="1">
                 <a:solidFill>
                   <a:srgbClr val="FFFFFF"/>
                 </a:solidFill>
@@ -12457,14 +12699,14 @@
         </p:nvSpPr>
         <p:spPr>
           <a:xfrm>
-            <a:off x="4846320" y="1371600"/>
-            <a:ext cx="3931920" cy="457200"/>
+            <a:off x="4754880" y="1280160"/>
+            <a:ext cx="3840480" cy="411480"/>
           </a:xfrm>
           <a:prstGeom prst="roundRect">
             <a:avLst/>
           </a:prstGeom>
           <a:solidFill>
-            <a:srgbClr val="CE1A2B"/>
+            <a:srgbClr val="1A3566"/>
           </a:solidFill>
           <a:ln>
             <a:noFill/>
@@ -12500,8 +12742,8 @@
         </p:nvSpPr>
         <p:spPr>
           <a:xfrm>
-            <a:off x="4937760" y="1389888"/>
-            <a:ext cx="3749039" cy="411480"/>
+            <a:off x="4846320" y="1298448"/>
+            <a:ext cx="3657600" cy="365760"/>
           </a:xfrm>
           <a:prstGeom prst="rect">
             <a:avLst/>
@@ -12515,7 +12757,7 @@
           <a:lstStyle/>
           <a:p>
             <a:pPr algn="ctr">
-              <a:defRPr sz="1600" b="1">
+              <a:defRPr sz="1300" b="1">
                 <a:solidFill>
                   <a:srgbClr val="FFFFFF"/>
                 </a:solidFill>
@@ -12536,8 +12778,8 @@
         </p:nvSpPr>
         <p:spPr>
           <a:xfrm>
-            <a:off x="548640" y="2011680"/>
-            <a:ext cx="3657600" cy="4114800"/>
+            <a:off x="731520" y="1828800"/>
+            <a:ext cx="3657600" cy="4389120"/>
           </a:xfrm>
           <a:prstGeom prst="rect">
             <a:avLst/>
@@ -12552,11 +12794,11 @@
           <a:p>
             <a:pPr>
               <a:spcAft>
-                <a:spcPts val="500"/>
-              </a:spcAft>
-              <a:defRPr sz="1400">
-                <a:solidFill>
-                  <a:srgbClr val="333333"/>
+                <a:spcPts val="400"/>
+              </a:spcAft>
+              <a:defRPr sz="1300">
+                <a:solidFill>
+                  <a:srgbClr val="E2E8F0"/>
                 </a:solidFill>
                 <a:latin typeface="Calibri"/>
               </a:defRPr>
@@ -12568,11 +12810,11 @@
           <a:p>
             <a:pPr>
               <a:spcAft>
-                <a:spcPts val="500"/>
-              </a:spcAft>
-              <a:defRPr sz="1400">
-                <a:solidFill>
-                  <a:srgbClr val="333333"/>
+                <a:spcPts val="400"/>
+              </a:spcAft>
+              <a:defRPr sz="1300">
+                <a:solidFill>
+                  <a:srgbClr val="E2E8F0"/>
                 </a:solidFill>
                 <a:latin typeface="Calibri"/>
               </a:defRPr>
@@ -12584,11 +12826,11 @@
           <a:p>
             <a:pPr>
               <a:spcAft>
-                <a:spcPts val="500"/>
-              </a:spcAft>
-              <a:defRPr sz="1400">
-                <a:solidFill>
-                  <a:srgbClr val="333333"/>
+                <a:spcPts val="400"/>
+              </a:spcAft>
+              <a:defRPr sz="1300">
+                <a:solidFill>
+                  <a:srgbClr val="E2E8F0"/>
                 </a:solidFill>
                 <a:latin typeface="Calibri"/>
               </a:defRPr>
@@ -12600,27 +12842,27 @@
           <a:p>
             <a:pPr>
               <a:spcAft>
-                <a:spcPts val="500"/>
-              </a:spcAft>
-              <a:defRPr sz="1400">
-                <a:solidFill>
-                  <a:srgbClr val="333333"/>
-                </a:solidFill>
-                <a:latin typeface="Calibri"/>
-              </a:defRPr>
-            </a:pPr>
-            <a:r>
-              <a:t>Firefighter II Transition — 84 hours (for existing FF I)</a:t>
-            </a:r>
-          </a:p>
-          <a:p>
-            <a:pPr>
-              <a:spcAft>
-                <a:spcPts val="500"/>
-              </a:spcAft>
-              <a:defRPr sz="1400">
-                <a:solidFill>
-                  <a:srgbClr val="333333"/>
+                <a:spcPts val="400"/>
+              </a:spcAft>
+              <a:defRPr sz="1300">
+                <a:solidFill>
+                  <a:srgbClr val="E2E8F0"/>
+                </a:solidFill>
+                <a:latin typeface="Calibri"/>
+              </a:defRPr>
+            </a:pPr>
+            <a:r>
+              <a:t>Firefighter II Transition — 84 hours (existing FF I)</a:t>
+            </a:r>
+          </a:p>
+          <a:p>
+            <a:pPr>
+              <a:spcAft>
+                <a:spcPts val="400"/>
+              </a:spcAft>
+              <a:defRPr sz="1300">
+                <a:solidFill>
+                  <a:srgbClr val="E2E8F0"/>
                 </a:solidFill>
                 <a:latin typeface="Calibri"/>
               </a:defRPr>
@@ -12639,8 +12881,8 @@
         </p:nvSpPr>
         <p:spPr>
           <a:xfrm>
-            <a:off x="5029200" y="2011680"/>
-            <a:ext cx="3657600" cy="4114800"/>
+            <a:off x="4937760" y="1828800"/>
+            <a:ext cx="3657600" cy="4389120"/>
           </a:xfrm>
           <a:prstGeom prst="rect">
             <a:avLst/>
@@ -12655,75 +12897,75 @@
           <a:p>
             <a:pPr>
               <a:spcAft>
-                <a:spcPts val="500"/>
-              </a:spcAft>
-              <a:defRPr sz="1400">
-                <a:solidFill>
-                  <a:srgbClr val="333333"/>
-                </a:solidFill>
-                <a:latin typeface="Calibri"/>
-              </a:defRPr>
-            </a:pPr>
-            <a:r>
-              <a:t>Fire Safety Inspector — Code enforcement and inspection skills</a:t>
-            </a:r>
-          </a:p>
-          <a:p>
-            <a:pPr>
-              <a:spcAft>
-                <a:spcPts val="500"/>
-              </a:spcAft>
-              <a:defRPr sz="1400">
-                <a:solidFill>
-                  <a:srgbClr val="333333"/>
-                </a:solidFill>
-                <a:latin typeface="Calibri"/>
-              </a:defRPr>
-            </a:pPr>
-            <a:r>
-              <a:t>Fire &amp; EMS Instructor I — Classroom instruction qualification</a:t>
-            </a:r>
-          </a:p>
-          <a:p>
-            <a:pPr>
-              <a:spcAft>
-                <a:spcPts val="500"/>
-              </a:spcAft>
-              <a:defRPr sz="1400">
-                <a:solidFill>
-                  <a:srgbClr val="333333"/>
-                </a:solidFill>
-                <a:latin typeface="Calibri"/>
-              </a:defRPr>
-            </a:pPr>
-            <a:r>
-              <a:t>Fire &amp; EMS Instructor II — Course design and program management</a:t>
-            </a:r>
-          </a:p>
-          <a:p>
-            <a:pPr>
-              <a:spcAft>
-                <a:spcPts val="500"/>
-              </a:spcAft>
-              <a:defRPr sz="1400">
-                <a:solidFill>
-                  <a:srgbClr val="333333"/>
-                </a:solidFill>
-                <a:latin typeface="Calibri"/>
-              </a:defRPr>
-            </a:pPr>
-            <a:r>
-              <a:t>Live Fire Instructor — Required for live fire training exercises</a:t>
-            </a:r>
-          </a:p>
-          <a:p>
-            <a:pPr>
-              <a:spcAft>
-                <a:spcPts val="500"/>
-              </a:spcAft>
-              <a:defRPr sz="1400">
-                <a:solidFill>
-                  <a:srgbClr val="333333"/>
+                <a:spcPts val="400"/>
+              </a:spcAft>
+              <a:defRPr sz="1300">
+                <a:solidFill>
+                  <a:srgbClr val="E2E8F0"/>
+                </a:solidFill>
+                <a:latin typeface="Calibri"/>
+              </a:defRPr>
+            </a:pPr>
+            <a:r>
+              <a:t>Fire Safety Inspector — Code enforcement and inspection</a:t>
+            </a:r>
+          </a:p>
+          <a:p>
+            <a:pPr>
+              <a:spcAft>
+                <a:spcPts val="400"/>
+              </a:spcAft>
+              <a:defRPr sz="1300">
+                <a:solidFill>
+                  <a:srgbClr val="E2E8F0"/>
+                </a:solidFill>
+                <a:latin typeface="Calibri"/>
+              </a:defRPr>
+            </a:pPr>
+            <a:r>
+              <a:t>Fire &amp; EMS Instructor I — Classroom instruction</a:t>
+            </a:r>
+          </a:p>
+          <a:p>
+            <a:pPr>
+              <a:spcAft>
+                <a:spcPts val="400"/>
+              </a:spcAft>
+              <a:defRPr sz="1300">
+                <a:solidFill>
+                  <a:srgbClr val="E2E8F0"/>
+                </a:solidFill>
+                <a:latin typeface="Calibri"/>
+              </a:defRPr>
+            </a:pPr>
+            <a:r>
+              <a:t>Fire &amp; EMS Instructor II — Course design &amp; program mgmt</a:t>
+            </a:r>
+          </a:p>
+          <a:p>
+            <a:pPr>
+              <a:spcAft>
+                <a:spcPts val="400"/>
+              </a:spcAft>
+              <a:defRPr sz="1300">
+                <a:solidFill>
+                  <a:srgbClr val="E2E8F0"/>
+                </a:solidFill>
+                <a:latin typeface="Calibri"/>
+              </a:defRPr>
+            </a:pPr>
+            <a:r>
+              <a:t>Live Fire Instructor — Required for live fire training</a:t>
+            </a:r>
+          </a:p>
+          <a:p>
+            <a:pPr>
+              <a:spcAft>
+                <a:spcPts val="400"/>
+              </a:spcAft>
+              <a:defRPr sz="1300">
+                <a:solidFill>
+                  <a:srgbClr val="E2E8F0"/>
                 </a:solidFill>
                 <a:latin typeface="Calibri"/>
               </a:defRPr>
@@ -12742,8 +12984,8 @@
         </p:nvSpPr>
         <p:spPr>
           <a:xfrm>
-            <a:off x="274320" y="6400800"/>
-            <a:ext cx="8595360" cy="365760"/>
+            <a:off x="457200" y="6400800"/>
+            <a:ext cx="8229600" cy="274320"/>
           </a:xfrm>
           <a:prstGeom prst="rect">
             <a:avLst/>
@@ -12757,15 +12999,15 @@
           <a:lstStyle/>
           <a:p>
             <a:pPr algn="ctr">
-              <a:defRPr sz="900" b="0">
-                <a:solidFill>
-                  <a:srgbClr val="999999"/>
-                </a:solidFill>
-                <a:latin typeface="Calibri"/>
-              </a:defRPr>
-            </a:pPr>
-            <a:r>
-              <a:t>Ohio Division of EMS  |  ems.ohio.gov</a:t>
+              <a:defRPr sz="800" b="0">
+                <a:solidFill>
+                  <a:srgbClr val="64748B"/>
+                </a:solidFill>
+                <a:latin typeface="Calibri"/>
+              </a:defRPr>
+            </a:pPr>
+            <a:r>
+              <a:t>ems.ohio.gov  |  Mileage Design</a:t>
             </a:r>
           </a:p>
         </p:txBody>
@@ -12784,7 +13026,7 @@
     <p:bg>
       <p:bgPr>
         <a:solidFill>
-          <a:srgbClr val="FFFFFF"/>
+          <a:srgbClr val="0B1A33"/>
         </a:solidFill>
         <a:effectLst/>
       </p:bgPr>
@@ -12798,20 +13040,20 @@
       <p:grpSpPr/>
       <p:sp>
         <p:nvSpPr>
-          <p:cNvPr id="2" name="Rectangle 1"/>
+          <p:cNvPr id="2" name="Rounded Rectangle 1"/>
           <p:cNvSpPr/>
           <p:nvPr/>
         </p:nvSpPr>
         <p:spPr>
           <a:xfrm>
-            <a:off x="0" y="0"/>
-            <a:ext cx="9144000" cy="1097280"/>
-          </a:xfrm>
-          <a:prstGeom prst="rect">
+            <a:off x="365760" y="274320"/>
+            <a:ext cx="8412480" cy="6309360"/>
+          </a:xfrm>
+          <a:prstGeom prst="roundRect">
             <a:avLst/>
           </a:prstGeom>
           <a:solidFill>
-            <a:srgbClr val="1B365F"/>
+            <a:srgbClr val="122647"/>
           </a:solidFill>
           <a:ln>
             <a:noFill/>
@@ -12847,14 +13089,14 @@
         </p:nvSpPr>
         <p:spPr>
           <a:xfrm>
-            <a:off x="0" y="1097280"/>
-            <a:ext cx="9144000" cy="45720"/>
+            <a:off x="365760" y="274320"/>
+            <a:ext cx="8412480" cy="36576"/>
           </a:xfrm>
           <a:prstGeom prst="rect">
             <a:avLst/>
           </a:prstGeom>
           <a:solidFill>
-            <a:srgbClr val="CE1A2B"/>
+            <a:srgbClr val="2E75F7"/>
           </a:solidFill>
           <a:ln>
             <a:noFill/>
@@ -12890,8 +13132,8 @@
         </p:nvSpPr>
         <p:spPr>
           <a:xfrm>
-            <a:off x="457200" y="137160"/>
-            <a:ext cx="8229600" cy="822960"/>
+            <a:off x="731520" y="502920"/>
+            <a:ext cx="7680960" cy="640080"/>
           </a:xfrm>
           <a:prstGeom prst="rect">
             <a:avLst/>
@@ -12905,7 +13147,7 @@
           <a:lstStyle/>
           <a:p>
             <a:pPr algn="l">
-              <a:defRPr sz="2800" b="1">
+              <a:defRPr sz="2400" b="1">
                 <a:solidFill>
                   <a:srgbClr val="FFFFFF"/>
                 </a:solidFill>
@@ -12913,7 +13155,7 @@
               </a:defRPr>
             </a:pPr>
             <a:r>
-              <a:t>Fire Instructor Certification — OAC 4765-21</a:t>
+              <a:t>FIRE INSTRUCTOR CERTIFICATION — OAC 4765-21</a:t>
             </a:r>
           </a:p>
         </p:txBody>
@@ -12926,8 +13168,8 @@
         </p:nvSpPr>
         <p:spPr>
           <a:xfrm>
-            <a:off x="640080" y="1371600"/>
-            <a:ext cx="7863840" cy="4572000"/>
+            <a:off x="822960" y="1234440"/>
+            <a:ext cx="7498079" cy="4800600"/>
           </a:xfrm>
           <a:prstGeom prst="rect">
             <a:avLst/>
@@ -12942,11 +13184,11 @@
           <a:p>
             <a:pPr>
               <a:spcAft>
-                <a:spcPts val="600"/>
-              </a:spcAft>
-              <a:defRPr sz="1700">
-                <a:solidFill>
-                  <a:srgbClr val="333333"/>
+                <a:spcPts val="500"/>
+              </a:spcAft>
+              <a:defRPr sz="1500">
+                <a:solidFill>
+                  <a:srgbClr val="E2E8F0"/>
                 </a:solidFill>
                 <a:latin typeface="Calibri"/>
               </a:defRPr>
@@ -12958,11 +13200,11 @@
           <a:p>
             <a:pPr>
               <a:spcAft>
-                <a:spcPts val="600"/>
-              </a:spcAft>
-              <a:defRPr sz="1700">
-                <a:solidFill>
-                  <a:srgbClr val="333333"/>
+                <a:spcPts val="500"/>
+              </a:spcAft>
+              <a:defRPr sz="1500">
+                <a:solidFill>
+                  <a:srgbClr val="E2E8F0"/>
                 </a:solidFill>
                 <a:latin typeface="Calibri"/>
               </a:defRPr>
@@ -12974,139 +13216,139 @@
           <a:p>
             <a:pPr lvl="1">
               <a:spcAft>
-                <a:spcPts val="600"/>
+                <a:spcPts val="500"/>
+              </a:spcAft>
+              <a:defRPr sz="1300">
+                <a:solidFill>
+                  <a:srgbClr val="94A3B8"/>
+                </a:solidFill>
+                <a:latin typeface="Calibri"/>
+              </a:defRPr>
+            </a:pPr>
+            <a:r>
+              <a:t>Includes 4-hour fire service training module</a:t>
+            </a:r>
+          </a:p>
+          <a:p>
+            <a:pPr lvl="1">
+              <a:spcAft>
+                <a:spcPts val="500"/>
+              </a:spcAft>
+              <a:defRPr sz="1300">
+                <a:solidFill>
+                  <a:srgbClr val="94A3B8"/>
+                </a:solidFill>
+                <a:latin typeface="Calibri"/>
+              </a:defRPr>
+            </a:pPr>
+            <a:r>
+              <a:t>Includes 4-hour live fire training awareness module</a:t>
+            </a:r>
+          </a:p>
+          <a:p>
+            <a:pPr lvl="1">
+              <a:spcAft>
+                <a:spcPts val="500"/>
+              </a:spcAft>
+              <a:defRPr sz="1300">
+                <a:solidFill>
+                  <a:srgbClr val="94A3B8"/>
+                </a:solidFill>
+                <a:latin typeface="Calibri"/>
+              </a:defRPr>
+            </a:pPr>
+            <a:r>
+              <a:t>From the ‘Ohio Fire and EMS Instructor Curriculum’</a:t>
+            </a:r>
+          </a:p>
+          <a:p>
+            <a:pPr>
+              <a:spcAft>
+                <a:spcPts val="500"/>
               </a:spcAft>
               <a:defRPr sz="1500">
                 <a:solidFill>
-                  <a:srgbClr val="555555"/>
-                </a:solidFill>
-                <a:latin typeface="Calibri"/>
-              </a:defRPr>
-            </a:pPr>
-            <a:r>
-              <a:t>Includes 4-hour fire service training module</a:t>
+                  <a:srgbClr val="E2E8F0"/>
+                </a:solidFill>
+                <a:latin typeface="Calibri"/>
+              </a:defRPr>
+            </a:pPr>
+            <a:r>
+              <a:t>Pass the fire instructor knowledge examination</a:t>
+            </a:r>
+          </a:p>
+          <a:p>
+            <a:pPr>
+              <a:spcAft>
+                <a:spcPts val="500"/>
+              </a:spcAft>
+              <a:defRPr sz="1500">
+                <a:solidFill>
+                  <a:srgbClr val="E2E8F0"/>
+                </a:solidFill>
+                <a:latin typeface="Calibri"/>
+              </a:defRPr>
+            </a:pPr>
+            <a:r>
+              <a:t>Pass the instructional methods examination</a:t>
+            </a:r>
+          </a:p>
+          <a:p>
+            <a:pPr>
+              <a:spcAft>
+                <a:spcPts val="500"/>
+              </a:spcAft>
+              <a:defRPr sz="1500">
+                <a:solidFill>
+                  <a:srgbClr val="E2E8F0"/>
+                </a:solidFill>
+                <a:latin typeface="Calibri"/>
+              </a:defRPr>
+            </a:pPr>
+            <a:r>
+              <a:t>Complete 10 hours of supervised teaching:</a:t>
             </a:r>
           </a:p>
           <a:p>
             <a:pPr lvl="1">
               <a:spcAft>
-                <a:spcPts val="600"/>
+                <a:spcPts val="500"/>
+              </a:spcAft>
+              <a:defRPr sz="1300">
+                <a:solidFill>
+                  <a:srgbClr val="94A3B8"/>
+                </a:solidFill>
+                <a:latin typeface="Calibri"/>
+              </a:defRPr>
+            </a:pPr>
+            <a:r>
+              <a:t>Minimum 6 hours classroom lecture</a:t>
+            </a:r>
+          </a:p>
+          <a:p>
+            <a:pPr lvl="1">
+              <a:spcAft>
+                <a:spcPts val="500"/>
+              </a:spcAft>
+              <a:defRPr sz="1300">
+                <a:solidFill>
+                  <a:srgbClr val="94A3B8"/>
+                </a:solidFill>
+                <a:latin typeface="Calibri"/>
+              </a:defRPr>
+            </a:pPr>
+            <a:r>
+              <a:t>Maximum 4 hours practical skills instruction</a:t>
+            </a:r>
+          </a:p>
+          <a:p>
+            <a:pPr>
+              <a:spcAft>
+                <a:spcPts val="500"/>
               </a:spcAft>
               <a:defRPr sz="1500">
                 <a:solidFill>
-                  <a:srgbClr val="555555"/>
-                </a:solidFill>
-                <a:latin typeface="Calibri"/>
-              </a:defRPr>
-            </a:pPr>
-            <a:r>
-              <a:t>Includes 4-hour live fire training awareness module</a:t>
-            </a:r>
-          </a:p>
-          <a:p>
-            <a:pPr lvl="1">
-              <a:spcAft>
-                <a:spcPts val="600"/>
-              </a:spcAft>
-              <a:defRPr sz="1500">
-                <a:solidFill>
-                  <a:srgbClr val="555555"/>
-                </a:solidFill>
-                <a:latin typeface="Calibri"/>
-              </a:defRPr>
-            </a:pPr>
-            <a:r>
-              <a:t>From the 'Ohio Fire and EMS Instructor Curriculum'</a:t>
-            </a:r>
-          </a:p>
-          <a:p>
-            <a:pPr>
-              <a:spcAft>
-                <a:spcPts val="600"/>
-              </a:spcAft>
-              <a:defRPr sz="1700">
-                <a:solidFill>
-                  <a:srgbClr val="333333"/>
-                </a:solidFill>
-                <a:latin typeface="Calibri"/>
-              </a:defRPr>
-            </a:pPr>
-            <a:r>
-              <a:t>Pass the fire instructor knowledge examination</a:t>
-            </a:r>
-          </a:p>
-          <a:p>
-            <a:pPr>
-              <a:spcAft>
-                <a:spcPts val="600"/>
-              </a:spcAft>
-              <a:defRPr sz="1700">
-                <a:solidFill>
-                  <a:srgbClr val="333333"/>
-                </a:solidFill>
-                <a:latin typeface="Calibri"/>
-              </a:defRPr>
-            </a:pPr>
-            <a:r>
-              <a:t>Pass the instructional methods examination</a:t>
-            </a:r>
-          </a:p>
-          <a:p>
-            <a:pPr>
-              <a:spcAft>
-                <a:spcPts val="600"/>
-              </a:spcAft>
-              <a:defRPr sz="1700">
-                <a:solidFill>
-                  <a:srgbClr val="333333"/>
-                </a:solidFill>
-                <a:latin typeface="Calibri"/>
-              </a:defRPr>
-            </a:pPr>
-            <a:r>
-              <a:t>Complete 10 hours of supervised teaching:</a:t>
-            </a:r>
-          </a:p>
-          <a:p>
-            <a:pPr lvl="1">
-              <a:spcAft>
-                <a:spcPts val="600"/>
-              </a:spcAft>
-              <a:defRPr sz="1500">
-                <a:solidFill>
-                  <a:srgbClr val="555555"/>
-                </a:solidFill>
-                <a:latin typeface="Calibri"/>
-              </a:defRPr>
-            </a:pPr>
-            <a:r>
-              <a:t>Minimum 6 hours classroom lecture</a:t>
-            </a:r>
-          </a:p>
-          <a:p>
-            <a:pPr lvl="1">
-              <a:spcAft>
-                <a:spcPts val="600"/>
-              </a:spcAft>
-              <a:defRPr sz="1500">
-                <a:solidFill>
-                  <a:srgbClr val="555555"/>
-                </a:solidFill>
-                <a:latin typeface="Calibri"/>
-              </a:defRPr>
-            </a:pPr>
-            <a:r>
-              <a:t>Maximum 4 hours practical skills instruction</a:t>
-            </a:r>
-          </a:p>
-          <a:p>
-            <a:pPr>
-              <a:spcAft>
-                <a:spcPts val="600"/>
-              </a:spcAft>
-              <a:defRPr sz="1700">
-                <a:solidFill>
-                  <a:srgbClr val="333333"/>
+                  <a:srgbClr val="E2E8F0"/>
                 </a:solidFill>
                 <a:latin typeface="Calibri"/>
               </a:defRPr>
@@ -13125,8 +13367,8 @@
         </p:nvSpPr>
         <p:spPr>
           <a:xfrm>
-            <a:off x="274320" y="6400800"/>
-            <a:ext cx="8595360" cy="365760"/>
+            <a:off x="457200" y="6400800"/>
+            <a:ext cx="8229600" cy="274320"/>
           </a:xfrm>
           <a:prstGeom prst="rect">
             <a:avLst/>
@@ -13140,15 +13382,15 @@
           <a:lstStyle/>
           <a:p>
             <a:pPr algn="ctr">
-              <a:defRPr sz="900" b="0">
-                <a:solidFill>
-                  <a:srgbClr val="999999"/>
-                </a:solidFill>
-                <a:latin typeface="Calibri"/>
-              </a:defRPr>
-            </a:pPr>
-            <a:r>
-              <a:t>Ohio Division of EMS  |  ems.ohio.gov</a:t>
+              <a:defRPr sz="800" b="0">
+                <a:solidFill>
+                  <a:srgbClr val="64748B"/>
+                </a:solidFill>
+                <a:latin typeface="Calibri"/>
+              </a:defRPr>
+            </a:pPr>
+            <a:r>
+              <a:t>ems.ohio.gov  |  Mileage Design</a:t>
             </a:r>
           </a:p>
         </p:txBody>
